--- a/GRC_Roadmap_2026.pptx
+++ b/GRC_Roadmap_2026.pptx
@@ -2012,9 +2012,9 @@
                 <a:solidFill>
                   <a:srgbClr val="0E7C86"/>
                 </a:solidFill>
-                <a:latin typeface="Calibri" pitchFamily="34" charset="0"/>
-                <a:ea typeface="Calibri" pitchFamily="34" charset="-122"/>
-                <a:cs typeface="Calibri" pitchFamily="34" charset="-120"/>
+                <a:latin typeface="IBM Plex Mono" pitchFamily="34" charset="0"/>
+                <a:ea typeface="IBM Plex Mono" pitchFamily="34" charset="-122"/>
+                <a:cs typeface="IBM Plex Mono" pitchFamily="34" charset="-120"/>
               </a:rPr>
               <a:t>STRATEGIC INITIATIVE  |  2026</a:t>
             </a:r>
@@ -2051,9 +2051,9 @@
                 <a:solidFill>
                   <a:srgbClr val="FFFFFF"/>
                 </a:solidFill>
-                <a:latin typeface="Georgia" pitchFamily="34" charset="0"/>
-                <a:ea typeface="Georgia" pitchFamily="34" charset="-122"/>
-                <a:cs typeface="Georgia" pitchFamily="34" charset="-120"/>
+                <a:latin typeface="IBM Plex Mono" pitchFamily="34" charset="0"/>
+                <a:ea typeface="IBM Plex Mono" pitchFamily="34" charset="-122"/>
+                <a:cs typeface="IBM Plex Mono" pitchFamily="34" charset="-120"/>
               </a:rPr>
               <a:t>GRC Program</a:t>
             </a:r>
@@ -2068,9 +2068,9 @@
                 <a:solidFill>
                   <a:srgbClr val="FFFFFF"/>
                 </a:solidFill>
-                <a:latin typeface="Georgia" pitchFamily="34" charset="0"/>
-                <a:ea typeface="Georgia" pitchFamily="34" charset="-122"/>
-                <a:cs typeface="Georgia" pitchFamily="34" charset="-120"/>
+                <a:latin typeface="IBM Plex Mono" pitchFamily="34" charset="0"/>
+                <a:ea typeface="IBM Plex Mono" pitchFamily="34" charset="-122"/>
+                <a:cs typeface="IBM Plex Mono" pitchFamily="34" charset="-120"/>
               </a:rPr>
               <a:t>Modernization Roadmap</a:t>
             </a:r>
@@ -2107,9 +2107,9 @@
                 <a:solidFill>
                   <a:srgbClr val="CADCFC"/>
                 </a:solidFill>
-                <a:latin typeface="Calibri" pitchFamily="34" charset="0"/>
-                <a:ea typeface="Calibri" pitchFamily="34" charset="-122"/>
-                <a:cs typeface="Calibri" pitchFamily="34" charset="-120"/>
+                <a:latin typeface="IBM Plex Mono" pitchFamily="34" charset="0"/>
+                <a:ea typeface="IBM Plex Mono" pitchFamily="34" charset="-122"/>
+                <a:cs typeface="IBM Plex Mono" pitchFamily="34" charset="-120"/>
               </a:rPr>
               <a:t>From Compliance Function to Strategic Business Enabler</a:t>
             </a:r>
@@ -2169,9 +2169,9 @@
                 <a:solidFill>
                   <a:srgbClr val="718096"/>
                 </a:solidFill>
-                <a:latin typeface="Calibri" pitchFamily="34" charset="0"/>
-                <a:ea typeface="Calibri" pitchFamily="34" charset="-122"/>
-                <a:cs typeface="Calibri" pitchFamily="34" charset="-120"/>
+                <a:latin typeface="IBM Plex Mono" pitchFamily="34" charset="0"/>
+                <a:ea typeface="IBM Plex Mono" pitchFamily="34" charset="-122"/>
+                <a:cs typeface="IBM Plex Mono" pitchFamily="34" charset="-120"/>
               </a:rPr>
               <a:t>Prepared for the CISO  |  March 2026  |  CONFIDENTIAL</a:t>
             </a:r>
@@ -2230,9 +2230,9 @@
                 <a:solidFill>
                   <a:srgbClr val="FFFFFF"/>
                 </a:solidFill>
-                <a:latin typeface="Georgia" pitchFamily="34" charset="0"/>
-                <a:ea typeface="Georgia" pitchFamily="34" charset="-122"/>
-                <a:cs typeface="Georgia" pitchFamily="34" charset="-120"/>
+                <a:latin typeface="IBM Plex Mono" pitchFamily="34" charset="0"/>
+                <a:ea typeface="IBM Plex Mono" pitchFamily="34" charset="-122"/>
+                <a:cs typeface="IBM Plex Mono" pitchFamily="34" charset="-120"/>
               </a:rPr>
               <a:t>2026</a:t>
             </a:r>
@@ -2269,9 +2269,9 @@
                 <a:solidFill>
                   <a:srgbClr val="CADCFC"/>
                 </a:solidFill>
-                <a:latin typeface="Calibri" pitchFamily="34" charset="0"/>
-                <a:ea typeface="Calibri" pitchFamily="34" charset="-122"/>
-                <a:cs typeface="Calibri" pitchFamily="34" charset="-120"/>
+                <a:latin typeface="IBM Plex Mono" pitchFamily="34" charset="0"/>
+                <a:ea typeface="IBM Plex Mono" pitchFamily="34" charset="-122"/>
+                <a:cs typeface="IBM Plex Mono" pitchFamily="34" charset="-120"/>
               </a:rPr>
               <a:t>Transformation Year</a:t>
             </a:r>
@@ -2308,9 +2308,9 @@
                 <a:solidFill>
                   <a:srgbClr val="FFFFFF"/>
                 </a:solidFill>
-                <a:latin typeface="Georgia" pitchFamily="34" charset="0"/>
-                <a:ea typeface="Georgia" pitchFamily="34" charset="-122"/>
-                <a:cs typeface="Georgia" pitchFamily="34" charset="-120"/>
+                <a:latin typeface="IBM Plex Mono" pitchFamily="34" charset="0"/>
+                <a:ea typeface="IBM Plex Mono" pitchFamily="34" charset="-122"/>
+                <a:cs typeface="IBM Plex Mono" pitchFamily="34" charset="-120"/>
               </a:rPr>
               <a:t>4</a:t>
             </a:r>
@@ -2347,9 +2347,9 @@
                 <a:solidFill>
                   <a:srgbClr val="CADCFC"/>
                 </a:solidFill>
-                <a:latin typeface="Calibri" pitchFamily="34" charset="0"/>
-                <a:ea typeface="Calibri" pitchFamily="34" charset="-122"/>
-                <a:cs typeface="Calibri" pitchFamily="34" charset="-120"/>
+                <a:latin typeface="IBM Plex Mono" pitchFamily="34" charset="0"/>
+                <a:ea typeface="IBM Plex Mono" pitchFamily="34" charset="-122"/>
+                <a:cs typeface="IBM Plex Mono" pitchFamily="34" charset="-120"/>
               </a:rPr>
               <a:t>Strategic Phases</a:t>
             </a:r>
@@ -2386,9 +2386,9 @@
                 <a:solidFill>
                   <a:srgbClr val="FFFFFF"/>
                 </a:solidFill>
-                <a:latin typeface="Georgia" pitchFamily="34" charset="0"/>
-                <a:ea typeface="Georgia" pitchFamily="34" charset="-122"/>
-                <a:cs typeface="Georgia" pitchFamily="34" charset="-120"/>
+                <a:latin typeface="IBM Plex Mono" pitchFamily="34" charset="0"/>
+                <a:ea typeface="IBM Plex Mono" pitchFamily="34" charset="-122"/>
+                <a:cs typeface="IBM Plex Mono" pitchFamily="34" charset="-120"/>
               </a:rPr>
               <a:t>12</a:t>
             </a:r>
@@ -2425,9 +2425,9 @@
                 <a:solidFill>
                   <a:srgbClr val="CADCFC"/>
                 </a:solidFill>
-                <a:latin typeface="Calibri" pitchFamily="34" charset="0"/>
-                <a:ea typeface="Calibri" pitchFamily="34" charset="-122"/>
-                <a:cs typeface="Calibri" pitchFamily="34" charset="-120"/>
+                <a:latin typeface="IBM Plex Mono" pitchFamily="34" charset="0"/>
+                <a:ea typeface="IBM Plex Mono" pitchFamily="34" charset="-122"/>
+                <a:cs typeface="IBM Plex Mono" pitchFamily="34" charset="-120"/>
               </a:rPr>
               <a:t>Key Initiatives</a:t>
             </a:r>
@@ -2496,9 +2496,9 @@
                 <a:solidFill>
                   <a:srgbClr val="1A1D23"/>
                 </a:solidFill>
-                <a:latin typeface="Georgia" pitchFamily="34" charset="0"/>
-                <a:ea typeface="Georgia" pitchFamily="34" charset="-122"/>
-                <a:cs typeface="Georgia" pitchFamily="34" charset="-120"/>
+                <a:latin typeface="IBM Plex Mono" pitchFamily="34" charset="0"/>
+                <a:ea typeface="IBM Plex Mono" pitchFamily="34" charset="-122"/>
+                <a:cs typeface="IBM Plex Mono" pitchFamily="34" charset="-120"/>
               </a:rPr>
               <a:t>Risks, Dependencies &amp; Change Management</a:t>
             </a:r>
@@ -2558,9 +2558,9 @@
                 <a:solidFill>
                   <a:srgbClr val="718096"/>
                 </a:solidFill>
-                <a:latin typeface="Calibri" pitchFamily="34" charset="0"/>
-                <a:ea typeface="Calibri" pitchFamily="34" charset="-122"/>
-                <a:cs typeface="Calibri" pitchFamily="34" charset="-120"/>
+                <a:latin typeface="IBM Plex Mono" pitchFamily="34" charset="0"/>
+                <a:ea typeface="IBM Plex Mono" pitchFamily="34" charset="-122"/>
+                <a:cs typeface="IBM Plex Mono" pitchFamily="34" charset="-120"/>
               </a:rPr>
               <a:t>CONFIDENTIAL  |  GRC Program Modernization Roadmap 2026</a:t>
             </a:r>
@@ -2597,9 +2597,9 @@
                 <a:solidFill>
                   <a:srgbClr val="718096"/>
                 </a:solidFill>
-                <a:latin typeface="Calibri" pitchFamily="34" charset="0"/>
-                <a:ea typeface="Calibri" pitchFamily="34" charset="-122"/>
-                <a:cs typeface="Calibri" pitchFamily="34" charset="-120"/>
+                <a:latin typeface="IBM Plex Mono" pitchFamily="34" charset="0"/>
+                <a:ea typeface="IBM Plex Mono" pitchFamily="34" charset="-122"/>
+                <a:cs typeface="IBM Plex Mono" pitchFamily="34" charset="-120"/>
               </a:rPr>
               <a:t>10</a:t>
             </a:r>
@@ -2650,16 +2650,16 @@
                           <a:solidFill>
                             <a:srgbClr val="FFFFFF"/>
                           </a:solidFill>
-                          <a:latin typeface="Calibri" pitchFamily="34" charset="0"/>
-                          <a:ea typeface="Calibri" pitchFamily="34" charset="-122"/>
-                          <a:cs typeface="Calibri" pitchFamily="34" charset="-120"/>
+                          <a:latin typeface="IBM Plex Mono" pitchFamily="34" charset="0"/>
+                          <a:ea typeface="IBM Plex Mono" pitchFamily="34" charset="-122"/>
+                          <a:cs typeface="IBM Plex Mono" pitchFamily="34" charset="-120"/>
                         </a:rPr>
                         <a:t>ID</a:t>
                       </a:r>
                       <a:endParaRPr lang="en-US" sz="750" dirty="0">
-                        <a:latin typeface="Calibri" charset="0"/>
-                        <a:ea typeface="Calibri" charset="0"/>
-                        <a:cs typeface="Calibri" charset="0"/>
+                        <a:latin typeface="IBM Plex Mono" charset="0"/>
+                        <a:ea typeface="IBM Plex Mono" charset="0"/>
+                        <a:cs typeface="IBM Plex Mono" charset="0"/>
                       </a:endParaRPr>
                     </a:p>
                   </a:txBody>
@@ -2718,16 +2718,16 @@
                           <a:solidFill>
                             <a:srgbClr val="FFFFFF"/>
                           </a:solidFill>
-                          <a:latin typeface="Calibri" pitchFamily="34" charset="0"/>
-                          <a:ea typeface="Calibri" pitchFamily="34" charset="-122"/>
-                          <a:cs typeface="Calibri" pitchFamily="34" charset="-120"/>
+                          <a:latin typeface="IBM Plex Mono" pitchFamily="34" charset="0"/>
+                          <a:ea typeface="IBM Plex Mono" pitchFamily="34" charset="-122"/>
+                          <a:cs typeface="IBM Plex Mono" pitchFamily="34" charset="-120"/>
                         </a:rPr>
                         <a:t>RISK DESCRIPTION</a:t>
                       </a:r>
                       <a:endParaRPr lang="en-US" sz="750" dirty="0">
-                        <a:latin typeface="Calibri" charset="0"/>
-                        <a:ea typeface="Calibri" charset="0"/>
-                        <a:cs typeface="Calibri" charset="0"/>
+                        <a:latin typeface="IBM Plex Mono" charset="0"/>
+                        <a:ea typeface="IBM Plex Mono" charset="0"/>
+                        <a:cs typeface="IBM Plex Mono" charset="0"/>
                       </a:endParaRPr>
                     </a:p>
                   </a:txBody>
@@ -2786,16 +2786,16 @@
                           <a:solidFill>
                             <a:srgbClr val="FFFFFF"/>
                           </a:solidFill>
-                          <a:latin typeface="Calibri" pitchFamily="34" charset="0"/>
-                          <a:ea typeface="Calibri" pitchFamily="34" charset="-122"/>
-                          <a:cs typeface="Calibri" pitchFamily="34" charset="-120"/>
+                          <a:latin typeface="IBM Plex Mono" pitchFamily="34" charset="0"/>
+                          <a:ea typeface="IBM Plex Mono" pitchFamily="34" charset="-122"/>
+                          <a:cs typeface="IBM Plex Mono" pitchFamily="34" charset="-120"/>
                         </a:rPr>
                         <a:t>LIKELIHOOD</a:t>
                       </a:r>
                       <a:endParaRPr lang="en-US" sz="750" dirty="0">
-                        <a:latin typeface="Calibri" charset="0"/>
-                        <a:ea typeface="Calibri" charset="0"/>
-                        <a:cs typeface="Calibri" charset="0"/>
+                        <a:latin typeface="IBM Plex Mono" charset="0"/>
+                        <a:ea typeface="IBM Plex Mono" charset="0"/>
+                        <a:cs typeface="IBM Plex Mono" charset="0"/>
                       </a:endParaRPr>
                     </a:p>
                   </a:txBody>
@@ -2854,16 +2854,16 @@
                           <a:solidFill>
                             <a:srgbClr val="FFFFFF"/>
                           </a:solidFill>
-                          <a:latin typeface="Calibri" pitchFamily="34" charset="0"/>
-                          <a:ea typeface="Calibri" pitchFamily="34" charset="-122"/>
-                          <a:cs typeface="Calibri" pitchFamily="34" charset="-120"/>
+                          <a:latin typeface="IBM Plex Mono" pitchFamily="34" charset="0"/>
+                          <a:ea typeface="IBM Plex Mono" pitchFamily="34" charset="-122"/>
+                          <a:cs typeface="IBM Plex Mono" pitchFamily="34" charset="-120"/>
                         </a:rPr>
                         <a:t>IMPACT</a:t>
                       </a:r>
                       <a:endParaRPr lang="en-US" sz="750" dirty="0">
-                        <a:latin typeface="Calibri" charset="0"/>
-                        <a:ea typeface="Calibri" charset="0"/>
-                        <a:cs typeface="Calibri" charset="0"/>
+                        <a:latin typeface="IBM Plex Mono" charset="0"/>
+                        <a:ea typeface="IBM Plex Mono" charset="0"/>
+                        <a:cs typeface="IBM Plex Mono" charset="0"/>
                       </a:endParaRPr>
                     </a:p>
                   </a:txBody>
@@ -2922,16 +2922,16 @@
                           <a:solidFill>
                             <a:srgbClr val="FFFFFF"/>
                           </a:solidFill>
-                          <a:latin typeface="Calibri" pitchFamily="34" charset="0"/>
-                          <a:ea typeface="Calibri" pitchFamily="34" charset="-122"/>
-                          <a:cs typeface="Calibri" pitchFamily="34" charset="-120"/>
+                          <a:latin typeface="IBM Plex Mono" pitchFamily="34" charset="0"/>
+                          <a:ea typeface="IBM Plex Mono" pitchFamily="34" charset="-122"/>
+                          <a:cs typeface="IBM Plex Mono" pitchFamily="34" charset="-120"/>
                         </a:rPr>
                         <a:t>MITIGATION STRATEGY</a:t>
                       </a:r>
                       <a:endParaRPr lang="en-US" sz="750" dirty="0">
-                        <a:latin typeface="Calibri" charset="0"/>
-                        <a:ea typeface="Calibri" charset="0"/>
-                        <a:cs typeface="Calibri" charset="0"/>
+                        <a:latin typeface="IBM Plex Mono" charset="0"/>
+                        <a:ea typeface="IBM Plex Mono" charset="0"/>
+                        <a:cs typeface="IBM Plex Mono" charset="0"/>
                       </a:endParaRPr>
                     </a:p>
                   </a:txBody>
@@ -2992,16 +2992,16 @@
                           <a:solidFill>
                             <a:srgbClr val="C53030"/>
                           </a:solidFill>
-                          <a:latin typeface="Calibri" pitchFamily="34" charset="0"/>
-                          <a:ea typeface="Calibri" pitchFamily="34" charset="-122"/>
-                          <a:cs typeface="Calibri" pitchFamily="34" charset="-120"/>
+                          <a:latin typeface="IBM Plex Mono" pitchFamily="34" charset="0"/>
+                          <a:ea typeface="IBM Plex Mono" pitchFamily="34" charset="-122"/>
+                          <a:cs typeface="IBM Plex Mono" pitchFamily="34" charset="-120"/>
                         </a:rPr>
                         <a:t>R1</a:t>
                       </a:r>
                       <a:endParaRPr lang="en-US" sz="800" dirty="0">
-                        <a:latin typeface="Calibri" charset="0"/>
-                        <a:ea typeface="Calibri" charset="0"/>
-                        <a:cs typeface="Calibri" charset="0"/>
+                        <a:latin typeface="IBM Plex Mono" charset="0"/>
+                        <a:ea typeface="IBM Plex Mono" charset="0"/>
+                        <a:cs typeface="IBM Plex Mono" charset="0"/>
                       </a:endParaRPr>
                     </a:p>
                   </a:txBody>
@@ -3060,16 +3060,16 @@
                           <a:solidFill>
                             <a:srgbClr val="4A5568"/>
                           </a:solidFill>
-                          <a:latin typeface="Calibri" pitchFamily="34" charset="0"/>
-                          <a:ea typeface="Calibri" pitchFamily="34" charset="-122"/>
-                          <a:cs typeface="Calibri" pitchFamily="34" charset="-120"/>
+                          <a:latin typeface="IBM Plex Mono" pitchFamily="34" charset="0"/>
+                          <a:ea typeface="IBM Plex Mono" pitchFamily="34" charset="-122"/>
+                          <a:cs typeface="IBM Plex Mono" pitchFamily="34" charset="-120"/>
                         </a:rPr>
                         <a:t>Engineering resistance to GRC integration</a:t>
                       </a:r>
                       <a:endParaRPr lang="en-US" sz="800" dirty="0">
-                        <a:latin typeface="Calibri" charset="0"/>
-                        <a:ea typeface="Calibri" charset="0"/>
-                        <a:cs typeface="Calibri" charset="0"/>
+                        <a:latin typeface="IBM Plex Mono" charset="0"/>
+                        <a:ea typeface="IBM Plex Mono" charset="0"/>
+                        <a:cs typeface="IBM Plex Mono" charset="0"/>
                       </a:endParaRPr>
                     </a:p>
                   </a:txBody>
@@ -3128,16 +3128,16 @@
                           <a:solidFill>
                             <a:srgbClr val="C05621"/>
                           </a:solidFill>
-                          <a:latin typeface="Calibri" pitchFamily="34" charset="0"/>
-                          <a:ea typeface="Calibri" pitchFamily="34" charset="-122"/>
-                          <a:cs typeface="Calibri" pitchFamily="34" charset="-120"/>
+                          <a:latin typeface="IBM Plex Mono" pitchFamily="34" charset="0"/>
+                          <a:ea typeface="IBM Plex Mono" pitchFamily="34" charset="-122"/>
+                          <a:cs typeface="IBM Plex Mono" pitchFamily="34" charset="-120"/>
                         </a:rPr>
                         <a:t>Med</a:t>
                       </a:r>
                       <a:endParaRPr lang="en-US" sz="800" dirty="0">
-                        <a:latin typeface="Calibri" charset="0"/>
-                        <a:ea typeface="Calibri" charset="0"/>
-                        <a:cs typeface="Calibri" charset="0"/>
+                        <a:latin typeface="IBM Plex Mono" charset="0"/>
+                        <a:ea typeface="IBM Plex Mono" charset="0"/>
+                        <a:cs typeface="IBM Plex Mono" charset="0"/>
                       </a:endParaRPr>
                     </a:p>
                   </a:txBody>
@@ -3196,16 +3196,16 @@
                           <a:solidFill>
                             <a:srgbClr val="C53030"/>
                           </a:solidFill>
-                          <a:latin typeface="Calibri" pitchFamily="34" charset="0"/>
-                          <a:ea typeface="Calibri" pitchFamily="34" charset="-122"/>
-                          <a:cs typeface="Calibri" pitchFamily="34" charset="-120"/>
+                          <a:latin typeface="IBM Plex Mono" pitchFamily="34" charset="0"/>
+                          <a:ea typeface="IBM Plex Mono" pitchFamily="34" charset="-122"/>
+                          <a:cs typeface="IBM Plex Mono" pitchFamily="34" charset="-120"/>
                         </a:rPr>
                         <a:t>High</a:t>
                       </a:r>
                       <a:endParaRPr lang="en-US" sz="800" dirty="0">
-                        <a:latin typeface="Calibri" charset="0"/>
-                        <a:ea typeface="Calibri" charset="0"/>
-                        <a:cs typeface="Calibri" charset="0"/>
+                        <a:latin typeface="IBM Plex Mono" charset="0"/>
+                        <a:ea typeface="IBM Plex Mono" charset="0"/>
+                        <a:cs typeface="IBM Plex Mono" charset="0"/>
                       </a:endParaRPr>
                     </a:p>
                   </a:txBody>
@@ -3264,16 +3264,16 @@
                           <a:solidFill>
                             <a:srgbClr val="4A5568"/>
                           </a:solidFill>
-                          <a:latin typeface="Calibri" pitchFamily="34" charset="0"/>
-                          <a:ea typeface="Calibri" pitchFamily="34" charset="-122"/>
-                          <a:cs typeface="Calibri" pitchFamily="34" charset="-120"/>
+                          <a:latin typeface="IBM Plex Mono" pitchFamily="34" charset="0"/>
+                          <a:ea typeface="IBM Plex Mono" pitchFamily="34" charset="-122"/>
+                          <a:cs typeface="IBM Plex Mono" pitchFamily="34" charset="-120"/>
                         </a:rPr>
                         <a:t>Start with value-add automation, not mandates. CISO sponsorship.</a:t>
                       </a:r>
                       <a:endParaRPr lang="en-US" sz="800" dirty="0">
-                        <a:latin typeface="Calibri" charset="0"/>
-                        <a:ea typeface="Calibri" charset="0"/>
-                        <a:cs typeface="Calibri" charset="0"/>
+                        <a:latin typeface="IBM Plex Mono" charset="0"/>
+                        <a:ea typeface="IBM Plex Mono" charset="0"/>
+                        <a:cs typeface="IBM Plex Mono" charset="0"/>
                       </a:endParaRPr>
                     </a:p>
                   </a:txBody>
@@ -3334,16 +3334,16 @@
                           <a:solidFill>
                             <a:srgbClr val="C53030"/>
                           </a:solidFill>
-                          <a:latin typeface="Calibri" pitchFamily="34" charset="0"/>
-                          <a:ea typeface="Calibri" pitchFamily="34" charset="-122"/>
-                          <a:cs typeface="Calibri" pitchFamily="34" charset="-120"/>
+                          <a:latin typeface="IBM Plex Mono" pitchFamily="34" charset="0"/>
+                          <a:ea typeface="IBM Plex Mono" pitchFamily="34" charset="-122"/>
+                          <a:cs typeface="IBM Plex Mono" pitchFamily="34" charset="-120"/>
                         </a:rPr>
                         <a:t>R2</a:t>
                       </a:r>
                       <a:endParaRPr lang="en-US" sz="800" dirty="0">
-                        <a:latin typeface="Calibri" charset="0"/>
-                        <a:ea typeface="Calibri" charset="0"/>
-                        <a:cs typeface="Calibri" charset="0"/>
+                        <a:latin typeface="IBM Plex Mono" charset="0"/>
+                        <a:ea typeface="IBM Plex Mono" charset="0"/>
+                        <a:cs typeface="IBM Plex Mono" charset="0"/>
                       </a:endParaRPr>
                     </a:p>
                   </a:txBody>
@@ -3402,16 +3402,16 @@
                           <a:solidFill>
                             <a:srgbClr val="4A5568"/>
                           </a:solidFill>
-                          <a:latin typeface="Calibri" pitchFamily="34" charset="0"/>
-                          <a:ea typeface="Calibri" pitchFamily="34" charset="-122"/>
-                          <a:cs typeface="Calibri" pitchFamily="34" charset="-120"/>
+                          <a:latin typeface="IBM Plex Mono" pitchFamily="34" charset="0"/>
+                          <a:ea typeface="IBM Plex Mono" pitchFamily="34" charset="-122"/>
+                          <a:cs typeface="IBM Plex Mono" pitchFamily="34" charset="-120"/>
                         </a:rPr>
                         <a:t>Insufficient budget for platform/tooling</a:t>
                       </a:r>
                       <a:endParaRPr lang="en-US" sz="800" dirty="0">
-                        <a:latin typeface="Calibri" charset="0"/>
-                        <a:ea typeface="Calibri" charset="0"/>
-                        <a:cs typeface="Calibri" charset="0"/>
+                        <a:latin typeface="IBM Plex Mono" charset="0"/>
+                        <a:ea typeface="IBM Plex Mono" charset="0"/>
+                        <a:cs typeface="IBM Plex Mono" charset="0"/>
                       </a:endParaRPr>
                     </a:p>
                   </a:txBody>
@@ -3470,16 +3470,16 @@
                           <a:solidFill>
                             <a:srgbClr val="C05621"/>
                           </a:solidFill>
-                          <a:latin typeface="Calibri" pitchFamily="34" charset="0"/>
-                          <a:ea typeface="Calibri" pitchFamily="34" charset="-122"/>
-                          <a:cs typeface="Calibri" pitchFamily="34" charset="-120"/>
+                          <a:latin typeface="IBM Plex Mono" pitchFamily="34" charset="0"/>
+                          <a:ea typeface="IBM Plex Mono" pitchFamily="34" charset="-122"/>
+                          <a:cs typeface="IBM Plex Mono" pitchFamily="34" charset="-120"/>
                         </a:rPr>
                         <a:t>Med</a:t>
                       </a:r>
                       <a:endParaRPr lang="en-US" sz="800" dirty="0">
-                        <a:latin typeface="Calibri" charset="0"/>
-                        <a:ea typeface="Calibri" charset="0"/>
-                        <a:cs typeface="Calibri" charset="0"/>
+                        <a:latin typeface="IBM Plex Mono" charset="0"/>
+                        <a:ea typeface="IBM Plex Mono" charset="0"/>
+                        <a:cs typeface="IBM Plex Mono" charset="0"/>
                       </a:endParaRPr>
                     </a:p>
                   </a:txBody>
@@ -3538,16 +3538,16 @@
                           <a:solidFill>
                             <a:srgbClr val="C53030"/>
                           </a:solidFill>
-                          <a:latin typeface="Calibri" pitchFamily="34" charset="0"/>
-                          <a:ea typeface="Calibri" pitchFamily="34" charset="-122"/>
-                          <a:cs typeface="Calibri" pitchFamily="34" charset="-120"/>
+                          <a:latin typeface="IBM Plex Mono" pitchFamily="34" charset="0"/>
+                          <a:ea typeface="IBM Plex Mono" pitchFamily="34" charset="-122"/>
+                          <a:cs typeface="IBM Plex Mono" pitchFamily="34" charset="-120"/>
                         </a:rPr>
                         <a:t>High</a:t>
                       </a:r>
                       <a:endParaRPr lang="en-US" sz="800" dirty="0">
-                        <a:latin typeface="Calibri" charset="0"/>
-                        <a:ea typeface="Calibri" charset="0"/>
-                        <a:cs typeface="Calibri" charset="0"/>
+                        <a:latin typeface="IBM Plex Mono" charset="0"/>
+                        <a:ea typeface="IBM Plex Mono" charset="0"/>
+                        <a:cs typeface="IBM Plex Mono" charset="0"/>
                       </a:endParaRPr>
                     </a:p>
                   </a:txBody>
@@ -3606,16 +3606,16 @@
                           <a:solidFill>
                             <a:srgbClr val="4A5568"/>
                           </a:solidFill>
-                          <a:latin typeface="Calibri" pitchFamily="34" charset="0"/>
-                          <a:ea typeface="Calibri" pitchFamily="34" charset="-122"/>
-                          <a:cs typeface="Calibri" pitchFamily="34" charset="-120"/>
+                          <a:latin typeface="IBM Plex Mono" pitchFamily="34" charset="0"/>
+                          <a:ea typeface="IBM Plex Mono" pitchFamily="34" charset="-122"/>
+                          <a:cs typeface="IBM Plex Mono" pitchFamily="34" charset="-120"/>
                         </a:rPr>
                         <a:t>ROI business case from revenue data. Phase investments.</a:t>
                       </a:r>
                       <a:endParaRPr lang="en-US" sz="800" dirty="0">
-                        <a:latin typeface="Calibri" charset="0"/>
-                        <a:ea typeface="Calibri" charset="0"/>
-                        <a:cs typeface="Calibri" charset="0"/>
+                        <a:latin typeface="IBM Plex Mono" charset="0"/>
+                        <a:ea typeface="IBM Plex Mono" charset="0"/>
+                        <a:cs typeface="IBM Plex Mono" charset="0"/>
                       </a:endParaRPr>
                     </a:p>
                   </a:txBody>
@@ -3676,16 +3676,16 @@
                           <a:solidFill>
                             <a:srgbClr val="C53030"/>
                           </a:solidFill>
-                          <a:latin typeface="Calibri" pitchFamily="34" charset="0"/>
-                          <a:ea typeface="Calibri" pitchFamily="34" charset="-122"/>
-                          <a:cs typeface="Calibri" pitchFamily="34" charset="-120"/>
+                          <a:latin typeface="IBM Plex Mono" pitchFamily="34" charset="0"/>
+                          <a:ea typeface="IBM Plex Mono" pitchFamily="34" charset="-122"/>
+                          <a:cs typeface="IBM Plex Mono" pitchFamily="34" charset="-120"/>
                         </a:rPr>
                         <a:t>R3</a:t>
                       </a:r>
                       <a:endParaRPr lang="en-US" sz="800" dirty="0">
-                        <a:latin typeface="Calibri" charset="0"/>
-                        <a:ea typeface="Calibri" charset="0"/>
-                        <a:cs typeface="Calibri" charset="0"/>
+                        <a:latin typeface="IBM Plex Mono" charset="0"/>
+                        <a:ea typeface="IBM Plex Mono" charset="0"/>
+                        <a:cs typeface="IBM Plex Mono" charset="0"/>
                       </a:endParaRPr>
                     </a:p>
                   </a:txBody>
@@ -3744,16 +3744,16 @@
                           <a:solidFill>
                             <a:srgbClr val="4A5568"/>
                           </a:solidFill>
-                          <a:latin typeface="Calibri" pitchFamily="34" charset="0"/>
-                          <a:ea typeface="Calibri" pitchFamily="34" charset="-122"/>
-                          <a:cs typeface="Calibri" pitchFamily="34" charset="-120"/>
+                          <a:latin typeface="IBM Plex Mono" pitchFamily="34" charset="0"/>
+                          <a:ea typeface="IBM Plex Mono" pitchFamily="34" charset="-122"/>
+                          <a:cs typeface="IBM Plex Mono" pitchFamily="34" charset="-120"/>
                         </a:rPr>
                         <a:t>Team skill gaps delay GRC-as-Code</a:t>
                       </a:r>
                       <a:endParaRPr lang="en-US" sz="800" dirty="0">
-                        <a:latin typeface="Calibri" charset="0"/>
-                        <a:ea typeface="Calibri" charset="0"/>
-                        <a:cs typeface="Calibri" charset="0"/>
+                        <a:latin typeface="IBM Plex Mono" charset="0"/>
+                        <a:ea typeface="IBM Plex Mono" charset="0"/>
+                        <a:cs typeface="IBM Plex Mono" charset="0"/>
                       </a:endParaRPr>
                     </a:p>
                   </a:txBody>
@@ -3812,16 +3812,16 @@
                           <a:solidFill>
                             <a:srgbClr val="C53030"/>
                           </a:solidFill>
-                          <a:latin typeface="Calibri" pitchFamily="34" charset="0"/>
-                          <a:ea typeface="Calibri" pitchFamily="34" charset="-122"/>
-                          <a:cs typeface="Calibri" pitchFamily="34" charset="-120"/>
+                          <a:latin typeface="IBM Plex Mono" pitchFamily="34" charset="0"/>
+                          <a:ea typeface="IBM Plex Mono" pitchFamily="34" charset="-122"/>
+                          <a:cs typeface="IBM Plex Mono" pitchFamily="34" charset="-120"/>
                         </a:rPr>
                         <a:t>High</a:t>
                       </a:r>
                       <a:endParaRPr lang="en-US" sz="800" dirty="0">
-                        <a:latin typeface="Calibri" charset="0"/>
-                        <a:ea typeface="Calibri" charset="0"/>
-                        <a:cs typeface="Calibri" charset="0"/>
+                        <a:latin typeface="IBM Plex Mono" charset="0"/>
+                        <a:ea typeface="IBM Plex Mono" charset="0"/>
+                        <a:cs typeface="IBM Plex Mono" charset="0"/>
                       </a:endParaRPr>
                     </a:p>
                   </a:txBody>
@@ -3880,16 +3880,16 @@
                           <a:solidFill>
                             <a:srgbClr val="C05621"/>
                           </a:solidFill>
-                          <a:latin typeface="Calibri" pitchFamily="34" charset="0"/>
-                          <a:ea typeface="Calibri" pitchFamily="34" charset="-122"/>
-                          <a:cs typeface="Calibri" pitchFamily="34" charset="-120"/>
+                          <a:latin typeface="IBM Plex Mono" pitchFamily="34" charset="0"/>
+                          <a:ea typeface="IBM Plex Mono" pitchFamily="34" charset="-122"/>
+                          <a:cs typeface="IBM Plex Mono" pitchFamily="34" charset="-120"/>
                         </a:rPr>
                         <a:t>Med</a:t>
                       </a:r>
                       <a:endParaRPr lang="en-US" sz="800" dirty="0">
-                        <a:latin typeface="Calibri" charset="0"/>
-                        <a:ea typeface="Calibri" charset="0"/>
-                        <a:cs typeface="Calibri" charset="0"/>
+                        <a:latin typeface="IBM Plex Mono" charset="0"/>
+                        <a:ea typeface="IBM Plex Mono" charset="0"/>
+                        <a:cs typeface="IBM Plex Mono" charset="0"/>
                       </a:endParaRPr>
                     </a:p>
                   </a:txBody>
@@ -3948,16 +3948,16 @@
                           <a:solidFill>
                             <a:srgbClr val="4A5568"/>
                           </a:solidFill>
-                          <a:latin typeface="Calibri" pitchFamily="34" charset="0"/>
-                          <a:ea typeface="Calibri" pitchFamily="34" charset="-122"/>
-                          <a:cs typeface="Calibri" pitchFamily="34" charset="-120"/>
+                          <a:latin typeface="IBM Plex Mono" pitchFamily="34" charset="0"/>
+                          <a:ea typeface="IBM Plex Mono" pitchFamily="34" charset="-122"/>
+                          <a:cs typeface="IBM Plex Mono" pitchFamily="34" charset="-120"/>
                         </a:rPr>
                         <a:t>Partner with Security Eng. External training. Targeted hires.</a:t>
                       </a:r>
                       <a:endParaRPr lang="en-US" sz="800" dirty="0">
-                        <a:latin typeface="Calibri" charset="0"/>
-                        <a:ea typeface="Calibri" charset="0"/>
-                        <a:cs typeface="Calibri" charset="0"/>
+                        <a:latin typeface="IBM Plex Mono" charset="0"/>
+                        <a:ea typeface="IBM Plex Mono" charset="0"/>
+                        <a:cs typeface="IBM Plex Mono" charset="0"/>
                       </a:endParaRPr>
                     </a:p>
                   </a:txBody>
@@ -4018,16 +4018,16 @@
                           <a:solidFill>
                             <a:srgbClr val="C53030"/>
                           </a:solidFill>
-                          <a:latin typeface="Calibri" pitchFamily="34" charset="0"/>
-                          <a:ea typeface="Calibri" pitchFamily="34" charset="-122"/>
-                          <a:cs typeface="Calibri" pitchFamily="34" charset="-120"/>
+                          <a:latin typeface="IBM Plex Mono" pitchFamily="34" charset="0"/>
+                          <a:ea typeface="IBM Plex Mono" pitchFamily="34" charset="-122"/>
+                          <a:cs typeface="IBM Plex Mono" pitchFamily="34" charset="-120"/>
                         </a:rPr>
                         <a:t>R4</a:t>
                       </a:r>
                       <a:endParaRPr lang="en-US" sz="800" dirty="0">
-                        <a:latin typeface="Calibri" charset="0"/>
-                        <a:ea typeface="Calibri" charset="0"/>
-                        <a:cs typeface="Calibri" charset="0"/>
+                        <a:latin typeface="IBM Plex Mono" charset="0"/>
+                        <a:ea typeface="IBM Plex Mono" charset="0"/>
+                        <a:cs typeface="IBM Plex Mono" charset="0"/>
                       </a:endParaRPr>
                     </a:p>
                   </a:txBody>
@@ -4086,16 +4086,16 @@
                           <a:solidFill>
                             <a:srgbClr val="4A5568"/>
                           </a:solidFill>
-                          <a:latin typeface="Calibri" pitchFamily="34" charset="0"/>
-                          <a:ea typeface="Calibri" pitchFamily="34" charset="-122"/>
-                          <a:cs typeface="Calibri" pitchFamily="34" charset="-120"/>
+                          <a:latin typeface="IBM Plex Mono" pitchFamily="34" charset="0"/>
+                          <a:ea typeface="IBM Plex Mono" pitchFamily="34" charset="-122"/>
+                          <a:cs typeface="IBM Plex Mono" pitchFamily="34" charset="-120"/>
                         </a:rPr>
                         <a:t>Customer Trust capacity during transformation</a:t>
                       </a:r>
                       <a:endParaRPr lang="en-US" sz="800" dirty="0">
-                        <a:latin typeface="Calibri" charset="0"/>
-                        <a:ea typeface="Calibri" charset="0"/>
-                        <a:cs typeface="Calibri" charset="0"/>
+                        <a:latin typeface="IBM Plex Mono" charset="0"/>
+                        <a:ea typeface="IBM Plex Mono" charset="0"/>
+                        <a:cs typeface="IBM Plex Mono" charset="0"/>
                       </a:endParaRPr>
                     </a:p>
                   </a:txBody>
@@ -4154,16 +4154,16 @@
                           <a:solidFill>
                             <a:srgbClr val="C05621"/>
                           </a:solidFill>
-                          <a:latin typeface="Calibri" pitchFamily="34" charset="0"/>
-                          <a:ea typeface="Calibri" pitchFamily="34" charset="-122"/>
-                          <a:cs typeface="Calibri" pitchFamily="34" charset="-120"/>
+                          <a:latin typeface="IBM Plex Mono" pitchFamily="34" charset="0"/>
+                          <a:ea typeface="IBM Plex Mono" pitchFamily="34" charset="-122"/>
+                          <a:cs typeface="IBM Plex Mono" pitchFamily="34" charset="-120"/>
                         </a:rPr>
                         <a:t>Med</a:t>
                       </a:r>
                       <a:endParaRPr lang="en-US" sz="800" dirty="0">
-                        <a:latin typeface="Calibri" charset="0"/>
-                        <a:ea typeface="Calibri" charset="0"/>
-                        <a:cs typeface="Calibri" charset="0"/>
+                        <a:latin typeface="IBM Plex Mono" charset="0"/>
+                        <a:ea typeface="IBM Plex Mono" charset="0"/>
+                        <a:cs typeface="IBM Plex Mono" charset="0"/>
                       </a:endParaRPr>
                     </a:p>
                   </a:txBody>
@@ -4222,16 +4222,16 @@
                           <a:solidFill>
                             <a:srgbClr val="C05621"/>
                           </a:solidFill>
-                          <a:latin typeface="Calibri" pitchFamily="34" charset="0"/>
-                          <a:ea typeface="Calibri" pitchFamily="34" charset="-122"/>
-                          <a:cs typeface="Calibri" pitchFamily="34" charset="-120"/>
+                          <a:latin typeface="IBM Plex Mono" pitchFamily="34" charset="0"/>
+                          <a:ea typeface="IBM Plex Mono" pitchFamily="34" charset="-122"/>
+                          <a:cs typeface="IBM Plex Mono" pitchFamily="34" charset="-120"/>
                         </a:rPr>
                         <a:t>Med</a:t>
                       </a:r>
                       <a:endParaRPr lang="en-US" sz="800" dirty="0">
-                        <a:latin typeface="Calibri" charset="0"/>
-                        <a:ea typeface="Calibri" charset="0"/>
-                        <a:cs typeface="Calibri" charset="0"/>
+                        <a:latin typeface="IBM Plex Mono" charset="0"/>
+                        <a:ea typeface="IBM Plex Mono" charset="0"/>
+                        <a:cs typeface="IBM Plex Mono" charset="0"/>
                       </a:endParaRPr>
                     </a:p>
                   </a:txBody>
@@ -4290,16 +4290,16 @@
                           <a:solidFill>
                             <a:srgbClr val="4A5568"/>
                           </a:solidFill>
-                          <a:latin typeface="Calibri" pitchFamily="34" charset="0"/>
-                          <a:ea typeface="Calibri" pitchFamily="34" charset="-122"/>
-                          <a:cs typeface="Calibri" pitchFamily="34" charset="-120"/>
+                          <a:latin typeface="IBM Plex Mono" pitchFamily="34" charset="0"/>
+                          <a:ea typeface="IBM Plex Mono" pitchFamily="34" charset="-122"/>
+                          <a:cs typeface="IBM Plex Mono" pitchFamily="34" charset="-120"/>
                         </a:rPr>
                         <a:t>Protect BAU capacity. Automate low-value tasks first.</a:t>
                       </a:r>
                       <a:endParaRPr lang="en-US" sz="800" dirty="0">
-                        <a:latin typeface="Calibri" charset="0"/>
-                        <a:ea typeface="Calibri" charset="0"/>
-                        <a:cs typeface="Calibri" charset="0"/>
+                        <a:latin typeface="IBM Plex Mono" charset="0"/>
+                        <a:ea typeface="IBM Plex Mono" charset="0"/>
+                        <a:cs typeface="IBM Plex Mono" charset="0"/>
                       </a:endParaRPr>
                     </a:p>
                   </a:txBody>
@@ -4360,16 +4360,16 @@
                           <a:solidFill>
                             <a:srgbClr val="C53030"/>
                           </a:solidFill>
-                          <a:latin typeface="Calibri" pitchFamily="34" charset="0"/>
-                          <a:ea typeface="Calibri" pitchFamily="34" charset="-122"/>
-                          <a:cs typeface="Calibri" pitchFamily="34" charset="-120"/>
+                          <a:latin typeface="IBM Plex Mono" pitchFamily="34" charset="0"/>
+                          <a:ea typeface="IBM Plex Mono" pitchFamily="34" charset="-122"/>
+                          <a:cs typeface="IBM Plex Mono" pitchFamily="34" charset="-120"/>
                         </a:rPr>
                         <a:t>R5</a:t>
                       </a:r>
                       <a:endParaRPr lang="en-US" sz="800" dirty="0">
-                        <a:latin typeface="Calibri" charset="0"/>
-                        <a:ea typeface="Calibri" charset="0"/>
-                        <a:cs typeface="Calibri" charset="0"/>
+                        <a:latin typeface="IBM Plex Mono" charset="0"/>
+                        <a:ea typeface="IBM Plex Mono" charset="0"/>
+                        <a:cs typeface="IBM Plex Mono" charset="0"/>
                       </a:endParaRPr>
                     </a:p>
                   </a:txBody>
@@ -4428,16 +4428,16 @@
                           <a:solidFill>
                             <a:srgbClr val="4A5568"/>
                           </a:solidFill>
-                          <a:latin typeface="Calibri" pitchFamily="34" charset="0"/>
-                          <a:ea typeface="Calibri" pitchFamily="34" charset="-122"/>
-                          <a:cs typeface="Calibri" pitchFamily="34" charset="-120"/>
+                          <a:latin typeface="IBM Plex Mono" pitchFamily="34" charset="0"/>
+                          <a:ea typeface="IBM Plex Mono" pitchFamily="34" charset="-122"/>
+                          <a:cs typeface="IBM Plex Mono" pitchFamily="34" charset="-120"/>
                         </a:rPr>
                         <a:t>Nathan's return creates role ambiguity</a:t>
                       </a:r>
                       <a:endParaRPr lang="en-US" sz="800" dirty="0">
-                        <a:latin typeface="Calibri" charset="0"/>
-                        <a:ea typeface="Calibri" charset="0"/>
-                        <a:cs typeface="Calibri" charset="0"/>
+                        <a:latin typeface="IBM Plex Mono" charset="0"/>
+                        <a:ea typeface="IBM Plex Mono" charset="0"/>
+                        <a:cs typeface="IBM Plex Mono" charset="0"/>
                       </a:endParaRPr>
                     </a:p>
                   </a:txBody>
@@ -4496,16 +4496,16 @@
                           <a:solidFill>
                             <a:srgbClr val="276749"/>
                           </a:solidFill>
-                          <a:latin typeface="Calibri" pitchFamily="34" charset="0"/>
-                          <a:ea typeface="Calibri" pitchFamily="34" charset="-122"/>
-                          <a:cs typeface="Calibri" pitchFamily="34" charset="-120"/>
+                          <a:latin typeface="IBM Plex Mono" pitchFamily="34" charset="0"/>
+                          <a:ea typeface="IBM Plex Mono" pitchFamily="34" charset="-122"/>
+                          <a:cs typeface="IBM Plex Mono" pitchFamily="34" charset="-120"/>
                         </a:rPr>
                         <a:t>Low</a:t>
                       </a:r>
                       <a:endParaRPr lang="en-US" sz="800" dirty="0">
-                        <a:latin typeface="Calibri" charset="0"/>
-                        <a:ea typeface="Calibri" charset="0"/>
-                        <a:cs typeface="Calibri" charset="0"/>
+                        <a:latin typeface="IBM Plex Mono" charset="0"/>
+                        <a:ea typeface="IBM Plex Mono" charset="0"/>
+                        <a:cs typeface="IBM Plex Mono" charset="0"/>
                       </a:endParaRPr>
                     </a:p>
                   </a:txBody>
@@ -4564,16 +4564,16 @@
                           <a:solidFill>
                             <a:srgbClr val="C53030"/>
                           </a:solidFill>
-                          <a:latin typeface="Calibri" pitchFamily="34" charset="0"/>
-                          <a:ea typeface="Calibri" pitchFamily="34" charset="-122"/>
-                          <a:cs typeface="Calibri" pitchFamily="34" charset="-120"/>
+                          <a:latin typeface="IBM Plex Mono" pitchFamily="34" charset="0"/>
+                          <a:ea typeface="IBM Plex Mono" pitchFamily="34" charset="-122"/>
+                          <a:cs typeface="IBM Plex Mono" pitchFamily="34" charset="-120"/>
                         </a:rPr>
                         <a:t>High</a:t>
                       </a:r>
                       <a:endParaRPr lang="en-US" sz="800" dirty="0">
-                        <a:latin typeface="Calibri" charset="0"/>
-                        <a:ea typeface="Calibri" charset="0"/>
-                        <a:cs typeface="Calibri" charset="0"/>
+                        <a:latin typeface="IBM Plex Mono" charset="0"/>
+                        <a:ea typeface="IBM Plex Mono" charset="0"/>
+                        <a:cs typeface="IBM Plex Mono" charset="0"/>
                       </a:endParaRPr>
                     </a:p>
                   </a:txBody>
@@ -4632,16 +4632,16 @@
                           <a:solidFill>
                             <a:srgbClr val="4A5568"/>
                           </a:solidFill>
-                          <a:latin typeface="Calibri" pitchFamily="34" charset="0"/>
-                          <a:ea typeface="Calibri" pitchFamily="34" charset="-122"/>
-                          <a:cs typeface="Calibri" pitchFamily="34" charset="-120"/>
+                          <a:latin typeface="IBM Plex Mono" pitchFamily="34" charset="0"/>
+                          <a:ea typeface="IBM Plex Mono" pitchFamily="34" charset="-122"/>
+                          <a:cs typeface="IBM Plex Mono" pitchFamily="34" charset="-120"/>
                         </a:rPr>
                         <a:t>Document decisions, maintain CISO transparency.</a:t>
                       </a:r>
                       <a:endParaRPr lang="en-US" sz="800" dirty="0">
-                        <a:latin typeface="Calibri" charset="0"/>
-                        <a:ea typeface="Calibri" charset="0"/>
-                        <a:cs typeface="Calibri" charset="0"/>
+                        <a:latin typeface="IBM Plex Mono" charset="0"/>
+                        <a:ea typeface="IBM Plex Mono" charset="0"/>
+                        <a:cs typeface="IBM Plex Mono" charset="0"/>
                       </a:endParaRPr>
                     </a:p>
                   </a:txBody>
@@ -4702,16 +4702,16 @@
                           <a:solidFill>
                             <a:srgbClr val="C53030"/>
                           </a:solidFill>
-                          <a:latin typeface="Calibri" pitchFamily="34" charset="0"/>
-                          <a:ea typeface="Calibri" pitchFamily="34" charset="-122"/>
-                          <a:cs typeface="Calibri" pitchFamily="34" charset="-120"/>
+                          <a:latin typeface="IBM Plex Mono" pitchFamily="34" charset="0"/>
+                          <a:ea typeface="IBM Plex Mono" pitchFamily="34" charset="-122"/>
+                          <a:cs typeface="IBM Plex Mono" pitchFamily="34" charset="-120"/>
                         </a:rPr>
                         <a:t>R6</a:t>
                       </a:r>
                       <a:endParaRPr lang="en-US" sz="800" dirty="0">
-                        <a:latin typeface="Calibri" charset="0"/>
-                        <a:ea typeface="Calibri" charset="0"/>
-                        <a:cs typeface="Calibri" charset="0"/>
+                        <a:latin typeface="IBM Plex Mono" charset="0"/>
+                        <a:ea typeface="IBM Plex Mono" charset="0"/>
+                        <a:cs typeface="IBM Plex Mono" charset="0"/>
                       </a:endParaRPr>
                     </a:p>
                   </a:txBody>
@@ -4770,16 +4770,16 @@
                           <a:solidFill>
                             <a:srgbClr val="4A5568"/>
                           </a:solidFill>
-                          <a:latin typeface="Calibri" pitchFamily="34" charset="0"/>
-                          <a:ea typeface="Calibri" pitchFamily="34" charset="-122"/>
-                          <a:cs typeface="Calibri" pitchFamily="34" charset="-120"/>
+                          <a:latin typeface="IBM Plex Mono" pitchFamily="34" charset="0"/>
+                          <a:ea typeface="IBM Plex Mono" pitchFamily="34" charset="-122"/>
+                          <a:cs typeface="IBM Plex Mono" pitchFamily="34" charset="-120"/>
                         </a:rPr>
                         <a:t>Tool consolidation disrupts Customer Trust SLAs</a:t>
                       </a:r>
                       <a:endParaRPr lang="en-US" sz="800" dirty="0">
-                        <a:latin typeface="Calibri" charset="0"/>
-                        <a:ea typeface="Calibri" charset="0"/>
-                        <a:cs typeface="Calibri" charset="0"/>
+                        <a:latin typeface="IBM Plex Mono" charset="0"/>
+                        <a:ea typeface="IBM Plex Mono" charset="0"/>
+                        <a:cs typeface="IBM Plex Mono" charset="0"/>
                       </a:endParaRPr>
                     </a:p>
                   </a:txBody>
@@ -4838,16 +4838,16 @@
                           <a:solidFill>
                             <a:srgbClr val="C05621"/>
                           </a:solidFill>
-                          <a:latin typeface="Calibri" pitchFamily="34" charset="0"/>
-                          <a:ea typeface="Calibri" pitchFamily="34" charset="-122"/>
-                          <a:cs typeface="Calibri" pitchFamily="34" charset="-120"/>
+                          <a:latin typeface="IBM Plex Mono" pitchFamily="34" charset="0"/>
+                          <a:ea typeface="IBM Plex Mono" pitchFamily="34" charset="-122"/>
+                          <a:cs typeface="IBM Plex Mono" pitchFamily="34" charset="-120"/>
                         </a:rPr>
                         <a:t>Med</a:t>
                       </a:r>
                       <a:endParaRPr lang="en-US" sz="800" dirty="0">
-                        <a:latin typeface="Calibri" charset="0"/>
-                        <a:ea typeface="Calibri" charset="0"/>
-                        <a:cs typeface="Calibri" charset="0"/>
+                        <a:latin typeface="IBM Plex Mono" charset="0"/>
+                        <a:ea typeface="IBM Plex Mono" charset="0"/>
+                        <a:cs typeface="IBM Plex Mono" charset="0"/>
                       </a:endParaRPr>
                     </a:p>
                   </a:txBody>
@@ -4906,16 +4906,16 @@
                           <a:solidFill>
                             <a:srgbClr val="C05621"/>
                           </a:solidFill>
-                          <a:latin typeface="Calibri" pitchFamily="34" charset="0"/>
-                          <a:ea typeface="Calibri" pitchFamily="34" charset="-122"/>
-                          <a:cs typeface="Calibri" pitchFamily="34" charset="-120"/>
+                          <a:latin typeface="IBM Plex Mono" pitchFamily="34" charset="0"/>
+                          <a:ea typeface="IBM Plex Mono" pitchFamily="34" charset="-122"/>
+                          <a:cs typeface="IBM Plex Mono" pitchFamily="34" charset="-120"/>
                         </a:rPr>
                         <a:t>Med</a:t>
                       </a:r>
                       <a:endParaRPr lang="en-US" sz="800" dirty="0">
-                        <a:latin typeface="Calibri" charset="0"/>
-                        <a:ea typeface="Calibri" charset="0"/>
-                        <a:cs typeface="Calibri" charset="0"/>
+                        <a:latin typeface="IBM Plex Mono" charset="0"/>
+                        <a:ea typeface="IBM Plex Mono" charset="0"/>
+                        <a:cs typeface="IBM Plex Mono" charset="0"/>
                       </a:endParaRPr>
                     </a:p>
                   </a:txBody>
@@ -4974,16 +4974,16 @@
                           <a:solidFill>
                             <a:srgbClr val="4A5568"/>
                           </a:solidFill>
-                          <a:latin typeface="Calibri" pitchFamily="34" charset="0"/>
-                          <a:ea typeface="Calibri" pitchFamily="34" charset="-122"/>
-                          <a:cs typeface="Calibri" pitchFamily="34" charset="-120"/>
+                          <a:latin typeface="IBM Plex Mono" pitchFamily="34" charset="0"/>
+                          <a:ea typeface="IBM Plex Mono" pitchFamily="34" charset="-122"/>
+                          <a:cs typeface="IBM Plex Mono" pitchFamily="34" charset="-120"/>
                         </a:rPr>
                         <a:t>Parallel run during migration. Phased rollout.</a:t>
                       </a:r>
                       <a:endParaRPr lang="en-US" sz="800" dirty="0">
-                        <a:latin typeface="Calibri" charset="0"/>
-                        <a:ea typeface="Calibri" charset="0"/>
-                        <a:cs typeface="Calibri" charset="0"/>
+                        <a:latin typeface="IBM Plex Mono" charset="0"/>
+                        <a:ea typeface="IBM Plex Mono" charset="0"/>
+                        <a:cs typeface="IBM Plex Mono" charset="0"/>
                       </a:endParaRPr>
                     </a:p>
                   </a:txBody>
@@ -5063,9 +5063,9 @@
                 <a:solidFill>
                   <a:srgbClr val="1A1D23"/>
                 </a:solidFill>
-                <a:latin typeface="Calibri" pitchFamily="34" charset="0"/>
-                <a:ea typeface="Calibri" pitchFamily="34" charset="-122"/>
-                <a:cs typeface="Calibri" pitchFamily="34" charset="-120"/>
+                <a:latin typeface="IBM Plex Mono" pitchFamily="34" charset="0"/>
+                <a:ea typeface="IBM Plex Mono" pitchFamily="34" charset="-122"/>
+                <a:cs typeface="IBM Plex Mono" pitchFamily="34" charset="-120"/>
               </a:rPr>
               <a:t>Key Dependencies</a:t>
             </a:r>
@@ -5106,9 +5106,9 @@
                 <a:solidFill>
                   <a:srgbClr val="4A5568"/>
                 </a:solidFill>
-                <a:latin typeface="Calibri" pitchFamily="34" charset="0"/>
-                <a:ea typeface="Calibri" pitchFamily="34" charset="-122"/>
-                <a:cs typeface="Calibri" pitchFamily="34" charset="-120"/>
+                <a:latin typeface="IBM Plex Mono" pitchFamily="34" charset="0"/>
+                <a:ea typeface="IBM Plex Mono" pitchFamily="34" charset="-122"/>
+                <a:cs typeface="IBM Plex Mono" pitchFamily="34" charset="-120"/>
               </a:rPr>
               <a:t>CISO sponsorship and executive air cover for cross-functional initiatives</a:t>
             </a:r>
@@ -5127,9 +5127,9 @@
                 <a:solidFill>
                   <a:srgbClr val="4A5568"/>
                 </a:solidFill>
-                <a:latin typeface="Calibri" pitchFamily="34" charset="0"/>
-                <a:ea typeface="Calibri" pitchFamily="34" charset="-122"/>
-                <a:cs typeface="Calibri" pitchFamily="34" charset="-120"/>
+                <a:latin typeface="IBM Plex Mono" pitchFamily="34" charset="0"/>
+                <a:ea typeface="IBM Plex Mono" pitchFamily="34" charset="-122"/>
+                <a:cs typeface="IBM Plex Mono" pitchFamily="34" charset="-120"/>
               </a:rPr>
               <a:t>Security Engineering (Chelsea Main) partnership for CI/CD and tooling integration</a:t>
             </a:r>
@@ -5148,9 +5148,9 @@
                 <a:solidFill>
                   <a:srgbClr val="4A5568"/>
                 </a:solidFill>
-                <a:latin typeface="Calibri" pitchFamily="34" charset="0"/>
-                <a:ea typeface="Calibri" pitchFamily="34" charset="-122"/>
-                <a:cs typeface="Calibri" pitchFamily="34" charset="-120"/>
+                <a:latin typeface="IBM Plex Mono" pitchFamily="34" charset="0"/>
+                <a:ea typeface="IBM Plex Mono" pitchFamily="34" charset="-122"/>
+                <a:cs typeface="IBM Plex Mono" pitchFamily="34" charset="-120"/>
               </a:rPr>
               <a:t>Budget approval for GRC platform investment and team training</a:t>
             </a:r>
@@ -5169,9 +5169,9 @@
                 <a:solidFill>
                   <a:srgbClr val="4A5568"/>
                 </a:solidFill>
-                <a:latin typeface="Calibri" pitchFamily="34" charset="0"/>
-                <a:ea typeface="Calibri" pitchFamily="34" charset="-122"/>
-                <a:cs typeface="Calibri" pitchFamily="34" charset="-120"/>
+                <a:latin typeface="IBM Plex Mono" pitchFamily="34" charset="0"/>
+                <a:ea typeface="IBM Plex Mono" pitchFamily="34" charset="-122"/>
+                <a:cs typeface="IBM Plex Mono" pitchFamily="34" charset="-120"/>
               </a:rPr>
               <a:t>CRM access (Salesforce/HubSpot) for Customer Trust revenue attribution</a:t>
             </a:r>
@@ -5240,9 +5240,9 @@
                 <a:solidFill>
                   <a:srgbClr val="1A1D23"/>
                 </a:solidFill>
-                <a:latin typeface="Georgia" pitchFamily="34" charset="0"/>
-                <a:ea typeface="Georgia" pitchFamily="34" charset="-122"/>
-                <a:cs typeface="Georgia" pitchFamily="34" charset="-120"/>
+                <a:latin typeface="IBM Plex Mono" pitchFamily="34" charset="0"/>
+                <a:ea typeface="IBM Plex Mono" pitchFamily="34" charset="-122"/>
+                <a:cs typeface="IBM Plex Mono" pitchFamily="34" charset="-120"/>
               </a:rPr>
               <a:t>Investment Requirements &amp; Expected ROI</a:t>
             </a:r>
@@ -5302,9 +5302,9 @@
                 <a:solidFill>
                   <a:srgbClr val="718096"/>
                 </a:solidFill>
-                <a:latin typeface="Calibri" pitchFamily="34" charset="0"/>
-                <a:ea typeface="Calibri" pitchFamily="34" charset="-122"/>
-                <a:cs typeface="Calibri" pitchFamily="34" charset="-120"/>
+                <a:latin typeface="IBM Plex Mono" pitchFamily="34" charset="0"/>
+                <a:ea typeface="IBM Plex Mono" pitchFamily="34" charset="-122"/>
+                <a:cs typeface="IBM Plex Mono" pitchFamily="34" charset="-120"/>
               </a:rPr>
               <a:t>CONFIDENTIAL  |  GRC Program Modernization Roadmap 2026</a:t>
             </a:r>
@@ -5341,9 +5341,9 @@
                 <a:solidFill>
                   <a:srgbClr val="718096"/>
                 </a:solidFill>
-                <a:latin typeface="Calibri" pitchFamily="34" charset="0"/>
-                <a:ea typeface="Calibri" pitchFamily="34" charset="-122"/>
-                <a:cs typeface="Calibri" pitchFamily="34" charset="-120"/>
+                <a:latin typeface="IBM Plex Mono" pitchFamily="34" charset="0"/>
+                <a:ea typeface="IBM Plex Mono" pitchFamily="34" charset="-122"/>
+                <a:cs typeface="IBM Plex Mono" pitchFamily="34" charset="-120"/>
               </a:rPr>
               <a:t>11</a:t>
             </a:r>
@@ -5427,9 +5427,9 @@
                 <a:solidFill>
                   <a:srgbClr val="2B6CB0"/>
                 </a:solidFill>
-                <a:latin typeface="Calibri" pitchFamily="34" charset="0"/>
-                <a:ea typeface="Calibri" pitchFamily="34" charset="-122"/>
-                <a:cs typeface="Calibri" pitchFamily="34" charset="-120"/>
+                <a:latin typeface="IBM Plex Mono" pitchFamily="34" charset="0"/>
+                <a:ea typeface="IBM Plex Mono" pitchFamily="34" charset="-122"/>
+                <a:cs typeface="IBM Plex Mono" pitchFamily="34" charset="-120"/>
               </a:rPr>
               <a:t>Investment Areas</a:t>
             </a:r>
@@ -5466,9 +5466,9 @@
                 <a:solidFill>
                   <a:srgbClr val="1A1D23"/>
                 </a:solidFill>
-                <a:latin typeface="Calibri" pitchFamily="34" charset="0"/>
-                <a:ea typeface="Calibri" pitchFamily="34" charset="-122"/>
-                <a:cs typeface="Calibri" pitchFamily="34" charset="-120"/>
+                <a:latin typeface="IBM Plex Mono" pitchFamily="34" charset="0"/>
+                <a:ea typeface="IBM Plex Mono" pitchFamily="34" charset="-122"/>
+                <a:cs typeface="IBM Plex Mono" pitchFamily="34" charset="-120"/>
               </a:rPr>
               <a:t>GRC Platform &amp; Tooling</a:t>
             </a:r>
@@ -5509,9 +5509,9 @@
                 <a:solidFill>
                   <a:srgbClr val="4A5568"/>
                 </a:solidFill>
-                <a:latin typeface="Calibri" pitchFamily="34" charset="0"/>
-                <a:ea typeface="Calibri" pitchFamily="34" charset="-122"/>
-                <a:cs typeface="Calibri" pitchFamily="34" charset="-120"/>
+                <a:latin typeface="IBM Plex Mono" pitchFamily="34" charset="0"/>
+                <a:ea typeface="IBM Plex Mono" pitchFamily="34" charset="-122"/>
+                <a:cs typeface="IBM Plex Mono" pitchFamily="34" charset="-120"/>
               </a:rPr>
               <a:t>Customer Trust platform consolidation/upgrade</a:t>
             </a:r>
@@ -5530,9 +5530,9 @@
                 <a:solidFill>
                   <a:srgbClr val="4A5568"/>
                 </a:solidFill>
-                <a:latin typeface="Calibri" pitchFamily="34" charset="0"/>
-                <a:ea typeface="Calibri" pitchFamily="34" charset="-122"/>
-                <a:cs typeface="Calibri" pitchFamily="34" charset="-120"/>
+                <a:latin typeface="IBM Plex Mono" pitchFamily="34" charset="0"/>
+                <a:ea typeface="IBM Plex Mono" pitchFamily="34" charset="-122"/>
+                <a:cs typeface="IBM Plex Mono" pitchFamily="34" charset="-120"/>
               </a:rPr>
               <a:t>GRC automation platform (policy-as-code)</a:t>
             </a:r>
@@ -5551,9 +5551,9 @@
                 <a:solidFill>
                   <a:srgbClr val="4A5568"/>
                 </a:solidFill>
-                <a:latin typeface="Calibri" pitchFamily="34" charset="0"/>
-                <a:ea typeface="Calibri" pitchFamily="34" charset="-122"/>
-                <a:cs typeface="Calibri" pitchFamily="34" charset="-120"/>
+                <a:latin typeface="IBM Plex Mono" pitchFamily="34" charset="0"/>
+                <a:ea typeface="IBM Plex Mono" pitchFamily="34" charset="-122"/>
+                <a:cs typeface="IBM Plex Mono" pitchFamily="34" charset="-120"/>
               </a:rPr>
               <a:t>Dashboard and reporting infrastructure</a:t>
             </a:r>
@@ -5572,9 +5572,9 @@
                 <a:solidFill>
                   <a:srgbClr val="4A5568"/>
                 </a:solidFill>
-                <a:latin typeface="Calibri" pitchFamily="34" charset="0"/>
-                <a:ea typeface="Calibri" pitchFamily="34" charset="-122"/>
-                <a:cs typeface="Calibri" pitchFamily="34" charset="-120"/>
+                <a:latin typeface="IBM Plex Mono" pitchFamily="34" charset="0"/>
+                <a:ea typeface="IBM Plex Mono" pitchFamily="34" charset="-122"/>
+                <a:cs typeface="IBM Plex Mono" pitchFamily="34" charset="-120"/>
               </a:rPr>
               <a:t>TPRM automation and vendor risk platform</a:t>
             </a:r>
@@ -5611,9 +5611,9 @@
                 <a:solidFill>
                   <a:srgbClr val="1A1D23"/>
                 </a:solidFill>
-                <a:latin typeface="Calibri" pitchFamily="34" charset="0"/>
-                <a:ea typeface="Calibri" pitchFamily="34" charset="-122"/>
-                <a:cs typeface="Calibri" pitchFamily="34" charset="-120"/>
+                <a:latin typeface="IBM Plex Mono" pitchFamily="34" charset="0"/>
+                <a:ea typeface="IBM Plex Mono" pitchFamily="34" charset="-122"/>
+                <a:cs typeface="IBM Plex Mono" pitchFamily="34" charset="-120"/>
               </a:rPr>
               <a:t>People &amp; Skills</a:t>
             </a:r>
@@ -5654,9 +5654,9 @@
                 <a:solidFill>
                   <a:srgbClr val="4A5568"/>
                 </a:solidFill>
-                <a:latin typeface="Calibri" pitchFamily="34" charset="0"/>
-                <a:ea typeface="Calibri" pitchFamily="34" charset="-122"/>
-                <a:cs typeface="Calibri" pitchFamily="34" charset="-120"/>
+                <a:latin typeface="IBM Plex Mono" pitchFamily="34" charset="0"/>
+                <a:ea typeface="IBM Plex Mono" pitchFamily="34" charset="-122"/>
+                <a:cs typeface="IBM Plex Mono" pitchFamily="34" charset="-120"/>
               </a:rPr>
               <a:t>GRC-Engineering technical training program</a:t>
             </a:r>
@@ -5675,9 +5675,9 @@
                 <a:solidFill>
                   <a:srgbClr val="4A5568"/>
                 </a:solidFill>
-                <a:latin typeface="Calibri" pitchFamily="34" charset="0"/>
-                <a:ea typeface="Calibri" pitchFamily="34" charset="-122"/>
-                <a:cs typeface="Calibri" pitchFamily="34" charset="-120"/>
+                <a:latin typeface="IBM Plex Mono" pitchFamily="34" charset="0"/>
+                <a:ea typeface="IBM Plex Mono" pitchFamily="34" charset="-122"/>
+                <a:cs typeface="IBM Plex Mono" pitchFamily="34" charset="-120"/>
               </a:rPr>
               <a:t>Technical GRC Engineer hire (policy-as-code)</a:t>
             </a:r>
@@ -5696,9 +5696,9 @@
                 <a:solidFill>
                   <a:srgbClr val="4A5568"/>
                 </a:solidFill>
-                <a:latin typeface="Calibri" pitchFamily="34" charset="0"/>
-                <a:ea typeface="Calibri" pitchFamily="34" charset="-122"/>
-                <a:cs typeface="Calibri" pitchFamily="34" charset="-120"/>
+                <a:latin typeface="IBM Plex Mono" pitchFamily="34" charset="0"/>
+                <a:ea typeface="IBM Plex Mono" pitchFamily="34" charset="-122"/>
+                <a:cs typeface="IBM Plex Mono" pitchFamily="34" charset="-120"/>
               </a:rPr>
               <a:t>Customer Trust team lead recruitment</a:t>
             </a:r>
@@ -5717,9 +5717,9 @@
                 <a:solidFill>
                   <a:srgbClr val="4A5568"/>
                 </a:solidFill>
-                <a:latin typeface="Calibri" pitchFamily="34" charset="0"/>
-                <a:ea typeface="Calibri" pitchFamily="34" charset="-122"/>
-                <a:cs typeface="Calibri" pitchFamily="34" charset="-120"/>
+                <a:latin typeface="IBM Plex Mono" pitchFamily="34" charset="0"/>
+                <a:ea typeface="IBM Plex Mono" pitchFamily="34" charset="-122"/>
+                <a:cs typeface="IBM Plex Mono" pitchFamily="34" charset="-120"/>
               </a:rPr>
               <a:t>Industry certifications (CISA, CRISC, CISSP)</a:t>
             </a:r>
@@ -5756,9 +5756,9 @@
                 <a:solidFill>
                   <a:srgbClr val="1A1D23"/>
                 </a:solidFill>
-                <a:latin typeface="Calibri" pitchFamily="34" charset="0"/>
-                <a:ea typeface="Calibri" pitchFamily="34" charset="-122"/>
-                <a:cs typeface="Calibri" pitchFamily="34" charset="-120"/>
+                <a:latin typeface="IBM Plex Mono" pitchFamily="34" charset="0"/>
+                <a:ea typeface="IBM Plex Mono" pitchFamily="34" charset="-122"/>
+                <a:cs typeface="IBM Plex Mono" pitchFamily="34" charset="-120"/>
               </a:rPr>
               <a:t>Process &amp; Consulting</a:t>
             </a:r>
@@ -5799,9 +5799,9 @@
                 <a:solidFill>
                   <a:srgbClr val="4A5568"/>
                 </a:solidFill>
-                <a:latin typeface="Calibri" pitchFamily="34" charset="0"/>
-                <a:ea typeface="Calibri" pitchFamily="34" charset="-122"/>
-                <a:cs typeface="Calibri" pitchFamily="34" charset="-120"/>
+                <a:latin typeface="IBM Plex Mono" pitchFamily="34" charset="0"/>
+                <a:ea typeface="IBM Plex Mono" pitchFamily="34" charset="-122"/>
+                <a:cs typeface="IBM Plex Mono" pitchFamily="34" charset="-120"/>
               </a:rPr>
               <a:t>NIST CSF maturity assessment (external)</a:t>
             </a:r>
@@ -5820,9 +5820,9 @@
                 <a:solidFill>
                   <a:srgbClr val="4A5568"/>
                 </a:solidFill>
-                <a:latin typeface="Calibri" pitchFamily="34" charset="0"/>
-                <a:ea typeface="Calibri" pitchFamily="34" charset="-122"/>
-                <a:cs typeface="Calibri" pitchFamily="34" charset="-120"/>
+                <a:latin typeface="IBM Plex Mono" pitchFamily="34" charset="0"/>
+                <a:ea typeface="IBM Plex Mono" pitchFamily="34" charset="-122"/>
+                <a:cs typeface="IBM Plex Mono" pitchFamily="34" charset="-120"/>
               </a:rPr>
               <a:t>FAIR risk quantification implementation</a:t>
             </a:r>
@@ -5841,9 +5841,9 @@
                 <a:solidFill>
                   <a:srgbClr val="4A5568"/>
                 </a:solidFill>
-                <a:latin typeface="Calibri" pitchFamily="34" charset="0"/>
-                <a:ea typeface="Calibri" pitchFamily="34" charset="-122"/>
-                <a:cs typeface="Calibri" pitchFamily="34" charset="-120"/>
+                <a:latin typeface="IBM Plex Mono" pitchFamily="34" charset="0"/>
+                <a:ea typeface="IBM Plex Mono" pitchFamily="34" charset="-122"/>
+                <a:cs typeface="IBM Plex Mono" pitchFamily="34" charset="-120"/>
               </a:rPr>
               <a:t>Change management for engineering integration</a:t>
             </a:r>
@@ -5927,9 +5927,9 @@
                 <a:solidFill>
                   <a:srgbClr val="276749"/>
                 </a:solidFill>
-                <a:latin typeface="Calibri" pitchFamily="34" charset="0"/>
-                <a:ea typeface="Calibri" pitchFamily="34" charset="-122"/>
-                <a:cs typeface="Calibri" pitchFamily="34" charset="-120"/>
+                <a:latin typeface="IBM Plex Mono" pitchFamily="34" charset="0"/>
+                <a:ea typeface="IBM Plex Mono" pitchFamily="34" charset="-122"/>
+                <a:cs typeface="IBM Plex Mono" pitchFamily="34" charset="-120"/>
               </a:rPr>
               <a:t>Expected Return on Investment</a:t>
             </a:r>
@@ -5986,9 +5986,9 @@
                 <a:solidFill>
                   <a:srgbClr val="0E7C86"/>
                 </a:solidFill>
-                <a:latin typeface="Calibri" pitchFamily="34" charset="0"/>
-                <a:ea typeface="Calibri" pitchFamily="34" charset="-122"/>
-                <a:cs typeface="Calibri" pitchFamily="34" charset="-120"/>
+                <a:latin typeface="IBM Plex Mono" pitchFamily="34" charset="0"/>
+                <a:ea typeface="IBM Plex Mono" pitchFamily="34" charset="-122"/>
+                <a:cs typeface="IBM Plex Mono" pitchFamily="34" charset="-120"/>
               </a:rPr>
               <a:t>Revenue Enablement</a:t>
             </a:r>
@@ -6025,9 +6025,9 @@
                 <a:solidFill>
                   <a:srgbClr val="4A5568"/>
                 </a:solidFill>
-                <a:latin typeface="Calibri" pitchFamily="34" charset="0"/>
-                <a:ea typeface="Calibri" pitchFamily="34" charset="-122"/>
-                <a:cs typeface="Calibri" pitchFamily="34" charset="-120"/>
+                <a:latin typeface="IBM Plex Mono" pitchFamily="34" charset="0"/>
+                <a:ea typeface="IBM Plex Mono" pitchFamily="34" charset="-122"/>
+                <a:cs typeface="IBM Plex Mono" pitchFamily="34" charset="-120"/>
               </a:rPr>
               <a:t>Faster questionnaire completion accelerates deal closure. Tracking quantifies exact contribution.</a:t>
             </a:r>
@@ -6084,9 +6084,9 @@
                 <a:solidFill>
                   <a:srgbClr val="2B6CB0"/>
                 </a:solidFill>
-                <a:latin typeface="Calibri" pitchFamily="34" charset="0"/>
-                <a:ea typeface="Calibri" pitchFamily="34" charset="-122"/>
-                <a:cs typeface="Calibri" pitchFamily="34" charset="-120"/>
+                <a:latin typeface="IBM Plex Mono" pitchFamily="34" charset="0"/>
+                <a:ea typeface="IBM Plex Mono" pitchFamily="34" charset="-122"/>
+                <a:cs typeface="IBM Plex Mono" pitchFamily="34" charset="-120"/>
               </a:rPr>
               <a:t>Cost Avoidance</a:t>
             </a:r>
@@ -6123,9 +6123,9 @@
                 <a:solidFill>
                   <a:srgbClr val="4A5568"/>
                 </a:solidFill>
-                <a:latin typeface="Calibri" pitchFamily="34" charset="0"/>
-                <a:ea typeface="Calibri" pitchFamily="34" charset="-122"/>
-                <a:cs typeface="Calibri" pitchFamily="34" charset="-120"/>
+                <a:latin typeface="IBM Plex Mono" pitchFamily="34" charset="0"/>
+                <a:ea typeface="IBM Plex Mono" pitchFamily="34" charset="-122"/>
+                <a:cs typeface="IBM Plex Mono" pitchFamily="34" charset="-120"/>
               </a:rPr>
               <a:t>Automated compliance reduces audit prep costs 40-60%. Continuous monitoring prevents findings.</a:t>
             </a:r>
@@ -6182,9 +6182,9 @@
                 <a:solidFill>
                   <a:srgbClr val="4C51BF"/>
                 </a:solidFill>
-                <a:latin typeface="Calibri" pitchFamily="34" charset="0"/>
-                <a:ea typeface="Calibri" pitchFamily="34" charset="-122"/>
-                <a:cs typeface="Calibri" pitchFamily="34" charset="-120"/>
+                <a:latin typeface="IBM Plex Mono" pitchFamily="34" charset="0"/>
+                <a:ea typeface="IBM Plex Mono" pitchFamily="34" charset="-122"/>
+                <a:cs typeface="IBM Plex Mono" pitchFamily="34" charset="-120"/>
               </a:rPr>
               <a:t>Risk Reduction</a:t>
             </a:r>
@@ -6221,9 +6221,9 @@
                 <a:solidFill>
                   <a:srgbClr val="4A5568"/>
                 </a:solidFill>
-                <a:latin typeface="Calibri" pitchFamily="34" charset="0"/>
-                <a:ea typeface="Calibri" pitchFamily="34" charset="-122"/>
-                <a:cs typeface="Calibri" pitchFamily="34" charset="-120"/>
+                <a:latin typeface="IBM Plex Mono" pitchFamily="34" charset="0"/>
+                <a:ea typeface="IBM Plex Mono" pitchFamily="34" charset="-122"/>
+                <a:cs typeface="IBM Plex Mono" pitchFamily="34" charset="-120"/>
               </a:rPr>
               <a:t>Quantified risk posture improvement. Proactive identification reduces incident likelihood.</a:t>
             </a:r>
@@ -6280,9 +6280,9 @@
                 <a:solidFill>
                   <a:srgbClr val="276749"/>
                 </a:solidFill>
-                <a:latin typeface="Calibri" pitchFamily="34" charset="0"/>
-                <a:ea typeface="Calibri" pitchFamily="34" charset="-122"/>
-                <a:cs typeface="Calibri" pitchFamily="34" charset="-120"/>
+                <a:latin typeface="IBM Plex Mono" pitchFamily="34" charset="0"/>
+                <a:ea typeface="IBM Plex Mono" pitchFamily="34" charset="-122"/>
+                <a:cs typeface="IBM Plex Mono" pitchFamily="34" charset="-120"/>
               </a:rPr>
               <a:t>Operational Efficiency</a:t>
             </a:r>
@@ -6319,9 +6319,9 @@
                 <a:solidFill>
                   <a:srgbClr val="4A5568"/>
                 </a:solidFill>
-                <a:latin typeface="Calibri" pitchFamily="34" charset="0"/>
-                <a:ea typeface="Calibri" pitchFamily="34" charset="-122"/>
-                <a:cs typeface="Calibri" pitchFamily="34" charset="-120"/>
+                <a:latin typeface="IBM Plex Mono" pitchFamily="34" charset="0"/>
+                <a:ea typeface="IBM Plex Mono" pitchFamily="34" charset="-122"/>
+                <a:cs typeface="IBM Plex Mono" pitchFamily="34" charset="-120"/>
               </a:rPr>
               <a:t>GRC-as-Code eliminates 60%+ manual tasks. Capacity redirected to strategic work.</a:t>
             </a:r>
@@ -6378,9 +6378,9 @@
                 <a:solidFill>
                   <a:srgbClr val="553C9A"/>
                 </a:solidFill>
-                <a:latin typeface="Calibri" pitchFamily="34" charset="0"/>
-                <a:ea typeface="Calibri" pitchFamily="34" charset="-122"/>
-                <a:cs typeface="Calibri" pitchFamily="34" charset="-120"/>
+                <a:latin typeface="IBM Plex Mono" pitchFamily="34" charset="0"/>
+                <a:ea typeface="IBM Plex Mono" pitchFamily="34" charset="-122"/>
+                <a:cs typeface="IBM Plex Mono" pitchFamily="34" charset="-120"/>
               </a:rPr>
               <a:t>Competitive Advantage</a:t>
             </a:r>
@@ -6417,9 +6417,9 @@
                 <a:solidFill>
                   <a:srgbClr val="4A5568"/>
                 </a:solidFill>
-                <a:latin typeface="Calibri" pitchFamily="34" charset="0"/>
-                <a:ea typeface="Calibri" pitchFamily="34" charset="-122"/>
-                <a:cs typeface="Calibri" pitchFamily="34" charset="-120"/>
+                <a:latin typeface="IBM Plex Mono" pitchFamily="34" charset="0"/>
+                <a:ea typeface="IBM Plex Mono" pitchFamily="34" charset="-122"/>
+                <a:cs typeface="IBM Plex Mono" pitchFamily="34" charset="-120"/>
               </a:rPr>
               <a:t>Strong trust posture as sales differentiator. Self-service portal reduces friction.</a:t>
             </a:r>
@@ -6476,9 +6476,9 @@
                 <a:solidFill>
                   <a:srgbClr val="2B6CB0"/>
                 </a:solidFill>
-                <a:latin typeface="Calibri" pitchFamily="34" charset="0"/>
-                <a:ea typeface="Calibri" pitchFamily="34" charset="-122"/>
-                <a:cs typeface="Calibri" pitchFamily="34" charset="-120"/>
+                <a:latin typeface="IBM Plex Mono" pitchFamily="34" charset="0"/>
+                <a:ea typeface="IBM Plex Mono" pitchFamily="34" charset="-122"/>
+                <a:cs typeface="IBM Plex Mono" pitchFamily="34" charset="-120"/>
               </a:rPr>
               <a:t>VALUE DELIVERY TIMELINE</a:t>
             </a:r>
@@ -6518,9 +6518,9 @@
                 <a:solidFill>
                   <a:srgbClr val="4C51BF"/>
                 </a:solidFill>
-                <a:latin typeface="Calibri" pitchFamily="34" charset="0"/>
-                <a:ea typeface="Calibri" pitchFamily="34" charset="-122"/>
-                <a:cs typeface="Calibri" pitchFamily="34" charset="-120"/>
+                <a:latin typeface="IBM Plex Mono" pitchFamily="34" charset="0"/>
+                <a:ea typeface="IBM Plex Mono" pitchFamily="34" charset="-122"/>
+                <a:cs typeface="IBM Plex Mono" pitchFamily="34" charset="-120"/>
               </a:rPr>
               <a:t>30 Days: </a:t>
             </a:r>
@@ -6535,9 +6535,9 @@
                 <a:solidFill>
                   <a:srgbClr val="4A5568"/>
                 </a:solidFill>
-                <a:latin typeface="Calibri" pitchFamily="34" charset="0"/>
-                <a:ea typeface="Calibri" pitchFamily="34" charset="-122"/>
-                <a:cs typeface="Calibri" pitchFamily="34" charset="-120"/>
+                <a:latin typeface="IBM Plex Mono" pitchFamily="34" charset="0"/>
+                <a:ea typeface="IBM Plex Mono" pitchFamily="34" charset="-122"/>
+                <a:cs typeface="IBM Plex Mono" pitchFamily="34" charset="-120"/>
               </a:rPr>
               <a:t>Gap assessment, baseline KPIs</a:t>
             </a:r>
@@ -6555,9 +6555,9 @@
                 <a:solidFill>
                   <a:srgbClr val="4C51BF"/>
                 </a:solidFill>
-                <a:latin typeface="Calibri" pitchFamily="34" charset="0"/>
-                <a:ea typeface="Calibri" pitchFamily="34" charset="-122"/>
-                <a:cs typeface="Calibri" pitchFamily="34" charset="-120"/>
+                <a:latin typeface="IBM Plex Mono" pitchFamily="34" charset="0"/>
+                <a:ea typeface="IBM Plex Mono" pitchFamily="34" charset="-122"/>
+                <a:cs typeface="IBM Plex Mono" pitchFamily="34" charset="-120"/>
               </a:rPr>
               <a:t>90 Days: </a:t>
             </a:r>
@@ -6572,9 +6572,9 @@
                 <a:solidFill>
                   <a:srgbClr val="4A5568"/>
                 </a:solidFill>
-                <a:latin typeface="Calibri" pitchFamily="34" charset="0"/>
-                <a:ea typeface="Calibri" pitchFamily="34" charset="-122"/>
-                <a:cs typeface="Calibri" pitchFamily="34" charset="-120"/>
+                <a:latin typeface="IBM Plex Mono" pitchFamily="34" charset="0"/>
+                <a:ea typeface="IBM Plex Mono" pitchFamily="34" charset="-122"/>
+                <a:cs typeface="IBM Plex Mono" pitchFamily="34" charset="-120"/>
               </a:rPr>
               <a:t>Revenue dashboard, response library v1, engineering embeds</a:t>
             </a:r>
@@ -6592,9 +6592,9 @@
                 <a:solidFill>
                   <a:srgbClr val="4C51BF"/>
                 </a:solidFill>
-                <a:latin typeface="Calibri" pitchFamily="34" charset="0"/>
-                <a:ea typeface="Calibri" pitchFamily="34" charset="-122"/>
-                <a:cs typeface="Calibri" pitchFamily="34" charset="-120"/>
+                <a:latin typeface="IBM Plex Mono" pitchFamily="34" charset="0"/>
+                <a:ea typeface="IBM Plex Mono" pitchFamily="34" charset="-122"/>
+                <a:cs typeface="IBM Plex Mono" pitchFamily="34" charset="-120"/>
               </a:rPr>
               <a:t>180 Days: </a:t>
             </a:r>
@@ -6609,9 +6609,9 @@
                 <a:solidFill>
                   <a:srgbClr val="4A5568"/>
                 </a:solidFill>
-                <a:latin typeface="Calibri" pitchFamily="34" charset="0"/>
-                <a:ea typeface="Calibri" pitchFamily="34" charset="-122"/>
-                <a:cs typeface="Calibri" pitchFamily="34" charset="-120"/>
+                <a:latin typeface="IBM Plex Mono" pitchFamily="34" charset="0"/>
+                <a:ea typeface="IBM Plex Mono" pitchFamily="34" charset="-122"/>
+                <a:cs typeface="IBM Plex Mono" pitchFamily="34" charset="-120"/>
               </a:rPr>
               <a:t>Automation POC in CI/CD, TPRM tiering, TAT improvement</a:t>
             </a:r>
@@ -6629,9 +6629,9 @@
                 <a:solidFill>
                   <a:srgbClr val="4C51BF"/>
                 </a:solidFill>
-                <a:latin typeface="Calibri" pitchFamily="34" charset="0"/>
-                <a:ea typeface="Calibri" pitchFamily="34" charset="-122"/>
-                <a:cs typeface="Calibri" pitchFamily="34" charset="-120"/>
+                <a:latin typeface="IBM Plex Mono" pitchFamily="34" charset="0"/>
+                <a:ea typeface="IBM Plex Mono" pitchFamily="34" charset="-122"/>
+                <a:cs typeface="IBM Plex Mono" pitchFamily="34" charset="-120"/>
               </a:rPr>
               <a:t>365 Days: </a:t>
             </a:r>
@@ -6646,9 +6646,9 @@
                 <a:solidFill>
                   <a:srgbClr val="4A5568"/>
                 </a:solidFill>
-                <a:latin typeface="Calibri" pitchFamily="34" charset="0"/>
-                <a:ea typeface="Calibri" pitchFamily="34" charset="-122"/>
-                <a:cs typeface="Calibri" pitchFamily="34" charset="-120"/>
+                <a:latin typeface="IBM Plex Mono" pitchFamily="34" charset="0"/>
+                <a:ea typeface="IBM Plex Mono" pitchFamily="34" charset="-122"/>
+                <a:cs typeface="IBM Plex Mono" pitchFamily="34" charset="-120"/>
               </a:rPr>
               <a:t>Full GRC-as-Code, executive dashboards, maturity improvement</a:t>
             </a:r>
@@ -6737,9 +6737,9 @@
                 <a:solidFill>
                   <a:srgbClr val="1A1D23"/>
                 </a:solidFill>
-                <a:latin typeface="Georgia" pitchFamily="34" charset="0"/>
-                <a:ea typeface="Georgia" pitchFamily="34" charset="-122"/>
-                <a:cs typeface="Georgia" pitchFamily="34" charset="-120"/>
+                <a:latin typeface="IBM Plex Mono" pitchFamily="34" charset="0"/>
+                <a:ea typeface="IBM Plex Mono" pitchFamily="34" charset="-122"/>
+                <a:cs typeface="IBM Plex Mono" pitchFamily="34" charset="-120"/>
               </a:rPr>
               <a:t>Immediate Next Steps &amp; The Ask</a:t>
             </a:r>
@@ -6799,9 +6799,9 @@
                 <a:solidFill>
                   <a:srgbClr val="718096"/>
                 </a:solidFill>
-                <a:latin typeface="Calibri" pitchFamily="34" charset="0"/>
-                <a:ea typeface="Calibri" pitchFamily="34" charset="-122"/>
-                <a:cs typeface="Calibri" pitchFamily="34" charset="-120"/>
+                <a:latin typeface="IBM Plex Mono" pitchFamily="34" charset="0"/>
+                <a:ea typeface="IBM Plex Mono" pitchFamily="34" charset="-122"/>
+                <a:cs typeface="IBM Plex Mono" pitchFamily="34" charset="-120"/>
               </a:rPr>
               <a:t>CONFIDENTIAL  |  GRC Program Modernization Roadmap 2026</a:t>
             </a:r>
@@ -6838,9 +6838,9 @@
                 <a:solidFill>
                   <a:srgbClr val="718096"/>
                 </a:solidFill>
-                <a:latin typeface="Calibri" pitchFamily="34" charset="0"/>
-                <a:ea typeface="Calibri" pitchFamily="34" charset="-122"/>
-                <a:cs typeface="Calibri" pitchFamily="34" charset="-120"/>
+                <a:latin typeface="IBM Plex Mono" pitchFamily="34" charset="0"/>
+                <a:ea typeface="IBM Plex Mono" pitchFamily="34" charset="-122"/>
+                <a:cs typeface="IBM Plex Mono" pitchFamily="34" charset="-120"/>
               </a:rPr>
               <a:t>12</a:t>
             </a:r>
@@ -6924,9 +6924,9 @@
                 <a:solidFill>
                   <a:srgbClr val="2B6CB0"/>
                 </a:solidFill>
-                <a:latin typeface="Calibri" pitchFamily="34" charset="0"/>
-                <a:ea typeface="Calibri" pitchFamily="34" charset="-122"/>
-                <a:cs typeface="Calibri" pitchFamily="34" charset="-120"/>
+                <a:latin typeface="IBM Plex Mono" pitchFamily="34" charset="0"/>
+                <a:ea typeface="IBM Plex Mono" pitchFamily="34" charset="-122"/>
+                <a:cs typeface="IBM Plex Mono" pitchFamily="34" charset="-120"/>
               </a:rPr>
               <a:t>30-Day Action Plan</a:t>
             </a:r>
@@ -6963,9 +6963,9 @@
                 <a:solidFill>
                   <a:srgbClr val="1A1D23"/>
                 </a:solidFill>
-                <a:latin typeface="Calibri" pitchFamily="34" charset="0"/>
-                <a:ea typeface="Calibri" pitchFamily="34" charset="-122"/>
-                <a:cs typeface="Calibri" pitchFamily="34" charset="-120"/>
+                <a:latin typeface="IBM Plex Mono" pitchFamily="34" charset="0"/>
+                <a:ea typeface="IBM Plex Mono" pitchFamily="34" charset="-122"/>
+                <a:cs typeface="IBM Plex Mono" pitchFamily="34" charset="-120"/>
               </a:rPr>
               <a:t>Week 1-2: Stakeholder Alignment</a:t>
             </a:r>
@@ -7006,9 +7006,9 @@
                 <a:solidFill>
                   <a:srgbClr val="4A5568"/>
                 </a:solidFill>
-                <a:latin typeface="Calibri" pitchFamily="34" charset="0"/>
-                <a:ea typeface="Calibri" pitchFamily="34" charset="-122"/>
-                <a:cs typeface="Calibri" pitchFamily="34" charset="-120"/>
+                <a:latin typeface="IBM Plex Mono" pitchFamily="34" charset="0"/>
+                <a:ea typeface="IBM Plex Mono" pitchFamily="34" charset="-122"/>
+                <a:cs typeface="IBM Plex Mono" pitchFamily="34" charset="-120"/>
               </a:rPr>
               <a:t>1:1 meetings with all direct reports</a:t>
             </a:r>
@@ -7027,9 +7027,9 @@
                 <a:solidFill>
                   <a:srgbClr val="4A5568"/>
                 </a:solidFill>
-                <a:latin typeface="Calibri" pitchFamily="34" charset="0"/>
-                <a:ea typeface="Calibri" pitchFamily="34" charset="-122"/>
-                <a:cs typeface="Calibri" pitchFamily="34" charset="-120"/>
+                <a:latin typeface="IBM Plex Mono" pitchFamily="34" charset="0"/>
+                <a:ea typeface="IBM Plex Mono" pitchFamily="34" charset="-122"/>
+                <a:cs typeface="IBM Plex Mono" pitchFamily="34" charset="-120"/>
               </a:rPr>
               <a:t>Alignment with Chelsea Main and Damian King</a:t>
             </a:r>
@@ -7048,9 +7048,9 @@
                 <a:solidFill>
                   <a:srgbClr val="4A5568"/>
                 </a:solidFill>
-                <a:latin typeface="Calibri" pitchFamily="34" charset="0"/>
-                <a:ea typeface="Calibri" pitchFamily="34" charset="-122"/>
-                <a:cs typeface="Calibri" pitchFamily="34" charset="-120"/>
+                <a:latin typeface="IBM Plex Mono" pitchFamily="34" charset="0"/>
+                <a:ea typeface="IBM Plex Mono" pitchFamily="34" charset="-122"/>
+                <a:cs typeface="IBM Plex Mono" pitchFamily="34" charset="-120"/>
               </a:rPr>
               <a:t>Customer Trust team assessment + interim lead plan</a:t>
             </a:r>
@@ -7069,9 +7069,9 @@
                 <a:solidFill>
                   <a:srgbClr val="4A5568"/>
                 </a:solidFill>
-                <a:latin typeface="Calibri" pitchFamily="34" charset="0"/>
-                <a:ea typeface="Calibri" pitchFamily="34" charset="-122"/>
-                <a:cs typeface="Calibri" pitchFamily="34" charset="-120"/>
+                <a:latin typeface="IBM Plex Mono" pitchFamily="34" charset="0"/>
+                <a:ea typeface="IBM Plex Mono" pitchFamily="34" charset="-122"/>
+                <a:cs typeface="IBM Plex Mono" pitchFamily="34" charset="-120"/>
               </a:rPr>
               <a:t>Review all existing documentation and artifacts</a:t>
             </a:r>
@@ -7108,9 +7108,9 @@
                 <a:solidFill>
                   <a:srgbClr val="1A1D23"/>
                 </a:solidFill>
-                <a:latin typeface="Calibri" pitchFamily="34" charset="0"/>
-                <a:ea typeface="Calibri" pitchFamily="34" charset="-122"/>
-                <a:cs typeface="Calibri" pitchFamily="34" charset="-120"/>
+                <a:latin typeface="IBM Plex Mono" pitchFamily="34" charset="0"/>
+                <a:ea typeface="IBM Plex Mono" pitchFamily="34" charset="-122"/>
+                <a:cs typeface="IBM Plex Mono" pitchFamily="34" charset="-120"/>
               </a:rPr>
               <a:t>Week 2-3: Assessment &amp; Baseline</a:t>
             </a:r>
@@ -7151,9 +7151,9 @@
                 <a:solidFill>
                   <a:srgbClr val="4A5568"/>
                 </a:solidFill>
-                <a:latin typeface="Calibri" pitchFamily="34" charset="0"/>
-                <a:ea typeface="Calibri" pitchFamily="34" charset="-122"/>
-                <a:cs typeface="Calibri" pitchFamily="34" charset="-120"/>
+                <a:latin typeface="IBM Plex Mono" pitchFamily="34" charset="0"/>
+                <a:ea typeface="IBM Plex Mono" pitchFamily="34" charset="-122"/>
+                <a:cs typeface="IBM Plex Mono" pitchFamily="34" charset="-120"/>
               </a:rPr>
               <a:t>GRC maturity assessment (NIST CSF)</a:t>
             </a:r>
@@ -7172,9 +7172,9 @@
                 <a:solidFill>
                   <a:srgbClr val="4A5568"/>
                 </a:solidFill>
-                <a:latin typeface="Calibri" pitchFamily="34" charset="0"/>
-                <a:ea typeface="Calibri" pitchFamily="34" charset="-122"/>
-                <a:cs typeface="Calibri" pitchFamily="34" charset="-120"/>
+                <a:latin typeface="IBM Plex Mono" pitchFamily="34" charset="0"/>
+                <a:ea typeface="IBM Plex Mono" pitchFamily="34" charset="-122"/>
+                <a:cs typeface="IBM Plex Mono" pitchFamily="34" charset="-120"/>
               </a:rPr>
               <a:t>Map Customer Trust workflows and tools</a:t>
             </a:r>
@@ -7193,9 +7193,9 @@
                 <a:solidFill>
                   <a:srgbClr val="4A5568"/>
                 </a:solidFill>
-                <a:latin typeface="Calibri" pitchFamily="34" charset="0"/>
-                <a:ea typeface="Calibri" pitchFamily="34" charset="-122"/>
-                <a:cs typeface="Calibri" pitchFamily="34" charset="-120"/>
+                <a:latin typeface="IBM Plex Mono" pitchFamily="34" charset="0"/>
+                <a:ea typeface="IBM Plex Mono" pitchFamily="34" charset="-122"/>
+                <a:cs typeface="IBM Plex Mono" pitchFamily="34" charset="-120"/>
               </a:rPr>
               <a:t>Document TPRM, audit, BC/DR processes</a:t>
             </a:r>
@@ -7214,9 +7214,9 @@
                 <a:solidFill>
                   <a:srgbClr val="4A5568"/>
                 </a:solidFill>
-                <a:latin typeface="Calibri" pitchFamily="34" charset="0"/>
-                <a:ea typeface="Calibri" pitchFamily="34" charset="-122"/>
-                <a:cs typeface="Calibri" pitchFamily="34" charset="-120"/>
+                <a:latin typeface="IBM Plex Mono" pitchFamily="34" charset="0"/>
+                <a:ea typeface="IBM Plex Mono" pitchFamily="34" charset="-122"/>
+                <a:cs typeface="IBM Plex Mono" pitchFamily="34" charset="-120"/>
               </a:rPr>
               <a:t>Identify compliance obligations and certifications</a:t>
             </a:r>
@@ -7253,9 +7253,9 @@
                 <a:solidFill>
                   <a:srgbClr val="1A1D23"/>
                 </a:solidFill>
-                <a:latin typeface="Calibri" pitchFamily="34" charset="0"/>
-                <a:ea typeface="Calibri" pitchFamily="34" charset="-122"/>
-                <a:cs typeface="Calibri" pitchFamily="34" charset="-120"/>
+                <a:latin typeface="IBM Plex Mono" pitchFamily="34" charset="0"/>
+                <a:ea typeface="IBM Plex Mono" pitchFamily="34" charset="-122"/>
+                <a:cs typeface="IBM Plex Mono" pitchFamily="34" charset="-120"/>
               </a:rPr>
               <a:t>Week 3-4: Quick Win Launch</a:t>
             </a:r>
@@ -7296,9 +7296,9 @@
                 <a:solidFill>
                   <a:srgbClr val="4A5568"/>
                 </a:solidFill>
-                <a:latin typeface="Calibri" pitchFamily="34" charset="0"/>
-                <a:ea typeface="Calibri" pitchFamily="34" charset="-122"/>
-                <a:cs typeface="Calibri" pitchFamily="34" charset="-120"/>
+                <a:latin typeface="IBM Plex Mono" pitchFamily="34" charset="0"/>
+                <a:ea typeface="IBM Plex Mono" pitchFamily="34" charset="-122"/>
+                <a:cs typeface="IBM Plex Mono" pitchFamily="34" charset="-120"/>
               </a:rPr>
               <a:t>Initiate revenue tracking dashboard development</a:t>
             </a:r>
@@ -7317,9 +7317,9 @@
                 <a:solidFill>
                   <a:srgbClr val="4A5568"/>
                 </a:solidFill>
-                <a:latin typeface="Calibri" pitchFamily="34" charset="0"/>
-                <a:ea typeface="Calibri" pitchFamily="34" charset="-122"/>
-                <a:cs typeface="Calibri" pitchFamily="34" charset="-120"/>
+                <a:latin typeface="IBM Plex Mono" pitchFamily="34" charset="0"/>
+                <a:ea typeface="IBM Plex Mono" pitchFamily="34" charset="-122"/>
+                <a:cs typeface="IBM Plex Mono" pitchFamily="34" charset="-120"/>
               </a:rPr>
               <a:t>Begin response library (top 50 questions)</a:t>
             </a:r>
@@ -7338,9 +7338,9 @@
                 <a:solidFill>
                   <a:srgbClr val="4A5568"/>
                 </a:solidFill>
-                <a:latin typeface="Calibri" pitchFamily="34" charset="0"/>
-                <a:ea typeface="Calibri" pitchFamily="34" charset="-122"/>
-                <a:cs typeface="Calibri" pitchFamily="34" charset="-120"/>
+                <a:latin typeface="IBM Plex Mono" pitchFamily="34" charset="0"/>
+                <a:ea typeface="IBM Plex Mono" pitchFamily="34" charset="-122"/>
+                <a:cs typeface="IBM Plex Mono" pitchFamily="34" charset="-120"/>
               </a:rPr>
               <a:t>Schedule first GRC-Engineering touchpoints</a:t>
             </a:r>
@@ -7359,9 +7359,9 @@
                 <a:solidFill>
                   <a:srgbClr val="4A5568"/>
                 </a:solidFill>
-                <a:latin typeface="Calibri" pitchFamily="34" charset="0"/>
-                <a:ea typeface="Calibri" pitchFamily="34" charset="-122"/>
-                <a:cs typeface="Calibri" pitchFamily="34" charset="-120"/>
+                <a:latin typeface="IBM Plex Mono" pitchFamily="34" charset="0"/>
+                <a:ea typeface="IBM Plex Mono" pitchFamily="34" charset="-122"/>
+                <a:cs typeface="IBM Plex Mono" pitchFamily="34" charset="-120"/>
               </a:rPr>
               <a:t>Present initial findings to CISO</a:t>
             </a:r>
@@ -7445,9 +7445,9 @@
                 <a:solidFill>
                   <a:srgbClr val="4C51BF"/>
                 </a:solidFill>
-                <a:latin typeface="Calibri" pitchFamily="34" charset="0"/>
-                <a:ea typeface="Calibri" pitchFamily="34" charset="-122"/>
-                <a:cs typeface="Calibri" pitchFamily="34" charset="-120"/>
+                <a:latin typeface="IBM Plex Mono" pitchFamily="34" charset="0"/>
+                <a:ea typeface="IBM Plex Mono" pitchFamily="34" charset="-122"/>
+                <a:cs typeface="IBM Plex Mono" pitchFamily="34" charset="-120"/>
               </a:rPr>
               <a:t>The Ask from CISO</a:t>
             </a:r>
@@ -7488,9 +7488,9 @@
                 <a:solidFill>
                   <a:srgbClr val="4A5568"/>
                 </a:solidFill>
-                <a:latin typeface="Calibri" pitchFamily="34" charset="0"/>
-                <a:ea typeface="Calibri" pitchFamily="34" charset="-122"/>
-                <a:cs typeface="Calibri" pitchFamily="34" charset="-120"/>
+                <a:latin typeface="IBM Plex Mono" pitchFamily="34" charset="0"/>
+                <a:ea typeface="IBM Plex Mono" pitchFamily="34" charset="-122"/>
+                <a:cs typeface="IBM Plex Mono" pitchFamily="34" charset="-120"/>
               </a:rPr>
               <a:t>Endorse this roadmap as official 2026 GRC strategic plan</a:t>
             </a:r>
@@ -7509,9 +7509,9 @@
                 <a:solidFill>
                   <a:srgbClr val="4A5568"/>
                 </a:solidFill>
-                <a:latin typeface="Calibri" pitchFamily="34" charset="0"/>
-                <a:ea typeface="Calibri" pitchFamily="34" charset="-122"/>
-                <a:cs typeface="Calibri" pitchFamily="34" charset="-120"/>
+                <a:latin typeface="IBM Plex Mono" pitchFamily="34" charset="0"/>
+                <a:ea typeface="IBM Plex Mono" pitchFamily="34" charset="-122"/>
+                <a:cs typeface="IBM Plex Mono" pitchFamily="34" charset="-120"/>
               </a:rPr>
               <a:t>Executive sponsorship for Engineering integration</a:t>
             </a:r>
@@ -7530,9 +7530,9 @@
                 <a:solidFill>
                   <a:srgbClr val="4A5568"/>
                 </a:solidFill>
-                <a:latin typeface="Calibri" pitchFamily="34" charset="0"/>
-                <a:ea typeface="Calibri" pitchFamily="34" charset="-122"/>
-                <a:cs typeface="Calibri" pitchFamily="34" charset="-120"/>
+                <a:latin typeface="IBM Plex Mono" pitchFamily="34" charset="0"/>
+                <a:ea typeface="IBM Plex Mono" pitchFamily="34" charset="-122"/>
+                <a:cs typeface="IBM Plex Mono" pitchFamily="34" charset="-120"/>
               </a:rPr>
               <a:t>Approve budget for platform evaluation and training</a:t>
             </a:r>
@@ -7551,9 +7551,9 @@
                 <a:solidFill>
                   <a:srgbClr val="4A5568"/>
                 </a:solidFill>
-                <a:latin typeface="Calibri" pitchFamily="34" charset="0"/>
-                <a:ea typeface="Calibri" pitchFamily="34" charset="-122"/>
-                <a:cs typeface="Calibri" pitchFamily="34" charset="-120"/>
+                <a:latin typeface="IBM Plex Mono" pitchFamily="34" charset="0"/>
+                <a:ea typeface="IBM Plex Mono" pitchFamily="34" charset="-122"/>
+                <a:cs typeface="IBM Plex Mono" pitchFamily="34" charset="-120"/>
               </a:rPr>
               <a:t>Support hiring: Technical GRC Engineer + Trust lead</a:t>
             </a:r>
@@ -7572,9 +7572,9 @@
                 <a:solidFill>
                   <a:srgbClr val="4A5568"/>
                 </a:solidFill>
-                <a:latin typeface="Calibri" pitchFamily="34" charset="0"/>
-                <a:ea typeface="Calibri" pitchFamily="34" charset="-122"/>
-                <a:cs typeface="Calibri" pitchFamily="34" charset="-120"/>
+                <a:latin typeface="IBM Plex Mono" pitchFamily="34" charset="0"/>
+                <a:ea typeface="IBM Plex Mono" pitchFamily="34" charset="-122"/>
+                <a:cs typeface="IBM Plex Mono" pitchFamily="34" charset="-120"/>
               </a:rPr>
               <a:t>Facilitate intros to product/engineering leadership</a:t>
             </a:r>
@@ -7593,9 +7593,9 @@
                 <a:solidFill>
                   <a:srgbClr val="4A5568"/>
                 </a:solidFill>
-                <a:latin typeface="Calibri" pitchFamily="34" charset="0"/>
-                <a:ea typeface="Calibri" pitchFamily="34" charset="-122"/>
-                <a:cs typeface="Calibri" pitchFamily="34" charset="-120"/>
+                <a:latin typeface="IBM Plex Mono" pitchFamily="34" charset="0"/>
+                <a:ea typeface="IBM Plex Mono" pitchFamily="34" charset="-122"/>
+                <a:cs typeface="IBM Plex Mono" pitchFamily="34" charset="-120"/>
               </a:rPr>
               <a:t>Monthly roadmap review cadence (30-min)</a:t>
             </a:r>
@@ -7679,9 +7679,9 @@
                 <a:solidFill>
                   <a:srgbClr val="276749"/>
                 </a:solidFill>
-                <a:latin typeface="Calibri" pitchFamily="34" charset="0"/>
-                <a:ea typeface="Calibri" pitchFamily="34" charset="-122"/>
-                <a:cs typeface="Calibri" pitchFamily="34" charset="-120"/>
+                <a:latin typeface="IBM Plex Mono" pitchFamily="34" charset="0"/>
+                <a:ea typeface="IBM Plex Mono" pitchFamily="34" charset="-122"/>
+                <a:cs typeface="IBM Plex Mono" pitchFamily="34" charset="-120"/>
               </a:rPr>
               <a:t>Success Criteria (12 Months)</a:t>
             </a:r>
@@ -7722,9 +7722,9 @@
                 <a:solidFill>
                   <a:srgbClr val="4A5568"/>
                 </a:solidFill>
-                <a:latin typeface="Calibri" pitchFamily="34" charset="0"/>
-                <a:ea typeface="Calibri" pitchFamily="34" charset="-122"/>
-                <a:cs typeface="Calibri" pitchFamily="34" charset="-120"/>
+                <a:latin typeface="IBM Plex Mono" pitchFamily="34" charset="0"/>
+                <a:ea typeface="IBM Plex Mono" pitchFamily="34" charset="-122"/>
+                <a:cs typeface="IBM Plex Mono" pitchFamily="34" charset="-120"/>
               </a:rPr>
               <a:t>GRC maturity improvement (baseline to Tier 3)</a:t>
             </a:r>
@@ -7743,9 +7743,9 @@
                 <a:solidFill>
                   <a:srgbClr val="4A5568"/>
                 </a:solidFill>
-                <a:latin typeface="Calibri" pitchFamily="34" charset="0"/>
-                <a:ea typeface="Calibri" pitchFamily="34" charset="-122"/>
-                <a:cs typeface="Calibri" pitchFamily="34" charset="-120"/>
+                <a:latin typeface="IBM Plex Mono" pitchFamily="34" charset="0"/>
+                <a:ea typeface="IBM Plex Mono" pitchFamily="34" charset="-122"/>
+                <a:cs typeface="IBM Plex Mono" pitchFamily="34" charset="-120"/>
               </a:rPr>
               <a:t>Customer Trust TAT reduced by 60%</a:t>
             </a:r>
@@ -7764,9 +7764,9 @@
                 <a:solidFill>
                   <a:srgbClr val="4A5568"/>
                 </a:solidFill>
-                <a:latin typeface="Calibri" pitchFamily="34" charset="0"/>
-                <a:ea typeface="Calibri" pitchFamily="34" charset="-122"/>
-                <a:cs typeface="Calibri" pitchFamily="34" charset="-120"/>
+                <a:latin typeface="IBM Plex Mono" pitchFamily="34" charset="0"/>
+                <a:ea typeface="IBM Plex Mono" pitchFamily="34" charset="-122"/>
+                <a:cs typeface="IBM Plex Mono" pitchFamily="34" charset="-120"/>
               </a:rPr>
               <a:t>Revenue attribution dashboard operational</a:t>
             </a:r>
@@ -7785,9 +7785,9 @@
                 <a:solidFill>
                   <a:srgbClr val="4A5568"/>
                 </a:solidFill>
-                <a:latin typeface="Calibri" pitchFamily="34" charset="0"/>
-                <a:ea typeface="Calibri" pitchFamily="34" charset="-122"/>
-                <a:cs typeface="Calibri" pitchFamily="34" charset="-120"/>
+                <a:latin typeface="IBM Plex Mono" pitchFamily="34" charset="0"/>
+                <a:ea typeface="IBM Plex Mono" pitchFamily="34" charset="-122"/>
+                <a:cs typeface="IBM Plex Mono" pitchFamily="34" charset="-120"/>
               </a:rPr>
               <a:t>Policy-as-code in at least one CI/CD pipeline</a:t>
             </a:r>
@@ -7806,9 +7806,9 @@
                 <a:solidFill>
                   <a:srgbClr val="4A5568"/>
                 </a:solidFill>
-                <a:latin typeface="Calibri" pitchFamily="34" charset="0"/>
-                <a:ea typeface="Calibri" pitchFamily="34" charset="-122"/>
-                <a:cs typeface="Calibri" pitchFamily="34" charset="-120"/>
+                <a:latin typeface="IBM Plex Mono" pitchFamily="34" charset="0"/>
+                <a:ea typeface="IBM Plex Mono" pitchFamily="34" charset="-122"/>
+                <a:cs typeface="IBM Plex Mono" pitchFamily="34" charset="-120"/>
               </a:rPr>
               <a:t>100% critical vendors assessed in TPRM framework</a:t>
             </a:r>
@@ -7877,9 +7877,9 @@
                 <a:solidFill>
                   <a:srgbClr val="1A1D23"/>
                 </a:solidFill>
-                <a:latin typeface="Georgia" pitchFamily="34" charset="0"/>
-                <a:ea typeface="Georgia" pitchFamily="34" charset="-122"/>
-                <a:cs typeface="Georgia" pitchFamily="34" charset="-120"/>
+                <a:latin typeface="IBM Plex Mono" pitchFamily="34" charset="0"/>
+                <a:ea typeface="IBM Plex Mono" pitchFamily="34" charset="-122"/>
+                <a:cs typeface="IBM Plex Mono" pitchFamily="34" charset="-120"/>
               </a:rPr>
               <a:t>Appendix: Industry Best Practices &amp; Frameworks</a:t>
             </a:r>
@@ -7939,9 +7939,9 @@
                 <a:solidFill>
                   <a:srgbClr val="718096"/>
                 </a:solidFill>
-                <a:latin typeface="Calibri" pitchFamily="34" charset="0"/>
-                <a:ea typeface="Calibri" pitchFamily="34" charset="-122"/>
-                <a:cs typeface="Calibri" pitchFamily="34" charset="-120"/>
+                <a:latin typeface="IBM Plex Mono" pitchFamily="34" charset="0"/>
+                <a:ea typeface="IBM Plex Mono" pitchFamily="34" charset="-122"/>
+                <a:cs typeface="IBM Plex Mono" pitchFamily="34" charset="-120"/>
               </a:rPr>
               <a:t>CONFIDENTIAL  |  GRC Program Modernization Roadmap 2026</a:t>
             </a:r>
@@ -7978,9 +7978,9 @@
                 <a:solidFill>
                   <a:srgbClr val="718096"/>
                 </a:solidFill>
-                <a:latin typeface="Calibri" pitchFamily="34" charset="0"/>
-                <a:ea typeface="Calibri" pitchFamily="34" charset="-122"/>
-                <a:cs typeface="Calibri" pitchFamily="34" charset="-120"/>
+                <a:latin typeface="IBM Plex Mono" pitchFamily="34" charset="0"/>
+                <a:ea typeface="IBM Plex Mono" pitchFamily="34" charset="-122"/>
+                <a:cs typeface="IBM Plex Mono" pitchFamily="34" charset="-120"/>
               </a:rPr>
               <a:t>13</a:t>
             </a:r>
@@ -8064,9 +8064,9 @@
                 <a:solidFill>
                   <a:srgbClr val="2B6CB0"/>
                 </a:solidFill>
-                <a:latin typeface="Calibri" pitchFamily="34" charset="0"/>
-                <a:ea typeface="Calibri" pitchFamily="34" charset="-122"/>
-                <a:cs typeface="Calibri" pitchFamily="34" charset="-120"/>
+                <a:latin typeface="IBM Plex Mono" pitchFamily="34" charset="0"/>
+                <a:ea typeface="IBM Plex Mono" pitchFamily="34" charset="-122"/>
+                <a:cs typeface="IBM Plex Mono" pitchFamily="34" charset="-120"/>
               </a:rPr>
               <a:t>Framework Alignment</a:t>
             </a:r>
@@ -8107,9 +8107,9 @@
                 <a:solidFill>
                   <a:srgbClr val="4A5568"/>
                 </a:solidFill>
-                <a:latin typeface="Calibri" pitchFamily="34" charset="0"/>
-                <a:ea typeface="Calibri" pitchFamily="34" charset="-122"/>
-                <a:cs typeface="Calibri" pitchFamily="34" charset="-120"/>
+                <a:latin typeface="IBM Plex Mono" pitchFamily="34" charset="0"/>
+                <a:ea typeface="IBM Plex Mono" pitchFamily="34" charset="-122"/>
+                <a:cs typeface="IBM Plex Mono" pitchFamily="34" charset="-120"/>
               </a:rPr>
               <a:t>NIST CSF 2.0 - Primary maturity model and governance backbone</a:t>
             </a:r>
@@ -8128,9 +8128,9 @@
                 <a:solidFill>
                   <a:srgbClr val="4A5568"/>
                 </a:solidFill>
-                <a:latin typeface="Calibri" pitchFamily="34" charset="0"/>
-                <a:ea typeface="Calibri" pitchFamily="34" charset="-122"/>
-                <a:cs typeface="Calibri" pitchFamily="34" charset="-120"/>
+                <a:latin typeface="IBM Plex Mono" pitchFamily="34" charset="0"/>
+                <a:ea typeface="IBM Plex Mono" pitchFamily="34" charset="-122"/>
+                <a:cs typeface="IBM Plex Mono" pitchFamily="34" charset="-120"/>
               </a:rPr>
               <a:t>ISO 27001:2022 - ISMS alignment for certification</a:t>
             </a:r>
@@ -8149,9 +8149,9 @@
                 <a:solidFill>
                   <a:srgbClr val="4A5568"/>
                 </a:solidFill>
-                <a:latin typeface="Calibri" pitchFamily="34" charset="0"/>
-                <a:ea typeface="Calibri" pitchFamily="34" charset="-122"/>
-                <a:cs typeface="Calibri" pitchFamily="34" charset="-120"/>
+                <a:latin typeface="IBM Plex Mono" pitchFamily="34" charset="0"/>
+                <a:ea typeface="IBM Plex Mono" pitchFamily="34" charset="-122"/>
+                <a:cs typeface="IBM Plex Mono" pitchFamily="34" charset="-120"/>
               </a:rPr>
               <a:t>SOC 2 Type II - Automated evidence collection</a:t>
             </a:r>
@@ -8170,9 +8170,9 @@
                 <a:solidFill>
                   <a:srgbClr val="4A5568"/>
                 </a:solidFill>
-                <a:latin typeface="Calibri" pitchFamily="34" charset="0"/>
-                <a:ea typeface="Calibri" pitchFamily="34" charset="-122"/>
-                <a:cs typeface="Calibri" pitchFamily="34" charset="-120"/>
+                <a:latin typeface="IBM Plex Mono" pitchFamily="34" charset="0"/>
+                <a:ea typeface="IBM Plex Mono" pitchFamily="34" charset="-122"/>
+                <a:cs typeface="IBM Plex Mono" pitchFamily="34" charset="-120"/>
               </a:rPr>
               <a:t>NIST SP 800-53 Rev. 5 - Comprehensive control catalog</a:t>
             </a:r>
@@ -8191,9 +8191,9 @@
                 <a:solidFill>
                   <a:srgbClr val="4A5568"/>
                 </a:solidFill>
-                <a:latin typeface="Calibri" pitchFamily="34" charset="0"/>
-                <a:ea typeface="Calibri" pitchFamily="34" charset="-122"/>
-                <a:cs typeface="Calibri" pitchFamily="34" charset="-120"/>
+                <a:latin typeface="IBM Plex Mono" pitchFamily="34" charset="0"/>
+                <a:ea typeface="IBM Plex Mono" pitchFamily="34" charset="-122"/>
+                <a:cs typeface="IBM Plex Mono" pitchFamily="34" charset="-120"/>
               </a:rPr>
               <a:t>FAIR - Quantitative risk analysis methodology</a:t>
             </a:r>
@@ -8277,9 +8277,9 @@
                 <a:solidFill>
                   <a:srgbClr val="0E7C86"/>
                 </a:solidFill>
-                <a:latin typeface="Calibri" pitchFamily="34" charset="0"/>
-                <a:ea typeface="Calibri" pitchFamily="34" charset="-122"/>
-                <a:cs typeface="Calibri" pitchFamily="34" charset="-120"/>
+                <a:latin typeface="IBM Plex Mono" pitchFamily="34" charset="0"/>
+                <a:ea typeface="IBM Plex Mono" pitchFamily="34" charset="-122"/>
+                <a:cs typeface="IBM Plex Mono" pitchFamily="34" charset="-120"/>
               </a:rPr>
               <a:t>GRC Technology Trends</a:t>
             </a:r>
@@ -8320,9 +8320,9 @@
                 <a:solidFill>
                   <a:srgbClr val="4A5568"/>
                 </a:solidFill>
-                <a:latin typeface="Calibri" pitchFamily="34" charset="0"/>
-                <a:ea typeface="Calibri" pitchFamily="34" charset="-122"/>
-                <a:cs typeface="Calibri" pitchFamily="34" charset="-120"/>
+                <a:latin typeface="IBM Plex Mono" pitchFamily="34" charset="0"/>
+                <a:ea typeface="IBM Plex Mono" pitchFamily="34" charset="-122"/>
+                <a:cs typeface="IBM Plex Mono" pitchFamily="34" charset="-120"/>
               </a:rPr>
               <a:t>GRC-as-Code: OPA, Rego, Terraform Sentinel, AWS Config</a:t>
             </a:r>
@@ -8341,9 +8341,9 @@
                 <a:solidFill>
                   <a:srgbClr val="4A5568"/>
                 </a:solidFill>
-                <a:latin typeface="Calibri" pitchFamily="34" charset="0"/>
-                <a:ea typeface="Calibri" pitchFamily="34" charset="-122"/>
-                <a:cs typeface="Calibri" pitchFamily="34" charset="-120"/>
+                <a:latin typeface="IBM Plex Mono" pitchFamily="34" charset="0"/>
+                <a:ea typeface="IBM Plex Mono" pitchFamily="34" charset="-122"/>
+                <a:cs typeface="IBM Plex Mono" pitchFamily="34" charset="-120"/>
               </a:rPr>
               <a:t>Continuous Compliance: Real-time monitoring</a:t>
             </a:r>
@@ -8362,9 +8362,9 @@
                 <a:solidFill>
                   <a:srgbClr val="4A5568"/>
                 </a:solidFill>
-                <a:latin typeface="Calibri" pitchFamily="34" charset="0"/>
-                <a:ea typeface="Calibri" pitchFamily="34" charset="-122"/>
-                <a:cs typeface="Calibri" pitchFamily="34" charset="-120"/>
+                <a:latin typeface="IBM Plex Mono" pitchFamily="34" charset="0"/>
+                <a:ea typeface="IBM Plex Mono" pitchFamily="34" charset="-122"/>
+                <a:cs typeface="IBM Plex Mono" pitchFamily="34" charset="-120"/>
               </a:rPr>
               <a:t>AI-Assisted Trust: LLM-powered questionnaire completion</a:t>
             </a:r>
@@ -8383,9 +8383,9 @@
                 <a:solidFill>
                   <a:srgbClr val="4A5568"/>
                 </a:solidFill>
-                <a:latin typeface="Calibri" pitchFamily="34" charset="0"/>
-                <a:ea typeface="Calibri" pitchFamily="34" charset="-122"/>
-                <a:cs typeface="Calibri" pitchFamily="34" charset="-120"/>
+                <a:latin typeface="IBM Plex Mono" pitchFamily="34" charset="0"/>
+                <a:ea typeface="IBM Plex Mono" pitchFamily="34" charset="-122"/>
+                <a:cs typeface="IBM Plex Mono" pitchFamily="34" charset="-120"/>
               </a:rPr>
               <a:t>Unified Platforms: Converged risk/compliance/audit</a:t>
             </a:r>
@@ -8404,9 +8404,9 @@
                 <a:solidFill>
                   <a:srgbClr val="4A5568"/>
                 </a:solidFill>
-                <a:latin typeface="Calibri" pitchFamily="34" charset="0"/>
-                <a:ea typeface="Calibri" pitchFamily="34" charset="-122"/>
-                <a:cs typeface="Calibri" pitchFamily="34" charset="-120"/>
+                <a:latin typeface="IBM Plex Mono" pitchFamily="34" charset="0"/>
+                <a:ea typeface="IBM Plex Mono" pitchFamily="34" charset="-122"/>
+                <a:cs typeface="IBM Plex Mono" pitchFamily="34" charset="-120"/>
               </a:rPr>
               <a:t>Trust Centers: Self-service security transparency</a:t>
             </a:r>
@@ -8490,9 +8490,9 @@
                 <a:solidFill>
                   <a:srgbClr val="4C51BF"/>
                 </a:solidFill>
-                <a:latin typeface="Calibri" pitchFamily="34" charset="0"/>
-                <a:ea typeface="Calibri" pitchFamily="34" charset="-122"/>
-                <a:cs typeface="Calibri" pitchFamily="34" charset="-120"/>
+                <a:latin typeface="IBM Plex Mono" pitchFamily="34" charset="0"/>
+                <a:ea typeface="IBM Plex Mono" pitchFamily="34" charset="-122"/>
+                <a:cs typeface="IBM Plex Mono" pitchFamily="34" charset="-120"/>
               </a:rPr>
               <a:t>Organizational Best Practices</a:t>
             </a:r>
@@ -8533,9 +8533,9 @@
                 <a:solidFill>
                   <a:srgbClr val="4A5568"/>
                 </a:solidFill>
-                <a:latin typeface="Calibri" pitchFamily="34" charset="0"/>
-                <a:ea typeface="Calibri" pitchFamily="34" charset="-122"/>
-                <a:cs typeface="Calibri" pitchFamily="34" charset="-120"/>
+                <a:latin typeface="IBM Plex Mono" pitchFamily="34" charset="0"/>
+                <a:ea typeface="IBM Plex Mono" pitchFamily="34" charset="-122"/>
+                <a:cs typeface="IBM Plex Mono" pitchFamily="34" charset="-120"/>
               </a:rPr>
               <a:t>Shift-Left: Embed compliance in SDLC</a:t>
             </a:r>
@@ -8554,9 +8554,9 @@
                 <a:solidFill>
                   <a:srgbClr val="4A5568"/>
                 </a:solidFill>
-                <a:latin typeface="Calibri" pitchFamily="34" charset="0"/>
-                <a:ea typeface="Calibri" pitchFamily="34" charset="-122"/>
-                <a:cs typeface="Calibri" pitchFamily="34" charset="-120"/>
+                <a:latin typeface="IBM Plex Mono" pitchFamily="34" charset="0"/>
+                <a:ea typeface="IBM Plex Mono" pitchFamily="34" charset="-122"/>
+                <a:cs typeface="IBM Plex Mono" pitchFamily="34" charset="-120"/>
               </a:rPr>
               <a:t>Three Lines Model (IIA): Clear governance delineation</a:t>
             </a:r>
@@ -8575,9 +8575,9 @@
                 <a:solidFill>
                   <a:srgbClr val="4A5568"/>
                 </a:solidFill>
-                <a:latin typeface="Calibri" pitchFamily="34" charset="0"/>
-                <a:ea typeface="Calibri" pitchFamily="34" charset="-122"/>
-                <a:cs typeface="Calibri" pitchFamily="34" charset="-120"/>
+                <a:latin typeface="IBM Plex Mono" pitchFamily="34" charset="0"/>
+                <a:ea typeface="IBM Plex Mono" pitchFamily="34" charset="-122"/>
+                <a:cs typeface="IBM Plex Mono" pitchFamily="34" charset="-120"/>
               </a:rPr>
               <a:t>Risk-Based: Prioritize high-impact controls</a:t>
             </a:r>
@@ -8596,9 +8596,9 @@
                 <a:solidFill>
                   <a:srgbClr val="4A5568"/>
                 </a:solidFill>
-                <a:latin typeface="Calibri" pitchFamily="34" charset="0"/>
-                <a:ea typeface="Calibri" pitchFamily="34" charset="-122"/>
-                <a:cs typeface="Calibri" pitchFamily="34" charset="-120"/>
+                <a:latin typeface="IBM Plex Mono" pitchFamily="34" charset="0"/>
+                <a:ea typeface="IBM Plex Mono" pitchFamily="34" charset="-122"/>
+                <a:cs typeface="IBM Plex Mono" pitchFamily="34" charset="-120"/>
               </a:rPr>
               <a:t>Value-Driven: Measure business outcomes, not checklists</a:t>
             </a:r>
@@ -8617,9 +8617,9 @@
                 <a:solidFill>
                   <a:srgbClr val="4A5568"/>
                 </a:solidFill>
-                <a:latin typeface="Calibri" pitchFamily="34" charset="0"/>
-                <a:ea typeface="Calibri" pitchFamily="34" charset="-122"/>
-                <a:cs typeface="Calibri" pitchFamily="34" charset="-120"/>
+                <a:latin typeface="IBM Plex Mono" pitchFamily="34" charset="0"/>
+                <a:ea typeface="IBM Plex Mono" pitchFamily="34" charset="-122"/>
+                <a:cs typeface="IBM Plex Mono" pitchFamily="34" charset="-120"/>
               </a:rPr>
               <a:t>Cross-Functional: GRC as partner to Eng/Product/Sales</a:t>
             </a:r>
@@ -8703,9 +8703,9 @@
                 <a:solidFill>
                   <a:srgbClr val="276749"/>
                 </a:solidFill>
-                <a:latin typeface="Calibri" pitchFamily="34" charset="0"/>
-                <a:ea typeface="Calibri" pitchFamily="34" charset="-122"/>
-                <a:cs typeface="Calibri" pitchFamily="34" charset="-120"/>
+                <a:latin typeface="IBM Plex Mono" pitchFamily="34" charset="0"/>
+                <a:ea typeface="IBM Plex Mono" pitchFamily="34" charset="-122"/>
+                <a:cs typeface="IBM Plex Mono" pitchFamily="34" charset="-120"/>
               </a:rPr>
               <a:t>Reference Standards</a:t>
             </a:r>
@@ -8746,9 +8746,9 @@
                 <a:solidFill>
                   <a:srgbClr val="4A5568"/>
                 </a:solidFill>
-                <a:latin typeface="Calibri" pitchFamily="34" charset="0"/>
-                <a:ea typeface="Calibri" pitchFamily="34" charset="-122"/>
-                <a:cs typeface="Calibri" pitchFamily="34" charset="-120"/>
+                <a:latin typeface="IBM Plex Mono" pitchFamily="34" charset="0"/>
+                <a:ea typeface="IBM Plex Mono" pitchFamily="34" charset="-122"/>
+                <a:cs typeface="IBM Plex Mono" pitchFamily="34" charset="-120"/>
               </a:rPr>
               <a:t>NIST SP 800-137: Continuous Monitoring (ISCM)</a:t>
             </a:r>
@@ -8767,9 +8767,9 @@
                 <a:solidFill>
                   <a:srgbClr val="4A5568"/>
                 </a:solidFill>
-                <a:latin typeface="Calibri" pitchFamily="34" charset="0"/>
-                <a:ea typeface="Calibri" pitchFamily="34" charset="-122"/>
-                <a:cs typeface="Calibri" pitchFamily="34" charset="-120"/>
+                <a:latin typeface="IBM Plex Mono" pitchFamily="34" charset="0"/>
+                <a:ea typeface="IBM Plex Mono" pitchFamily="34" charset="-122"/>
+                <a:cs typeface="IBM Plex Mono" pitchFamily="34" charset="-120"/>
               </a:rPr>
               <a:t>ISACA COBIT 2019: Enterprise IT governance</a:t>
             </a:r>
@@ -8788,9 +8788,9 @@
                 <a:solidFill>
                   <a:srgbClr val="4A5568"/>
                 </a:solidFill>
-                <a:latin typeface="Calibri" pitchFamily="34" charset="0"/>
-                <a:ea typeface="Calibri" pitchFamily="34" charset="-122"/>
-                <a:cs typeface="Calibri" pitchFamily="34" charset="-120"/>
+                <a:latin typeface="IBM Plex Mono" pitchFamily="34" charset="0"/>
+                <a:ea typeface="IBM Plex Mono" pitchFamily="34" charset="-122"/>
+                <a:cs typeface="IBM Plex Mono" pitchFamily="34" charset="-120"/>
               </a:rPr>
               <a:t>IIA Three Lines Model: Risk governance guidance</a:t>
             </a:r>
@@ -8809,9 +8809,9 @@
                 <a:solidFill>
                   <a:srgbClr val="4A5568"/>
                 </a:solidFill>
-                <a:latin typeface="Calibri" pitchFamily="34" charset="0"/>
-                <a:ea typeface="Calibri" pitchFamily="34" charset="-122"/>
-                <a:cs typeface="Calibri" pitchFamily="34" charset="-120"/>
+                <a:latin typeface="IBM Plex Mono" pitchFamily="34" charset="0"/>
+                <a:ea typeface="IBM Plex Mono" pitchFamily="34" charset="-122"/>
+                <a:cs typeface="IBM Plex Mono" pitchFamily="34" charset="-120"/>
               </a:rPr>
               <a:t>CISA Cybersecurity Performance Goals</a:t>
             </a:r>
@@ -8830,9 +8830,9 @@
                 <a:solidFill>
                   <a:srgbClr val="4A5568"/>
                 </a:solidFill>
-                <a:latin typeface="Calibri" pitchFamily="34" charset="0"/>
-                <a:ea typeface="Calibri" pitchFamily="34" charset="-122"/>
-                <a:cs typeface="Calibri" pitchFamily="34" charset="-120"/>
+                <a:latin typeface="IBM Plex Mono" pitchFamily="34" charset="0"/>
+                <a:ea typeface="IBM Plex Mono" pitchFamily="34" charset="-122"/>
+                <a:cs typeface="IBM Plex Mono" pitchFamily="34" charset="-120"/>
               </a:rPr>
               <a:t>CSA CCM: Cloud-specific control mapping</a:t>
             </a:r>
@@ -8901,9 +8901,9 @@
                 <a:solidFill>
                   <a:srgbClr val="1A1D23"/>
                 </a:solidFill>
-                <a:latin typeface="Georgia" pitchFamily="34" charset="0"/>
-                <a:ea typeface="Georgia" pitchFamily="34" charset="-122"/>
-                <a:cs typeface="Georgia" pitchFamily="34" charset="-120"/>
+                <a:latin typeface="IBM Plex Mono" pitchFamily="34" charset="0"/>
+                <a:ea typeface="IBM Plex Mono" pitchFamily="34" charset="-122"/>
+                <a:cs typeface="IBM Plex Mono" pitchFamily="34" charset="-120"/>
               </a:rPr>
               <a:t>Agenda</a:t>
             </a:r>
@@ -8963,9 +8963,9 @@
                 <a:solidFill>
                   <a:srgbClr val="718096"/>
                 </a:solidFill>
-                <a:latin typeface="Calibri" pitchFamily="34" charset="0"/>
-                <a:ea typeface="Calibri" pitchFamily="34" charset="-122"/>
-                <a:cs typeface="Calibri" pitchFamily="34" charset="-120"/>
+                <a:latin typeface="IBM Plex Mono" pitchFamily="34" charset="0"/>
+                <a:ea typeface="IBM Plex Mono" pitchFamily="34" charset="-122"/>
+                <a:cs typeface="IBM Plex Mono" pitchFamily="34" charset="-120"/>
               </a:rPr>
               <a:t>CONFIDENTIAL  |  GRC Program Modernization Roadmap 2026</a:t>
             </a:r>
@@ -9002,9 +9002,9 @@
                 <a:solidFill>
                   <a:srgbClr val="718096"/>
                 </a:solidFill>
-                <a:latin typeface="Calibri" pitchFamily="34" charset="0"/>
-                <a:ea typeface="Calibri" pitchFamily="34" charset="-122"/>
-                <a:cs typeface="Calibri" pitchFamily="34" charset="-120"/>
+                <a:latin typeface="IBM Plex Mono" pitchFamily="34" charset="0"/>
+                <a:ea typeface="IBM Plex Mono" pitchFamily="34" charset="-122"/>
+                <a:cs typeface="IBM Plex Mono" pitchFamily="34" charset="-120"/>
               </a:rPr>
               <a:t>2</a:t>
             </a:r>
@@ -9088,9 +9088,9 @@
                 <a:solidFill>
                   <a:srgbClr val="FFFFFF"/>
                 </a:solidFill>
-                <a:latin typeface="Calibri" pitchFamily="34" charset="0"/>
-                <a:ea typeface="Calibri" pitchFamily="34" charset="-122"/>
-                <a:cs typeface="Calibri" pitchFamily="34" charset="-120"/>
+                <a:latin typeface="IBM Plex Mono" pitchFamily="34" charset="0"/>
+                <a:ea typeface="IBM Plex Mono" pitchFamily="34" charset="-122"/>
+                <a:cs typeface="IBM Plex Mono" pitchFamily="34" charset="-120"/>
               </a:rPr>
               <a:t>01</a:t>
             </a:r>
@@ -9127,9 +9127,9 @@
                 <a:solidFill>
                   <a:srgbClr val="1A1D23"/>
                 </a:solidFill>
-                <a:latin typeface="Calibri" pitchFamily="34" charset="0"/>
-                <a:ea typeface="Calibri" pitchFamily="34" charset="-122"/>
-                <a:cs typeface="Calibri" pitchFamily="34" charset="-120"/>
+                <a:latin typeface="IBM Plex Mono" pitchFamily="34" charset="0"/>
+                <a:ea typeface="IBM Plex Mono" pitchFamily="34" charset="-122"/>
+                <a:cs typeface="IBM Plex Mono" pitchFamily="34" charset="-120"/>
               </a:rPr>
               <a:t>Executive Summary</a:t>
             </a:r>
@@ -9166,9 +9166,9 @@
                 <a:solidFill>
                   <a:srgbClr val="718096"/>
                 </a:solidFill>
-                <a:latin typeface="Calibri" pitchFamily="34" charset="0"/>
-                <a:ea typeface="Calibri" pitchFamily="34" charset="-122"/>
-                <a:cs typeface="Calibri" pitchFamily="34" charset="-120"/>
+                <a:latin typeface="IBM Plex Mono" pitchFamily="34" charset="0"/>
+                <a:ea typeface="IBM Plex Mono" pitchFamily="34" charset="-122"/>
+                <a:cs typeface="IBM Plex Mono" pitchFamily="34" charset="-120"/>
               </a:rPr>
               <a:t>Current state, vision, and strategic objectives</a:t>
             </a:r>
@@ -9252,9 +9252,9 @@
                 <a:solidFill>
                   <a:srgbClr val="FFFFFF"/>
                 </a:solidFill>
-                <a:latin typeface="Calibri" pitchFamily="34" charset="0"/>
-                <a:ea typeface="Calibri" pitchFamily="34" charset="-122"/>
-                <a:cs typeface="Calibri" pitchFamily="34" charset="-120"/>
+                <a:latin typeface="IBM Plex Mono" pitchFamily="34" charset="0"/>
+                <a:ea typeface="IBM Plex Mono" pitchFamily="34" charset="-122"/>
+                <a:cs typeface="IBM Plex Mono" pitchFamily="34" charset="-120"/>
               </a:rPr>
               <a:t>02</a:t>
             </a:r>
@@ -9291,9 +9291,9 @@
                 <a:solidFill>
                   <a:srgbClr val="1A1D23"/>
                 </a:solidFill>
-                <a:latin typeface="Calibri" pitchFamily="34" charset="0"/>
-                <a:ea typeface="Calibri" pitchFamily="34" charset="-122"/>
-                <a:cs typeface="Calibri" pitchFamily="34" charset="-120"/>
+                <a:latin typeface="IBM Plex Mono" pitchFamily="34" charset="0"/>
+                <a:ea typeface="IBM Plex Mono" pitchFamily="34" charset="-122"/>
+                <a:cs typeface="IBM Plex Mono" pitchFamily="34" charset="-120"/>
               </a:rPr>
               <a:t>Organizational Structure</a:t>
             </a:r>
@@ -9330,9 +9330,9 @@
                 <a:solidFill>
                   <a:srgbClr val="718096"/>
                 </a:solidFill>
-                <a:latin typeface="Calibri" pitchFamily="34" charset="0"/>
-                <a:ea typeface="Calibri" pitchFamily="34" charset="-122"/>
-                <a:cs typeface="Calibri" pitchFamily="34" charset="-120"/>
+                <a:latin typeface="IBM Plex Mono" pitchFamily="34" charset="0"/>
+                <a:ea typeface="IBM Plex Mono" pitchFamily="34" charset="-122"/>
+                <a:cs typeface="IBM Plex Mono" pitchFamily="34" charset="-120"/>
               </a:rPr>
               <a:t>Team roles, reporting lines, capability mapping</a:t>
             </a:r>
@@ -9416,9 +9416,9 @@
                 <a:solidFill>
                   <a:srgbClr val="FFFFFF"/>
                 </a:solidFill>
-                <a:latin typeface="Calibri" pitchFamily="34" charset="0"/>
-                <a:ea typeface="Calibri" pitchFamily="34" charset="-122"/>
-                <a:cs typeface="Calibri" pitchFamily="34" charset="-120"/>
+                <a:latin typeface="IBM Plex Mono" pitchFamily="34" charset="0"/>
+                <a:ea typeface="IBM Plex Mono" pitchFamily="34" charset="-122"/>
+                <a:cs typeface="IBM Plex Mono" pitchFamily="34" charset="-120"/>
               </a:rPr>
               <a:t>03</a:t>
             </a:r>
@@ -9455,9 +9455,9 @@
                 <a:solidFill>
                   <a:srgbClr val="1A1D23"/>
                 </a:solidFill>
-                <a:latin typeface="Calibri" pitchFamily="34" charset="0"/>
-                <a:ea typeface="Calibri" pitchFamily="34" charset="-122"/>
-                <a:cs typeface="Calibri" pitchFamily="34" charset="-120"/>
+                <a:latin typeface="IBM Plex Mono" pitchFamily="34" charset="0"/>
+                <a:ea typeface="IBM Plex Mono" pitchFamily="34" charset="-122"/>
+                <a:cs typeface="IBM Plex Mono" pitchFamily="34" charset="-120"/>
               </a:rPr>
               <a:t>Critical Gaps Analysis</a:t>
             </a:r>
@@ -9494,9 +9494,9 @@
                 <a:solidFill>
                   <a:srgbClr val="718096"/>
                 </a:solidFill>
-                <a:latin typeface="Calibri" pitchFamily="34" charset="0"/>
-                <a:ea typeface="Calibri" pitchFamily="34" charset="-122"/>
-                <a:cs typeface="Calibri" pitchFamily="34" charset="-120"/>
+                <a:latin typeface="IBM Plex Mono" pitchFamily="34" charset="0"/>
+                <a:ea typeface="IBM Plex Mono" pitchFamily="34" charset="-122"/>
+                <a:cs typeface="IBM Plex Mono" pitchFamily="34" charset="-120"/>
               </a:rPr>
               <a:t>GRC-Engineering disconnect, Customer Trust, maturity</a:t>
             </a:r>
@@ -9580,9 +9580,9 @@
                 <a:solidFill>
                   <a:srgbClr val="FFFFFF"/>
                 </a:solidFill>
-                <a:latin typeface="Calibri" pitchFamily="34" charset="0"/>
-                <a:ea typeface="Calibri" pitchFamily="34" charset="-122"/>
-                <a:cs typeface="Calibri" pitchFamily="34" charset="-120"/>
+                <a:latin typeface="IBM Plex Mono" pitchFamily="34" charset="0"/>
+                <a:ea typeface="IBM Plex Mono" pitchFamily="34" charset="-122"/>
+                <a:cs typeface="IBM Plex Mono" pitchFamily="34" charset="-120"/>
               </a:rPr>
               <a:t>04</a:t>
             </a:r>
@@ -9619,9 +9619,9 @@
                 <a:solidFill>
                   <a:srgbClr val="1A1D23"/>
                 </a:solidFill>
-                <a:latin typeface="Calibri" pitchFamily="34" charset="0"/>
-                <a:ea typeface="Calibri" pitchFamily="34" charset="-122"/>
-                <a:cs typeface="Calibri" pitchFamily="34" charset="-120"/>
+                <a:latin typeface="IBM Plex Mono" pitchFamily="34" charset="0"/>
+                <a:ea typeface="IBM Plex Mono" pitchFamily="34" charset="-122"/>
+                <a:cs typeface="IBM Plex Mono" pitchFamily="34" charset="-120"/>
               </a:rPr>
               <a:t>Strategic Roadmap</a:t>
             </a:r>
@@ -9658,9 +9658,9 @@
                 <a:solidFill>
                   <a:srgbClr val="718096"/>
                 </a:solidFill>
-                <a:latin typeface="Calibri" pitchFamily="34" charset="0"/>
-                <a:ea typeface="Calibri" pitchFamily="34" charset="-122"/>
-                <a:cs typeface="Calibri" pitchFamily="34" charset="-120"/>
+                <a:latin typeface="IBM Plex Mono" pitchFamily="34" charset="0"/>
+                <a:ea typeface="IBM Plex Mono" pitchFamily="34" charset="-122"/>
+                <a:cs typeface="IBM Plex Mono" pitchFamily="34" charset="-120"/>
               </a:rPr>
               <a:t>Q1-Q4 phased plan with milestones and deliverables</a:t>
             </a:r>
@@ -9744,9 +9744,9 @@
                 <a:solidFill>
                   <a:srgbClr val="FFFFFF"/>
                 </a:solidFill>
-                <a:latin typeface="Calibri" pitchFamily="34" charset="0"/>
-                <a:ea typeface="Calibri" pitchFamily="34" charset="-122"/>
-                <a:cs typeface="Calibri" pitchFamily="34" charset="-120"/>
+                <a:latin typeface="IBM Plex Mono" pitchFamily="34" charset="0"/>
+                <a:ea typeface="IBM Plex Mono" pitchFamily="34" charset="-122"/>
+                <a:cs typeface="IBM Plex Mono" pitchFamily="34" charset="-120"/>
               </a:rPr>
               <a:t>05</a:t>
             </a:r>
@@ -9783,9 +9783,9 @@
                 <a:solidFill>
                   <a:srgbClr val="1A1D23"/>
                 </a:solidFill>
-                <a:latin typeface="Calibri" pitchFamily="34" charset="0"/>
-                <a:ea typeface="Calibri" pitchFamily="34" charset="-122"/>
-                <a:cs typeface="Calibri" pitchFamily="34" charset="-120"/>
+                <a:latin typeface="IBM Plex Mono" pitchFamily="34" charset="0"/>
+                <a:ea typeface="IBM Plex Mono" pitchFamily="34" charset="-122"/>
+                <a:cs typeface="IBM Plex Mono" pitchFamily="34" charset="-120"/>
               </a:rPr>
               <a:t>Customer Trust Transformation</a:t>
             </a:r>
@@ -9822,9 +9822,9 @@
                 <a:solidFill>
                   <a:srgbClr val="718096"/>
                 </a:solidFill>
-                <a:latin typeface="Calibri" pitchFamily="34" charset="0"/>
-                <a:ea typeface="Calibri" pitchFamily="34" charset="-122"/>
-                <a:cs typeface="Calibri" pitchFamily="34" charset="-120"/>
+                <a:latin typeface="IBM Plex Mono" pitchFamily="34" charset="0"/>
+                <a:ea typeface="IBM Plex Mono" pitchFamily="34" charset="-122"/>
+                <a:cs typeface="IBM Plex Mono" pitchFamily="34" charset="-120"/>
               </a:rPr>
               <a:t>Revenue enablement, tooling, knowledge base</a:t>
             </a:r>
@@ -9908,9 +9908,9 @@
                 <a:solidFill>
                   <a:srgbClr val="FFFFFF"/>
                 </a:solidFill>
-                <a:latin typeface="Calibri" pitchFamily="34" charset="0"/>
-                <a:ea typeface="Calibri" pitchFamily="34" charset="-122"/>
-                <a:cs typeface="Calibri" pitchFamily="34" charset="-120"/>
+                <a:latin typeface="IBM Plex Mono" pitchFamily="34" charset="0"/>
+                <a:ea typeface="IBM Plex Mono" pitchFamily="34" charset="-122"/>
+                <a:cs typeface="IBM Plex Mono" pitchFamily="34" charset="-120"/>
               </a:rPr>
               <a:t>06</a:t>
             </a:r>
@@ -9947,9 +9947,9 @@
                 <a:solidFill>
                   <a:srgbClr val="1A1D23"/>
                 </a:solidFill>
-                <a:latin typeface="Calibri" pitchFamily="34" charset="0"/>
-                <a:ea typeface="Calibri" pitchFamily="34" charset="-122"/>
-                <a:cs typeface="Calibri" pitchFamily="34" charset="-120"/>
+                <a:latin typeface="IBM Plex Mono" pitchFamily="34" charset="0"/>
+                <a:ea typeface="IBM Plex Mono" pitchFamily="34" charset="-122"/>
+                <a:cs typeface="IBM Plex Mono" pitchFamily="34" charset="-120"/>
               </a:rPr>
               <a:t>GRC-as-Code &amp; Automation</a:t>
             </a:r>
@@ -9986,9 +9986,9 @@
                 <a:solidFill>
                   <a:srgbClr val="718096"/>
                 </a:solidFill>
-                <a:latin typeface="Calibri" pitchFamily="34" charset="0"/>
-                <a:ea typeface="Calibri" pitchFamily="34" charset="-122"/>
-                <a:cs typeface="Calibri" pitchFamily="34" charset="-120"/>
+                <a:latin typeface="IBM Plex Mono" pitchFamily="34" charset="0"/>
+                <a:ea typeface="IBM Plex Mono" pitchFamily="34" charset="-122"/>
+                <a:cs typeface="IBM Plex Mono" pitchFamily="34" charset="-120"/>
               </a:rPr>
               <a:t>Policy-as-code, CI/CD integration, engineering partnership</a:t>
             </a:r>
@@ -10072,9 +10072,9 @@
                 <a:solidFill>
                   <a:srgbClr val="FFFFFF"/>
                 </a:solidFill>
-                <a:latin typeface="Calibri" pitchFamily="34" charset="0"/>
-                <a:ea typeface="Calibri" pitchFamily="34" charset="-122"/>
-                <a:cs typeface="Calibri" pitchFamily="34" charset="-120"/>
+                <a:latin typeface="IBM Plex Mono" pitchFamily="34" charset="0"/>
+                <a:ea typeface="IBM Plex Mono" pitchFamily="34" charset="-122"/>
+                <a:cs typeface="IBM Plex Mono" pitchFamily="34" charset="-120"/>
               </a:rPr>
               <a:t>07</a:t>
             </a:r>
@@ -10111,9 +10111,9 @@
                 <a:solidFill>
                   <a:srgbClr val="1A1D23"/>
                 </a:solidFill>
-                <a:latin typeface="Calibri" pitchFamily="34" charset="0"/>
-                <a:ea typeface="Calibri" pitchFamily="34" charset="-122"/>
-                <a:cs typeface="Calibri" pitchFamily="34" charset="-120"/>
+                <a:latin typeface="IBM Plex Mono" pitchFamily="34" charset="0"/>
+                <a:ea typeface="IBM Plex Mono" pitchFamily="34" charset="-122"/>
+                <a:cs typeface="IBM Plex Mono" pitchFamily="34" charset="-120"/>
               </a:rPr>
               <a:t>Metrics &amp; Value Framework</a:t>
             </a:r>
@@ -10150,9 +10150,9 @@
                 <a:solidFill>
                   <a:srgbClr val="718096"/>
                 </a:solidFill>
-                <a:latin typeface="Calibri" pitchFamily="34" charset="0"/>
-                <a:ea typeface="Calibri" pitchFamily="34" charset="-122"/>
-                <a:cs typeface="Calibri" pitchFamily="34" charset="-120"/>
+                <a:latin typeface="IBM Plex Mono" pitchFamily="34" charset="0"/>
+                <a:ea typeface="IBM Plex Mono" pitchFamily="34" charset="-122"/>
+                <a:cs typeface="IBM Plex Mono" pitchFamily="34" charset="-120"/>
               </a:rPr>
               <a:t>KPIs, dashboards, business value measurement</a:t>
             </a:r>
@@ -10236,9 +10236,9 @@
                 <a:solidFill>
                   <a:srgbClr val="FFFFFF"/>
                 </a:solidFill>
-                <a:latin typeface="Calibri" pitchFamily="34" charset="0"/>
-                <a:ea typeface="Calibri" pitchFamily="34" charset="-122"/>
-                <a:cs typeface="Calibri" pitchFamily="34" charset="-120"/>
+                <a:latin typeface="IBM Plex Mono" pitchFamily="34" charset="0"/>
+                <a:ea typeface="IBM Plex Mono" pitchFamily="34" charset="-122"/>
+                <a:cs typeface="IBM Plex Mono" pitchFamily="34" charset="-120"/>
               </a:rPr>
               <a:t>08</a:t>
             </a:r>
@@ -10275,9 +10275,9 @@
                 <a:solidFill>
                   <a:srgbClr val="1A1D23"/>
                 </a:solidFill>
-                <a:latin typeface="Calibri" pitchFamily="34" charset="0"/>
-                <a:ea typeface="Calibri" pitchFamily="34" charset="-122"/>
-                <a:cs typeface="Calibri" pitchFamily="34" charset="-120"/>
+                <a:latin typeface="IBM Plex Mono" pitchFamily="34" charset="0"/>
+                <a:ea typeface="IBM Plex Mono" pitchFamily="34" charset="-122"/>
+                <a:cs typeface="IBM Plex Mono" pitchFamily="34" charset="-120"/>
               </a:rPr>
               <a:t>Risks &amp; Dependencies</a:t>
             </a:r>
@@ -10314,9 +10314,9 @@
                 <a:solidFill>
                   <a:srgbClr val="718096"/>
                 </a:solidFill>
-                <a:latin typeface="Calibri" pitchFamily="34" charset="0"/>
-                <a:ea typeface="Calibri" pitchFamily="34" charset="-122"/>
-                <a:cs typeface="Calibri" pitchFamily="34" charset="-120"/>
+                <a:latin typeface="IBM Plex Mono" pitchFamily="34" charset="0"/>
+                <a:ea typeface="IBM Plex Mono" pitchFamily="34" charset="-122"/>
+                <a:cs typeface="IBM Plex Mono" pitchFamily="34" charset="-120"/>
               </a:rPr>
               <a:t>Implementation risks, resource needs, change management</a:t>
             </a:r>
@@ -10400,9 +10400,9 @@
                 <a:solidFill>
                   <a:srgbClr val="FFFFFF"/>
                 </a:solidFill>
-                <a:latin typeface="Calibri" pitchFamily="34" charset="0"/>
-                <a:ea typeface="Calibri" pitchFamily="34" charset="-122"/>
-                <a:cs typeface="Calibri" pitchFamily="34" charset="-120"/>
+                <a:latin typeface="IBM Plex Mono" pitchFamily="34" charset="0"/>
+                <a:ea typeface="IBM Plex Mono" pitchFamily="34" charset="-122"/>
+                <a:cs typeface="IBM Plex Mono" pitchFamily="34" charset="-120"/>
               </a:rPr>
               <a:t>09</a:t>
             </a:r>
@@ -10439,9 +10439,9 @@
                 <a:solidFill>
                   <a:srgbClr val="1A1D23"/>
                 </a:solidFill>
-                <a:latin typeface="Calibri" pitchFamily="34" charset="0"/>
-                <a:ea typeface="Calibri" pitchFamily="34" charset="-122"/>
-                <a:cs typeface="Calibri" pitchFamily="34" charset="-120"/>
+                <a:latin typeface="IBM Plex Mono" pitchFamily="34" charset="0"/>
+                <a:ea typeface="IBM Plex Mono" pitchFamily="34" charset="-122"/>
+                <a:cs typeface="IBM Plex Mono" pitchFamily="34" charset="-120"/>
               </a:rPr>
               <a:t>Investment &amp; ROI</a:t>
             </a:r>
@@ -10478,9 +10478,9 @@
                 <a:solidFill>
                   <a:srgbClr val="718096"/>
                 </a:solidFill>
-                <a:latin typeface="Calibri" pitchFamily="34" charset="0"/>
-                <a:ea typeface="Calibri" pitchFamily="34" charset="-122"/>
-                <a:cs typeface="Calibri" pitchFamily="34" charset="-120"/>
+                <a:latin typeface="IBM Plex Mono" pitchFamily="34" charset="0"/>
+                <a:ea typeface="IBM Plex Mono" pitchFamily="34" charset="-122"/>
+                <a:cs typeface="IBM Plex Mono" pitchFamily="34" charset="-120"/>
               </a:rPr>
               <a:t>Resource requirements, expected returns, timeline</a:t>
             </a:r>
@@ -10564,9 +10564,9 @@
                 <a:solidFill>
                   <a:srgbClr val="FFFFFF"/>
                 </a:solidFill>
-                <a:latin typeface="Calibri" pitchFamily="34" charset="0"/>
-                <a:ea typeface="Calibri" pitchFamily="34" charset="-122"/>
-                <a:cs typeface="Calibri" pitchFamily="34" charset="-120"/>
+                <a:latin typeface="IBM Plex Mono" pitchFamily="34" charset="0"/>
+                <a:ea typeface="IBM Plex Mono" pitchFamily="34" charset="-122"/>
+                <a:cs typeface="IBM Plex Mono" pitchFamily="34" charset="-120"/>
               </a:rPr>
               <a:t>10</a:t>
             </a:r>
@@ -10603,9 +10603,9 @@
                 <a:solidFill>
                   <a:srgbClr val="1A1D23"/>
                 </a:solidFill>
-                <a:latin typeface="Calibri" pitchFamily="34" charset="0"/>
-                <a:ea typeface="Calibri" pitchFamily="34" charset="-122"/>
-                <a:cs typeface="Calibri" pitchFamily="34" charset="-120"/>
+                <a:latin typeface="IBM Plex Mono" pitchFamily="34" charset="0"/>
+                <a:ea typeface="IBM Plex Mono" pitchFamily="34" charset="-122"/>
+                <a:cs typeface="IBM Plex Mono" pitchFamily="34" charset="-120"/>
               </a:rPr>
               <a:t>Next Steps &amp; The Ask</a:t>
             </a:r>
@@ -10642,9 +10642,9 @@
                 <a:solidFill>
                   <a:srgbClr val="718096"/>
                 </a:solidFill>
-                <a:latin typeface="Calibri" pitchFamily="34" charset="0"/>
-                <a:ea typeface="Calibri" pitchFamily="34" charset="-122"/>
-                <a:cs typeface="Calibri" pitchFamily="34" charset="-120"/>
+                <a:latin typeface="IBM Plex Mono" pitchFamily="34" charset="0"/>
+                <a:ea typeface="IBM Plex Mono" pitchFamily="34" charset="-122"/>
+                <a:cs typeface="IBM Plex Mono" pitchFamily="34" charset="-120"/>
               </a:rPr>
               <a:t>30-day action plan, CISO requests, success criteria</a:t>
             </a:r>
@@ -10713,9 +10713,9 @@
                 <a:solidFill>
                   <a:srgbClr val="1A1D23"/>
                 </a:solidFill>
-                <a:latin typeface="Georgia" pitchFamily="34" charset="0"/>
-                <a:ea typeface="Georgia" pitchFamily="34" charset="-122"/>
-                <a:cs typeface="Georgia" pitchFamily="34" charset="-120"/>
+                <a:latin typeface="IBM Plex Mono" pitchFamily="34" charset="0"/>
+                <a:ea typeface="IBM Plex Mono" pitchFamily="34" charset="-122"/>
+                <a:cs typeface="IBM Plex Mono" pitchFamily="34" charset="-120"/>
               </a:rPr>
               <a:t>Executive Summary</a:t>
             </a:r>
@@ -10775,9 +10775,9 @@
                 <a:solidFill>
                   <a:srgbClr val="718096"/>
                 </a:solidFill>
-                <a:latin typeface="Calibri" pitchFamily="34" charset="0"/>
-                <a:ea typeface="Calibri" pitchFamily="34" charset="-122"/>
-                <a:cs typeface="Calibri" pitchFamily="34" charset="-120"/>
+                <a:latin typeface="IBM Plex Mono" pitchFamily="34" charset="0"/>
+                <a:ea typeface="IBM Plex Mono" pitchFamily="34" charset="-122"/>
+                <a:cs typeface="IBM Plex Mono" pitchFamily="34" charset="-120"/>
               </a:rPr>
               <a:t>CONFIDENTIAL  |  GRC Program Modernization Roadmap 2026</a:t>
             </a:r>
@@ -10814,9 +10814,9 @@
                 <a:solidFill>
                   <a:srgbClr val="718096"/>
                 </a:solidFill>
-                <a:latin typeface="Calibri" pitchFamily="34" charset="0"/>
-                <a:ea typeface="Calibri" pitchFamily="34" charset="-122"/>
-                <a:cs typeface="Calibri" pitchFamily="34" charset="-120"/>
+                <a:latin typeface="IBM Plex Mono" pitchFamily="34" charset="0"/>
+                <a:ea typeface="IBM Plex Mono" pitchFamily="34" charset="-122"/>
+                <a:cs typeface="IBM Plex Mono" pitchFamily="34" charset="-120"/>
               </a:rPr>
               <a:t>3</a:t>
             </a:r>
@@ -10900,9 +10900,9 @@
                 <a:solidFill>
                   <a:srgbClr val="C53030"/>
                 </a:solidFill>
-                <a:latin typeface="Calibri" pitchFamily="34" charset="0"/>
-                <a:ea typeface="Calibri" pitchFamily="34" charset="-122"/>
-                <a:cs typeface="Calibri" pitchFamily="34" charset="-120"/>
+                <a:latin typeface="IBM Plex Mono" pitchFamily="34" charset="0"/>
+                <a:ea typeface="IBM Plex Mono" pitchFamily="34" charset="-122"/>
+                <a:cs typeface="IBM Plex Mono" pitchFamily="34" charset="-120"/>
               </a:rPr>
               <a:t>CURRENT STATE</a:t>
             </a:r>
@@ -10943,9 +10943,9 @@
                 <a:solidFill>
                   <a:srgbClr val="4A5568"/>
                 </a:solidFill>
-                <a:latin typeface="Calibri" pitchFamily="34" charset="0"/>
-                <a:ea typeface="Calibri" pitchFamily="34" charset="-122"/>
-                <a:cs typeface="Calibri" pitchFamily="34" charset="-120"/>
+                <a:latin typeface="IBM Plex Mono" pitchFamily="34" charset="0"/>
+                <a:ea typeface="IBM Plex Mono" pitchFamily="34" charset="-122"/>
+                <a:cs typeface="IBM Plex Mono" pitchFamily="34" charset="-120"/>
               </a:rPr>
               <a:t>GRC operates as isolated compliance function with no engineering integration</a:t>
             </a:r>
@@ -10964,9 +10964,9 @@
                 <a:solidFill>
                   <a:srgbClr val="4A5568"/>
                 </a:solidFill>
-                <a:latin typeface="Calibri" pitchFamily="34" charset="0"/>
-                <a:ea typeface="Calibri" pitchFamily="34" charset="-122"/>
-                <a:cs typeface="Calibri" pitchFamily="34" charset="-120"/>
+                <a:latin typeface="IBM Plex Mono" pitchFamily="34" charset="0"/>
+                <a:ea typeface="IBM Plex Mono" pitchFamily="34" charset="-122"/>
+                <a:cs typeface="IBM Plex Mono" pitchFamily="34" charset="-120"/>
               </a:rPr>
               <a:t>Manual, check-the-box audit processes with no automation or policy-as-code</a:t>
             </a:r>
@@ -10985,9 +10985,9 @@
                 <a:solidFill>
                   <a:srgbClr val="4A5568"/>
                 </a:solidFill>
-                <a:latin typeface="Calibri" pitchFamily="34" charset="0"/>
-                <a:ea typeface="Calibri" pitchFamily="34" charset="-122"/>
-                <a:cs typeface="Calibri" pitchFamily="34" charset="-120"/>
+                <a:latin typeface="IBM Plex Mono" pitchFamily="34" charset="0"/>
+                <a:ea typeface="IBM Plex Mono" pitchFamily="34" charset="-122"/>
+                <a:cs typeface="IBM Plex Mono" pitchFamily="34" charset="-120"/>
               </a:rPr>
               <a:t>Customer Trust uses fragmented tooling (Onboard, Conveyor, Trust Center)</a:t>
             </a:r>
@@ -11006,9 +11006,9 @@
                 <a:solidFill>
                   <a:srgbClr val="4A5568"/>
                 </a:solidFill>
-                <a:latin typeface="Calibri" pitchFamily="34" charset="0"/>
-                <a:ea typeface="Calibri" pitchFamily="34" charset="-122"/>
-                <a:cs typeface="Calibri" pitchFamily="34" charset="-120"/>
+                <a:latin typeface="IBM Plex Mono" pitchFamily="34" charset="0"/>
+                <a:ea typeface="IBM Plex Mono" pitchFamily="34" charset="-122"/>
+                <a:cs typeface="IBM Plex Mono" pitchFamily="34" charset="-120"/>
               </a:rPr>
               <a:t>No revenue impact tracking despite handling deal-blocking questionnaires</a:t>
             </a:r>
@@ -11027,9 +11027,9 @@
                 <a:solidFill>
                   <a:srgbClr val="4A5568"/>
                 </a:solidFill>
-                <a:latin typeface="Calibri" pitchFamily="34" charset="0"/>
-                <a:ea typeface="Calibri" pitchFamily="34" charset="-122"/>
-                <a:cs typeface="Calibri" pitchFamily="34" charset="-120"/>
+                <a:latin typeface="IBM Plex Mono" pitchFamily="34" charset="0"/>
+                <a:ea typeface="IBM Plex Mono" pitchFamily="34" charset="-122"/>
+                <a:cs typeface="IBM Plex Mono" pitchFamily="34" charset="-120"/>
               </a:rPr>
               <a:t>No GRC team members understand product, tech stack, or SDLC</a:t>
             </a:r>
@@ -11048,9 +11048,9 @@
                 <a:solidFill>
                   <a:srgbClr val="4A5568"/>
                 </a:solidFill>
-                <a:latin typeface="Calibri" pitchFamily="34" charset="0"/>
-                <a:ea typeface="Calibri" pitchFamily="34" charset="-122"/>
-                <a:cs typeface="Calibri" pitchFamily="34" charset="-120"/>
+                <a:latin typeface="IBM Plex Mono" pitchFamily="34" charset="0"/>
+                <a:ea typeface="IBM Plex Mono" pitchFamily="34" charset="-122"/>
+                <a:cs typeface="IBM Plex Mono" pitchFamily="34" charset="-120"/>
               </a:rPr>
               <a:t>TPRM and Internal Audit lack standardized baselines and KPIs</a:t>
             </a:r>
@@ -11069,9 +11069,9 @@
                 <a:solidFill>
                   <a:srgbClr val="4A5568"/>
                 </a:solidFill>
-                <a:latin typeface="Calibri" pitchFamily="34" charset="0"/>
-                <a:ea typeface="Calibri" pitchFamily="34" charset="-122"/>
-                <a:cs typeface="Calibri" pitchFamily="34" charset="-120"/>
+                <a:latin typeface="IBM Plex Mono" pitchFamily="34" charset="0"/>
+                <a:ea typeface="IBM Plex Mono" pitchFamily="34" charset="-122"/>
+                <a:cs typeface="IBM Plex Mono" pitchFamily="34" charset="-120"/>
               </a:rPr>
               <a:t>No existing roadmap, strategy, or maturity model in place</a:t>
             </a:r>
@@ -11155,9 +11155,9 @@
                 <a:solidFill>
                   <a:srgbClr val="276749"/>
                 </a:solidFill>
-                <a:latin typeface="Calibri" pitchFamily="34" charset="0"/>
-                <a:ea typeface="Calibri" pitchFamily="34" charset="-122"/>
-                <a:cs typeface="Calibri" pitchFamily="34" charset="-120"/>
+                <a:latin typeface="IBM Plex Mono" pitchFamily="34" charset="0"/>
+                <a:ea typeface="IBM Plex Mono" pitchFamily="34" charset="-122"/>
+                <a:cs typeface="IBM Plex Mono" pitchFamily="34" charset="-120"/>
               </a:rPr>
               <a:t>TARGET STATE (END OF 2026)</a:t>
             </a:r>
@@ -11198,9 +11198,9 @@
                 <a:solidFill>
                   <a:srgbClr val="4A5568"/>
                 </a:solidFill>
-                <a:latin typeface="Calibri" pitchFamily="34" charset="0"/>
-                <a:ea typeface="Calibri" pitchFamily="34" charset="-122"/>
-                <a:cs typeface="Calibri" pitchFamily="34" charset="-120"/>
+                <a:latin typeface="IBM Plex Mono" pitchFamily="34" charset="0"/>
+                <a:ea typeface="IBM Plex Mono" pitchFamily="34" charset="-122"/>
+                <a:cs typeface="IBM Plex Mono" pitchFamily="34" charset="-120"/>
               </a:rPr>
               <a:t>GRC embedded in engineering with policy-as-code in CI/CD pipelines</a:t>
             </a:r>
@@ -11219,9 +11219,9 @@
                 <a:solidFill>
                   <a:srgbClr val="4A5568"/>
                 </a:solidFill>
-                <a:latin typeface="Calibri" pitchFamily="34" charset="0"/>
-                <a:ea typeface="Calibri" pitchFamily="34" charset="-122"/>
-                <a:cs typeface="Calibri" pitchFamily="34" charset="-120"/>
+                <a:latin typeface="IBM Plex Mono" pitchFamily="34" charset="0"/>
+                <a:ea typeface="IBM Plex Mono" pitchFamily="34" charset="-122"/>
+                <a:cs typeface="IBM Plex Mono" pitchFamily="34" charset="-120"/>
               </a:rPr>
               <a:t>Automated compliance evidence collection and continuous monitoring</a:t>
             </a:r>
@@ -11240,9 +11240,9 @@
                 <a:solidFill>
                   <a:srgbClr val="4A5568"/>
                 </a:solidFill>
-                <a:latin typeface="Calibri" pitchFamily="34" charset="0"/>
-                <a:ea typeface="Calibri" pitchFamily="34" charset="-122"/>
-                <a:cs typeface="Calibri" pitchFamily="34" charset="-120"/>
+                <a:latin typeface="IBM Plex Mono" pitchFamily="34" charset="0"/>
+                <a:ea typeface="IBM Plex Mono" pitchFamily="34" charset="-122"/>
+                <a:cs typeface="IBM Plex Mono" pitchFamily="34" charset="-120"/>
               </a:rPr>
               <a:t>Unified Customer Trust platform with revenue-linked dashboards</a:t>
             </a:r>
@@ -11261,9 +11261,9 @@
                 <a:solidFill>
                   <a:srgbClr val="4A5568"/>
                 </a:solidFill>
-                <a:latin typeface="Calibri" pitchFamily="34" charset="0"/>
-                <a:ea typeface="Calibri" pitchFamily="34" charset="-122"/>
-                <a:cs typeface="Calibri" pitchFamily="34" charset="-120"/>
+                <a:latin typeface="IBM Plex Mono" pitchFamily="34" charset="0"/>
+                <a:ea typeface="IBM Plex Mono" pitchFamily="34" charset="-122"/>
+                <a:cs typeface="IBM Plex Mono" pitchFamily="34" charset="-120"/>
               </a:rPr>
               <a:t>Standardized response library reducing questionnaire TAT by 60%</a:t>
             </a:r>
@@ -11282,9 +11282,9 @@
                 <a:solidFill>
                   <a:srgbClr val="4A5568"/>
                 </a:solidFill>
-                <a:latin typeface="Calibri" pitchFamily="34" charset="0"/>
-                <a:ea typeface="Calibri" pitchFamily="34" charset="-122"/>
-                <a:cs typeface="Calibri" pitchFamily="34" charset="-120"/>
+                <a:latin typeface="IBM Plex Mono" pitchFamily="34" charset="0"/>
+                <a:ea typeface="IBM Plex Mono" pitchFamily="34" charset="-122"/>
+                <a:cs typeface="IBM Plex Mono" pitchFamily="34" charset="-120"/>
               </a:rPr>
               <a:t>Technical GRC expertise integrated into product and sprint planning</a:t>
             </a:r>
@@ -11303,9 +11303,9 @@
                 <a:solidFill>
                   <a:srgbClr val="4A5568"/>
                 </a:solidFill>
-                <a:latin typeface="Calibri" pitchFamily="34" charset="0"/>
-                <a:ea typeface="Calibri" pitchFamily="34" charset="-122"/>
-                <a:cs typeface="Calibri" pitchFamily="34" charset="-120"/>
+                <a:latin typeface="IBM Plex Mono" pitchFamily="34" charset="0"/>
+                <a:ea typeface="IBM Plex Mono" pitchFamily="34" charset="-122"/>
+                <a:cs typeface="IBM Plex Mono" pitchFamily="34" charset="-120"/>
               </a:rPr>
               <a:t>Risk-quantified TPRM with automated vendor assessments and tiering</a:t>
             </a:r>
@@ -11324,9 +11324,9 @@
                 <a:solidFill>
                   <a:srgbClr val="4A5568"/>
                 </a:solidFill>
-                <a:latin typeface="Calibri" pitchFamily="34" charset="0"/>
-                <a:ea typeface="Calibri" pitchFamily="34" charset="-122"/>
-                <a:cs typeface="Calibri" pitchFamily="34" charset="-120"/>
+                <a:latin typeface="IBM Plex Mono" pitchFamily="34" charset="0"/>
+                <a:ea typeface="IBM Plex Mono" pitchFamily="34" charset="-122"/>
+                <a:cs typeface="IBM Plex Mono" pitchFamily="34" charset="-120"/>
               </a:rPr>
               <a:t>Mature, metrics-driven program aligned to NIST CSF and ISO 27001</a:t>
             </a:r>
@@ -11383,9 +11383,9 @@
                 <a:solidFill>
                   <a:srgbClr val="2B6CB0"/>
                 </a:solidFill>
-                <a:latin typeface="Calibri" pitchFamily="34" charset="0"/>
-                <a:ea typeface="Calibri" pitchFamily="34" charset="-122"/>
-                <a:cs typeface="Calibri" pitchFamily="34" charset="-120"/>
+                <a:latin typeface="IBM Plex Mono" pitchFamily="34" charset="0"/>
+                <a:ea typeface="IBM Plex Mono" pitchFamily="34" charset="-122"/>
+                <a:cs typeface="IBM Plex Mono" pitchFamily="34" charset="-120"/>
               </a:rPr>
               <a:t>STRATEGIC VISION:  </a:t>
             </a:r>
@@ -11397,9 +11397,9 @@
                 <a:solidFill>
                   <a:srgbClr val="1A1D23"/>
                 </a:solidFill>
-                <a:latin typeface="Calibri" pitchFamily="34" charset="0"/>
-                <a:ea typeface="Calibri" pitchFamily="34" charset="-122"/>
-                <a:cs typeface="Calibri" pitchFamily="34" charset="-120"/>
+                <a:latin typeface="IBM Plex Mono" pitchFamily="34" charset="0"/>
+                <a:ea typeface="IBM Plex Mono" pitchFamily="34" charset="-122"/>
+                <a:cs typeface="IBM Plex Mono" pitchFamily="34" charset="-120"/>
               </a:rPr>
               <a:t>Transform GRC from a reactive cost center into a proactive, revenue-enabling, engineering-integrated strategic function.</a:t>
             </a:r>
@@ -11468,9 +11468,9 @@
                 <a:solidFill>
                   <a:srgbClr val="1A1D23"/>
                 </a:solidFill>
-                <a:latin typeface="Georgia" pitchFamily="34" charset="0"/>
-                <a:ea typeface="Georgia" pitchFamily="34" charset="-122"/>
-                <a:cs typeface="Georgia" pitchFamily="34" charset="-120"/>
+                <a:latin typeface="IBM Plex Mono" pitchFamily="34" charset="0"/>
+                <a:ea typeface="IBM Plex Mono" pitchFamily="34" charset="-122"/>
+                <a:cs typeface="IBM Plex Mono" pitchFamily="34" charset="-120"/>
               </a:rPr>
               <a:t>Organizational Structure &amp; Team</a:t>
             </a:r>
@@ -11530,9 +11530,9 @@
                 <a:solidFill>
                   <a:srgbClr val="718096"/>
                 </a:solidFill>
-                <a:latin typeface="Calibri" pitchFamily="34" charset="0"/>
-                <a:ea typeface="Calibri" pitchFamily="34" charset="-122"/>
-                <a:cs typeface="Calibri" pitchFamily="34" charset="-120"/>
+                <a:latin typeface="IBM Plex Mono" pitchFamily="34" charset="0"/>
+                <a:ea typeface="IBM Plex Mono" pitchFamily="34" charset="-122"/>
+                <a:cs typeface="IBM Plex Mono" pitchFamily="34" charset="-120"/>
               </a:rPr>
               <a:t>CONFIDENTIAL  |  GRC Program Modernization Roadmap 2026</a:t>
             </a:r>
@@ -11569,9 +11569,9 @@
                 <a:solidFill>
                   <a:srgbClr val="718096"/>
                 </a:solidFill>
-                <a:latin typeface="Calibri" pitchFamily="34" charset="0"/>
-                <a:ea typeface="Calibri" pitchFamily="34" charset="-122"/>
-                <a:cs typeface="Calibri" pitchFamily="34" charset="-120"/>
+                <a:latin typeface="IBM Plex Mono" pitchFamily="34" charset="0"/>
+                <a:ea typeface="IBM Plex Mono" pitchFamily="34" charset="-122"/>
+                <a:cs typeface="IBM Plex Mono" pitchFamily="34" charset="-120"/>
               </a:rPr>
               <a:t>4</a:t>
             </a:r>
@@ -11655,9 +11655,9 @@
                 <a:solidFill>
                   <a:srgbClr val="1A1D23"/>
                 </a:solidFill>
-                <a:latin typeface="Calibri" pitchFamily="34" charset="0"/>
-                <a:ea typeface="Calibri" pitchFamily="34" charset="-122"/>
-                <a:cs typeface="Calibri" pitchFamily="34" charset="-120"/>
+                <a:latin typeface="IBM Plex Mono" pitchFamily="34" charset="0"/>
+                <a:ea typeface="IBM Plex Mono" pitchFamily="34" charset="-122"/>
+                <a:cs typeface="IBM Plex Mono" pitchFamily="34" charset="-120"/>
               </a:rPr>
               <a:t>CISO</a:t>
             </a:r>
@@ -11694,9 +11694,9 @@
                 <a:solidFill>
                   <a:srgbClr val="718096"/>
                 </a:solidFill>
-                <a:latin typeface="Calibri" pitchFamily="34" charset="0"/>
-                <a:ea typeface="Calibri" pitchFamily="34" charset="-122"/>
-                <a:cs typeface="Calibri" pitchFamily="34" charset="-120"/>
+                <a:latin typeface="IBM Plex Mono" pitchFamily="34" charset="0"/>
+                <a:ea typeface="IBM Plex Mono" pitchFamily="34" charset="-122"/>
+                <a:cs typeface="IBM Plex Mono" pitchFamily="34" charset="-120"/>
               </a:rPr>
               <a:t>Chief Information Security Officer</a:t>
             </a:r>
@@ -11895,9 +11895,9 @@
                 <a:solidFill>
                   <a:srgbClr val="1A1D23"/>
                 </a:solidFill>
-                <a:latin typeface="Calibri" pitchFamily="34" charset="0"/>
-                <a:ea typeface="Calibri" pitchFamily="34" charset="-122"/>
-                <a:cs typeface="Calibri" pitchFamily="34" charset="-120"/>
+                <a:latin typeface="IBM Plex Mono" pitchFamily="34" charset="0"/>
+                <a:ea typeface="IBM Plex Mono" pitchFamily="34" charset="-122"/>
+                <a:cs typeface="IBM Plex Mono" pitchFamily="34" charset="-120"/>
               </a:rPr>
               <a:t>Chelsea Main</a:t>
             </a:r>
@@ -11934,9 +11934,9 @@
                 <a:solidFill>
                   <a:srgbClr val="718096"/>
                 </a:solidFill>
-                <a:latin typeface="Calibri" pitchFamily="34" charset="0"/>
-                <a:ea typeface="Calibri" pitchFamily="34" charset="-122"/>
-                <a:cs typeface="Calibri" pitchFamily="34" charset="-120"/>
+                <a:latin typeface="IBM Plex Mono" pitchFamily="34" charset="0"/>
+                <a:ea typeface="IBM Plex Mono" pitchFamily="34" charset="-122"/>
+                <a:cs typeface="IBM Plex Mono" pitchFamily="34" charset="-120"/>
               </a:rPr>
               <a:t>Security Engineering</a:t>
             </a:r>
@@ -12020,9 +12020,9 @@
                 <a:solidFill>
                   <a:srgbClr val="1A1D23"/>
                 </a:solidFill>
-                <a:latin typeface="Calibri" pitchFamily="34" charset="0"/>
-                <a:ea typeface="Calibri" pitchFamily="34" charset="-122"/>
-                <a:cs typeface="Calibri" pitchFamily="34" charset="-120"/>
+                <a:latin typeface="IBM Plex Mono" pitchFamily="34" charset="0"/>
+                <a:ea typeface="IBM Plex Mono" pitchFamily="34" charset="-122"/>
+                <a:cs typeface="IBM Plex Mono" pitchFamily="34" charset="-120"/>
               </a:rPr>
               <a:t>You (Sr. Dir. GRC)</a:t>
             </a:r>
@@ -12059,9 +12059,9 @@
                 <a:solidFill>
                   <a:srgbClr val="718096"/>
                 </a:solidFill>
-                <a:latin typeface="Calibri" pitchFamily="34" charset="0"/>
-                <a:ea typeface="Calibri" pitchFamily="34" charset="-122"/>
-                <a:cs typeface="Calibri" pitchFamily="34" charset="-120"/>
+                <a:latin typeface="IBM Plex Mono" pitchFamily="34" charset="0"/>
+                <a:ea typeface="IBM Plex Mono" pitchFamily="34" charset="-122"/>
+                <a:cs typeface="IBM Plex Mono" pitchFamily="34" charset="-120"/>
               </a:rPr>
               <a:t>GRC Program Lead</a:t>
             </a:r>
@@ -12145,9 +12145,9 @@
                 <a:solidFill>
                   <a:srgbClr val="1A1D23"/>
                 </a:solidFill>
-                <a:latin typeface="Calibri" pitchFamily="34" charset="0"/>
-                <a:ea typeface="Calibri" pitchFamily="34" charset="-122"/>
-                <a:cs typeface="Calibri" pitchFamily="34" charset="-120"/>
+                <a:latin typeface="IBM Plex Mono" pitchFamily="34" charset="0"/>
+                <a:ea typeface="IBM Plex Mono" pitchFamily="34" charset="-122"/>
+                <a:cs typeface="IBM Plex Mono" pitchFamily="34" charset="-120"/>
               </a:rPr>
               <a:t>Damian King</a:t>
             </a:r>
@@ -12184,9 +12184,9 @@
                 <a:solidFill>
                   <a:srgbClr val="718096"/>
                 </a:solidFill>
-                <a:latin typeface="Calibri" pitchFamily="34" charset="0"/>
-                <a:ea typeface="Calibri" pitchFamily="34" charset="-122"/>
-                <a:cs typeface="Calibri" pitchFamily="34" charset="-120"/>
+                <a:latin typeface="IBM Plex Mono" pitchFamily="34" charset="0"/>
+                <a:ea typeface="IBM Plex Mono" pitchFamily="34" charset="-122"/>
+                <a:cs typeface="IBM Plex Mono" pitchFamily="34" charset="-120"/>
               </a:rPr>
               <a:t>Security Operations</a:t>
             </a:r>
@@ -12408,9 +12408,9 @@
                 <a:solidFill>
                   <a:srgbClr val="1A1D23"/>
                 </a:solidFill>
-                <a:latin typeface="Calibri" pitchFamily="34" charset="0"/>
-                <a:ea typeface="Calibri" pitchFamily="34" charset="-122"/>
-                <a:cs typeface="Calibri" pitchFamily="34" charset="-120"/>
+                <a:latin typeface="IBM Plex Mono" pitchFamily="34" charset="0"/>
+                <a:ea typeface="IBM Plex Mono" pitchFamily="34" charset="-122"/>
+                <a:cs typeface="IBM Plex Mono" pitchFamily="34" charset="-120"/>
               </a:rPr>
               <a:t>Steve Hammonds</a:t>
             </a:r>
@@ -12447,9 +12447,9 @@
                 <a:solidFill>
                   <a:srgbClr val="718096"/>
                 </a:solidFill>
-                <a:latin typeface="Calibri" pitchFamily="34" charset="0"/>
-                <a:ea typeface="Calibri" pitchFamily="34" charset="-122"/>
-                <a:cs typeface="Calibri" pitchFamily="34" charset="-120"/>
+                <a:latin typeface="IBM Plex Mono" pitchFamily="34" charset="0"/>
+                <a:ea typeface="IBM Plex Mono" pitchFamily="34" charset="-122"/>
+                <a:cs typeface="IBM Plex Mono" pitchFamily="34" charset="-120"/>
               </a:rPr>
               <a:t>BC/DR</a:t>
             </a:r>
@@ -12533,9 +12533,9 @@
                 <a:solidFill>
                   <a:srgbClr val="1A1D23"/>
                 </a:solidFill>
-                <a:latin typeface="Calibri" pitchFamily="34" charset="0"/>
-                <a:ea typeface="Calibri" pitchFamily="34" charset="-122"/>
-                <a:cs typeface="Calibri" pitchFamily="34" charset="-120"/>
+                <a:latin typeface="IBM Plex Mono" pitchFamily="34" charset="0"/>
+                <a:ea typeface="IBM Plex Mono" pitchFamily="34" charset="-122"/>
+                <a:cs typeface="IBM Plex Mono" pitchFamily="34" charset="-120"/>
               </a:rPr>
               <a:t>Doug Matkins</a:t>
             </a:r>
@@ -12572,9 +12572,9 @@
                 <a:solidFill>
                   <a:srgbClr val="718096"/>
                 </a:solidFill>
-                <a:latin typeface="Calibri" pitchFamily="34" charset="0"/>
-                <a:ea typeface="Calibri" pitchFamily="34" charset="-122"/>
-                <a:cs typeface="Calibri" pitchFamily="34" charset="-120"/>
+                <a:latin typeface="IBM Plex Mono" pitchFamily="34" charset="0"/>
+                <a:ea typeface="IBM Plex Mono" pitchFamily="34" charset="-122"/>
+                <a:cs typeface="IBM Plex Mono" pitchFamily="34" charset="-120"/>
               </a:rPr>
               <a:t>TPRM</a:t>
             </a:r>
@@ -12658,9 +12658,9 @@
                 <a:solidFill>
                   <a:srgbClr val="1A1D23"/>
                 </a:solidFill>
-                <a:latin typeface="Calibri" pitchFamily="34" charset="0"/>
-                <a:ea typeface="Calibri" pitchFamily="34" charset="-122"/>
-                <a:cs typeface="Calibri" pitchFamily="34" charset="-120"/>
+                <a:latin typeface="IBM Plex Mono" pitchFamily="34" charset="0"/>
+                <a:ea typeface="IBM Plex Mono" pitchFamily="34" charset="-122"/>
+                <a:cs typeface="IBM Plex Mono" pitchFamily="34" charset="-120"/>
               </a:rPr>
               <a:t>Janet De Lara</a:t>
             </a:r>
@@ -12697,9 +12697,9 @@
                 <a:solidFill>
                   <a:srgbClr val="718096"/>
                 </a:solidFill>
-                <a:latin typeface="Calibri" pitchFamily="34" charset="0"/>
-                <a:ea typeface="Calibri" pitchFamily="34" charset="-122"/>
-                <a:cs typeface="Calibri" pitchFamily="34" charset="-120"/>
+                <a:latin typeface="IBM Plex Mono" pitchFamily="34" charset="0"/>
+                <a:ea typeface="IBM Plex Mono" pitchFamily="34" charset="-122"/>
+                <a:cs typeface="IBM Plex Mono" pitchFamily="34" charset="-120"/>
               </a:rPr>
               <a:t>Internal Audit</a:t>
             </a:r>
@@ -12783,9 +12783,9 @@
                 <a:solidFill>
                   <a:srgbClr val="1A1D23"/>
                 </a:solidFill>
-                <a:latin typeface="Calibri" pitchFamily="34" charset="0"/>
-                <a:ea typeface="Calibri" pitchFamily="34" charset="-122"/>
-                <a:cs typeface="Calibri" pitchFamily="34" charset="-120"/>
+                <a:latin typeface="IBM Plex Mono" pitchFamily="34" charset="0"/>
+                <a:ea typeface="IBM Plex Mono" pitchFamily="34" charset="-122"/>
+                <a:cs typeface="IBM Plex Mono" pitchFamily="34" charset="-120"/>
               </a:rPr>
               <a:t>Customer Trust</a:t>
             </a:r>
@@ -12822,9 +12822,9 @@
                 <a:solidFill>
                   <a:srgbClr val="718096"/>
                 </a:solidFill>
-                <a:latin typeface="Calibri" pitchFamily="34" charset="0"/>
-                <a:ea typeface="Calibri" pitchFamily="34" charset="-122"/>
-                <a:cs typeface="Calibri" pitchFamily="34" charset="-120"/>
+                <a:latin typeface="IBM Plex Mono" pitchFamily="34" charset="0"/>
+                <a:ea typeface="IBM Plex Mono" pitchFamily="34" charset="-122"/>
+                <a:cs typeface="IBM Plex Mono" pitchFamily="34" charset="-120"/>
               </a:rPr>
               <a:t>Trust &amp; Questionnaires</a:t>
             </a:r>
@@ -12957,9 +12957,9 @@
                 <a:solidFill>
                   <a:srgbClr val="1A1D23"/>
                 </a:solidFill>
-                <a:latin typeface="Calibri" pitchFamily="34" charset="0"/>
-                <a:ea typeface="Calibri" pitchFamily="34" charset="-122"/>
-                <a:cs typeface="Calibri" pitchFamily="34" charset="-120"/>
+                <a:latin typeface="IBM Plex Mono" pitchFamily="34" charset="0"/>
+                <a:ea typeface="IBM Plex Mono" pitchFamily="34" charset="-122"/>
+                <a:cs typeface="IBM Plex Mono" pitchFamily="34" charset="-120"/>
               </a:rPr>
               <a:t>Eni Smigielska</a:t>
             </a:r>
@@ -13046,9 +13046,9 @@
                 <a:solidFill>
                   <a:srgbClr val="1A1D23"/>
                 </a:solidFill>
-                <a:latin typeface="Calibri" pitchFamily="34" charset="0"/>
-                <a:ea typeface="Calibri" pitchFamily="34" charset="-122"/>
-                <a:cs typeface="Calibri" pitchFamily="34" charset="-120"/>
+                <a:latin typeface="IBM Plex Mono" pitchFamily="34" charset="0"/>
+                <a:ea typeface="IBM Plex Mono" pitchFamily="34" charset="-122"/>
+                <a:cs typeface="IBM Plex Mono" pitchFamily="34" charset="-120"/>
               </a:rPr>
               <a:t>Russ Johnson</a:t>
             </a:r>
@@ -13135,9 +13135,9 @@
                 <a:solidFill>
                   <a:srgbClr val="1A1D23"/>
                 </a:solidFill>
-                <a:latin typeface="Calibri" pitchFamily="34" charset="0"/>
-                <a:ea typeface="Calibri" pitchFamily="34" charset="-122"/>
-                <a:cs typeface="Calibri" pitchFamily="34" charset="-120"/>
+                <a:latin typeface="IBM Plex Mono" pitchFamily="34" charset="0"/>
+                <a:ea typeface="IBM Plex Mono" pitchFamily="34" charset="-122"/>
+                <a:cs typeface="IBM Plex Mono" pitchFamily="34" charset="-120"/>
               </a:rPr>
               <a:t>Marcin Lachowicz</a:t>
             </a:r>
@@ -13224,9 +13224,9 @@
                 <a:solidFill>
                   <a:srgbClr val="1A1D23"/>
                 </a:solidFill>
-                <a:latin typeface="Calibri" pitchFamily="34" charset="0"/>
-                <a:ea typeface="Calibri" pitchFamily="34" charset="-122"/>
-                <a:cs typeface="Calibri" pitchFamily="34" charset="-120"/>
+                <a:latin typeface="IBM Plex Mono" pitchFamily="34" charset="0"/>
+                <a:ea typeface="IBM Plex Mono" pitchFamily="34" charset="-122"/>
+                <a:cs typeface="IBM Plex Mono" pitchFamily="34" charset="-120"/>
               </a:rPr>
               <a:t>Amine Gherabi</a:t>
             </a:r>
@@ -13313,9 +13313,9 @@
                 <a:solidFill>
                   <a:srgbClr val="0E7C86"/>
                 </a:solidFill>
-                <a:latin typeface="Calibri" pitchFamily="34" charset="0"/>
-                <a:ea typeface="Calibri" pitchFamily="34" charset="-122"/>
-                <a:cs typeface="Calibri" pitchFamily="34" charset="-120"/>
+                <a:latin typeface="IBM Plex Mono" pitchFamily="34" charset="0"/>
+                <a:ea typeface="IBM Plex Mono" pitchFamily="34" charset="-122"/>
+                <a:cs typeface="IBM Plex Mono" pitchFamily="34" charset="-120"/>
               </a:rPr>
               <a:t>Governance (Paolo DiRosa)</a:t>
             </a:r>
@@ -13352,9 +13352,9 @@
                 <a:solidFill>
                   <a:srgbClr val="718096"/>
                 </a:solidFill>
-                <a:latin typeface="Calibri" pitchFamily="34" charset="0"/>
-                <a:ea typeface="Calibri" pitchFamily="34" charset="-122"/>
-                <a:cs typeface="Calibri" pitchFamily="34" charset="-120"/>
+                <a:latin typeface="IBM Plex Mono" pitchFamily="34" charset="0"/>
+                <a:ea typeface="IBM Plex Mono" pitchFamily="34" charset="-122"/>
+                <a:cs typeface="IBM Plex Mono" pitchFamily="34" charset="-120"/>
               </a:rPr>
               <a:t>Barbara A-O, Mateusz Toczek</a:t>
             </a:r>
@@ -13411,9 +13411,9 @@
                 <a:solidFill>
                   <a:srgbClr val="C05621"/>
                 </a:solidFill>
-                <a:latin typeface="Calibri" pitchFamily="34" charset="0"/>
-                <a:ea typeface="Calibri" pitchFamily="34" charset="-122"/>
-                <a:cs typeface="Calibri" pitchFamily="34" charset="-120"/>
+                <a:latin typeface="IBM Plex Mono" pitchFamily="34" charset="0"/>
+                <a:ea typeface="IBM Plex Mono" pitchFamily="34" charset="-122"/>
+                <a:cs typeface="IBM Plex Mono" pitchFamily="34" charset="-120"/>
               </a:rPr>
               <a:t>KEY OBSERVATION:  </a:t>
             </a:r>
@@ -13425,9 +13425,9 @@
                 <a:solidFill>
                   <a:srgbClr val="4A5568"/>
                 </a:solidFill>
-                <a:latin typeface="Calibri" pitchFamily="34" charset="0"/>
-                <a:ea typeface="Calibri" pitchFamily="34" charset="-122"/>
-                <a:cs typeface="Calibri" pitchFamily="34" charset="-120"/>
+                <a:latin typeface="IBM Plex Mono" pitchFamily="34" charset="0"/>
+                <a:ea typeface="IBM Plex Mono" pitchFamily="34" charset="-122"/>
+                <a:cs typeface="IBM Plex Mono" pitchFamily="34" charset="-120"/>
               </a:rPr>
               <a:t>No technical/engineering expertise within GRC team. Customer Trust lacks a dedicated lead since Jodi's departure. Peer alignment with Security Engineering is critical.</a:t>
             </a:r>
@@ -13496,9 +13496,9 @@
                 <a:solidFill>
                   <a:srgbClr val="1A1D23"/>
                 </a:solidFill>
-                <a:latin typeface="Georgia" pitchFamily="34" charset="0"/>
-                <a:ea typeface="Georgia" pitchFamily="34" charset="-122"/>
-                <a:cs typeface="Georgia" pitchFamily="34" charset="-120"/>
+                <a:latin typeface="IBM Plex Mono" pitchFamily="34" charset="0"/>
+                <a:ea typeface="IBM Plex Mono" pitchFamily="34" charset="-122"/>
+                <a:cs typeface="IBM Plex Mono" pitchFamily="34" charset="-120"/>
               </a:rPr>
               <a:t>Critical Gaps Analysis</a:t>
             </a:r>
@@ -13558,9 +13558,9 @@
                 <a:solidFill>
                   <a:srgbClr val="718096"/>
                 </a:solidFill>
-                <a:latin typeface="Calibri" pitchFamily="34" charset="0"/>
-                <a:ea typeface="Calibri" pitchFamily="34" charset="-122"/>
-                <a:cs typeface="Calibri" pitchFamily="34" charset="-120"/>
+                <a:latin typeface="IBM Plex Mono" pitchFamily="34" charset="0"/>
+                <a:ea typeface="IBM Plex Mono" pitchFamily="34" charset="-122"/>
+                <a:cs typeface="IBM Plex Mono" pitchFamily="34" charset="-120"/>
               </a:rPr>
               <a:t>CONFIDENTIAL  |  GRC Program Modernization Roadmap 2026</a:t>
             </a:r>
@@ -13597,9 +13597,9 @@
                 <a:solidFill>
                   <a:srgbClr val="718096"/>
                 </a:solidFill>
-                <a:latin typeface="Calibri" pitchFamily="34" charset="0"/>
-                <a:ea typeface="Calibri" pitchFamily="34" charset="-122"/>
-                <a:cs typeface="Calibri" pitchFamily="34" charset="-120"/>
+                <a:latin typeface="IBM Plex Mono" pitchFamily="34" charset="0"/>
+                <a:ea typeface="IBM Plex Mono" pitchFamily="34" charset="-122"/>
+                <a:cs typeface="IBM Plex Mono" pitchFamily="34" charset="-120"/>
               </a:rPr>
               <a:t>5</a:t>
             </a:r>
@@ -13703,9 +13703,9 @@
                 <a:solidFill>
                   <a:srgbClr val="FFFFFF"/>
                 </a:solidFill>
-                <a:latin typeface="Calibri" pitchFamily="34" charset="0"/>
-                <a:ea typeface="Calibri" pitchFamily="34" charset="-122"/>
-                <a:cs typeface="Calibri" pitchFamily="34" charset="-120"/>
+                <a:latin typeface="IBM Plex Mono" pitchFamily="34" charset="0"/>
+                <a:ea typeface="IBM Plex Mono" pitchFamily="34" charset="-122"/>
+                <a:cs typeface="IBM Plex Mono" pitchFamily="34" charset="-120"/>
               </a:rPr>
               <a:t>CRITICAL</a:t>
             </a:r>
@@ -13742,9 +13742,9 @@
                 <a:solidFill>
                   <a:srgbClr val="1A1D23"/>
                 </a:solidFill>
-                <a:latin typeface="Calibri" pitchFamily="34" charset="0"/>
-                <a:ea typeface="Calibri" pitchFamily="34" charset="-122"/>
-                <a:cs typeface="Calibri" pitchFamily="34" charset="-120"/>
+                <a:latin typeface="IBM Plex Mono" pitchFamily="34" charset="0"/>
+                <a:ea typeface="IBM Plex Mono" pitchFamily="34" charset="-122"/>
+                <a:cs typeface="IBM Plex Mono" pitchFamily="34" charset="-120"/>
               </a:rPr>
               <a:t>GRC-Engineering Disconnect</a:t>
             </a:r>
@@ -13785,9 +13785,9 @@
                 <a:solidFill>
                   <a:srgbClr val="4A5568"/>
                 </a:solidFill>
-                <a:latin typeface="Calibri" pitchFamily="34" charset="0"/>
-                <a:ea typeface="Calibri" pitchFamily="34" charset="-122"/>
-                <a:cs typeface="Calibri" pitchFamily="34" charset="-120"/>
+                <a:latin typeface="IBM Plex Mono" pitchFamily="34" charset="0"/>
+                <a:ea typeface="IBM Plex Mono" pitchFamily="34" charset="-122"/>
+                <a:cs typeface="IBM Plex Mono" pitchFamily="34" charset="-120"/>
               </a:rPr>
               <a:t>No GRC personnel understand product, tech stack, or SDLC</a:t>
             </a:r>
@@ -13806,9 +13806,9 @@
                 <a:solidFill>
                   <a:srgbClr val="4A5568"/>
                 </a:solidFill>
-                <a:latin typeface="Calibri" pitchFamily="34" charset="0"/>
-                <a:ea typeface="Calibri" pitchFamily="34" charset="-122"/>
-                <a:cs typeface="Calibri" pitchFamily="34" charset="-120"/>
+                <a:latin typeface="IBM Plex Mono" pitchFamily="34" charset="0"/>
+                <a:ea typeface="IBM Plex Mono" pitchFamily="34" charset="-122"/>
+                <a:cs typeface="IBM Plex Mono" pitchFamily="34" charset="-120"/>
               </a:rPr>
               <a:t>Not invited to sprint planning or architecture reviews</a:t>
             </a:r>
@@ -13827,9 +13827,9 @@
                 <a:solidFill>
                   <a:srgbClr val="4A5568"/>
                 </a:solidFill>
-                <a:latin typeface="Calibri" pitchFamily="34" charset="0"/>
-                <a:ea typeface="Calibri" pitchFamily="34" charset="-122"/>
-                <a:cs typeface="Calibri" pitchFamily="34" charset="-120"/>
+                <a:latin typeface="IBM Plex Mono" pitchFamily="34" charset="0"/>
+                <a:ea typeface="IBM Plex Mono" pitchFamily="34" charset="-122"/>
+                <a:cs typeface="IBM Plex Mono" pitchFamily="34" charset="-120"/>
               </a:rPr>
               <a:t>Manual audit processes, no automation or continuous monitoring</a:t>
             </a:r>
@@ -13848,9 +13848,9 @@
                 <a:solidFill>
                   <a:srgbClr val="4A5568"/>
                 </a:solidFill>
-                <a:latin typeface="Calibri" pitchFamily="34" charset="0"/>
-                <a:ea typeface="Calibri" pitchFamily="34" charset="-122"/>
-                <a:cs typeface="Calibri" pitchFamily="34" charset="-120"/>
+                <a:latin typeface="IBM Plex Mono" pitchFamily="34" charset="0"/>
+                <a:ea typeface="IBM Plex Mono" pitchFamily="34" charset="-122"/>
+                <a:cs typeface="IBM Plex Mono" pitchFamily="34" charset="-120"/>
               </a:rPr>
               <a:t>No embedded GRC presence in engineering org</a:t>
             </a:r>
@@ -13869,9 +13869,9 @@
                 <a:solidFill>
                   <a:srgbClr val="4A5568"/>
                 </a:solidFill>
-                <a:latin typeface="Calibri" pitchFamily="34" charset="0"/>
-                <a:ea typeface="Calibri" pitchFamily="34" charset="-122"/>
-                <a:cs typeface="Calibri" pitchFamily="34" charset="-120"/>
+                <a:latin typeface="IBM Plex Mono" pitchFamily="34" charset="0"/>
+                <a:ea typeface="IBM Plex Mono" pitchFamily="34" charset="-122"/>
+                <a:cs typeface="IBM Plex Mono" pitchFamily="34" charset="-120"/>
               </a:rPr>
               <a:t>Compliance is after-the-fact, not integrated</a:t>
             </a:r>
@@ -13935,9 +13935,9 @@
                 <a:solidFill>
                   <a:srgbClr val="C53030"/>
                 </a:solidFill>
-                <a:latin typeface="Calibri" pitchFamily="34" charset="0"/>
-                <a:ea typeface="Calibri" pitchFamily="34" charset="-122"/>
-                <a:cs typeface="Calibri" pitchFamily="34" charset="-120"/>
+                <a:latin typeface="IBM Plex Mono" pitchFamily="34" charset="0"/>
+                <a:ea typeface="IBM Plex Mono" pitchFamily="34" charset="-122"/>
+                <a:cs typeface="IBM Plex Mono" pitchFamily="34" charset="-120"/>
               </a:rPr>
               <a:t>BUSINESS IMPACT</a:t>
             </a:r>
@@ -13974,9 +13974,9 @@
                 <a:solidFill>
                   <a:srgbClr val="4A5568"/>
                 </a:solidFill>
-                <a:latin typeface="Calibri" pitchFamily="34" charset="0"/>
-                <a:ea typeface="Calibri" pitchFamily="34" charset="-122"/>
-                <a:cs typeface="Calibri" pitchFamily="34" charset="-120"/>
+                <a:latin typeface="IBM Plex Mono" pitchFamily="34" charset="0"/>
+                <a:ea typeface="IBM Plex Mono" pitchFamily="34" charset="-122"/>
+                <a:cs typeface="IBM Plex Mono" pitchFamily="34" charset="-120"/>
               </a:rPr>
               <a:t>Findings discovered late; engineering views GRC as blocker</a:t>
             </a:r>
@@ -14080,9 +14080,9 @@
                 <a:solidFill>
                   <a:srgbClr val="FFFFFF"/>
                 </a:solidFill>
-                <a:latin typeface="Calibri" pitchFamily="34" charset="0"/>
-                <a:ea typeface="Calibri" pitchFamily="34" charset="-122"/>
-                <a:cs typeface="Calibri" pitchFamily="34" charset="-120"/>
+                <a:latin typeface="IBM Plex Mono" pitchFamily="34" charset="0"/>
+                <a:ea typeface="IBM Plex Mono" pitchFamily="34" charset="-122"/>
+                <a:cs typeface="IBM Plex Mono" pitchFamily="34" charset="-120"/>
               </a:rPr>
               <a:t>HIGH</a:t>
             </a:r>
@@ -14119,9 +14119,9 @@
                 <a:solidFill>
                   <a:srgbClr val="1A1D23"/>
                 </a:solidFill>
-                <a:latin typeface="Calibri" pitchFamily="34" charset="0"/>
-                <a:ea typeface="Calibri" pitchFamily="34" charset="-122"/>
-                <a:cs typeface="Calibri" pitchFamily="34" charset="-120"/>
+                <a:latin typeface="IBM Plex Mono" pitchFamily="34" charset="0"/>
+                <a:ea typeface="IBM Plex Mono" pitchFamily="34" charset="-122"/>
+                <a:cs typeface="IBM Plex Mono" pitchFamily="34" charset="-120"/>
               </a:rPr>
               <a:t>Customer Trust Fragmentation</a:t>
             </a:r>
@@ -14162,9 +14162,9 @@
                 <a:solidFill>
                   <a:srgbClr val="4A5568"/>
                 </a:solidFill>
-                <a:latin typeface="Calibri" pitchFamily="34" charset="0"/>
-                <a:ea typeface="Calibri" pitchFamily="34" charset="-122"/>
-                <a:cs typeface="Calibri" pitchFamily="34" charset="-120"/>
+                <a:latin typeface="IBM Plex Mono" pitchFamily="34" charset="0"/>
+                <a:ea typeface="IBM Plex Mono" pitchFamily="34" charset="-122"/>
+                <a:cs typeface="IBM Plex Mono" pitchFamily="34" charset="-120"/>
               </a:rPr>
               <a:t>3 fragmented tools: Onboard, Conveyor, Trust Center</a:t>
             </a:r>
@@ -14183,9 +14183,9 @@
                 <a:solidFill>
                   <a:srgbClr val="4A5568"/>
                 </a:solidFill>
-                <a:latin typeface="Calibri" pitchFamily="34" charset="0"/>
-                <a:ea typeface="Calibri" pitchFamily="34" charset="-122"/>
-                <a:cs typeface="Calibri" pitchFamily="34" charset="-120"/>
+                <a:latin typeface="IBM Plex Mono" pitchFamily="34" charset="0"/>
+                <a:ea typeface="IBM Plex Mono" pitchFamily="34" charset="-122"/>
+                <a:cs typeface="IBM Plex Mono" pitchFamily="34" charset="-120"/>
               </a:rPr>
               <a:t>Work in Jira but no ROI or revenue tracking</a:t>
             </a:r>
@@ -14204,9 +14204,9 @@
                 <a:solidFill>
                   <a:srgbClr val="4A5568"/>
                 </a:solidFill>
-                <a:latin typeface="Calibri" pitchFamily="34" charset="0"/>
-                <a:ea typeface="Calibri" pitchFamily="34" charset="-122"/>
-                <a:cs typeface="Calibri" pitchFamily="34" charset="-120"/>
+                <a:latin typeface="IBM Plex Mono" pitchFamily="34" charset="0"/>
+                <a:ea typeface="IBM Plex Mono" pitchFamily="34" charset="-122"/>
+                <a:cs typeface="IBM Plex Mono" pitchFamily="34" charset="-120"/>
               </a:rPr>
               <a:t>Deal numbers visible, no revenue impact metrics</a:t>
             </a:r>
@@ -14225,9 +14225,9 @@
                 <a:solidFill>
                   <a:srgbClr val="4A5568"/>
                 </a:solidFill>
-                <a:latin typeface="Calibri" pitchFamily="34" charset="0"/>
-                <a:ea typeface="Calibri" pitchFamily="34" charset="-122"/>
-                <a:cs typeface="Calibri" pitchFamily="34" charset="-120"/>
+                <a:latin typeface="IBM Plex Mono" pitchFamily="34" charset="0"/>
+                <a:ea typeface="IBM Plex Mono" pitchFamily="34" charset="-122"/>
+                <a:cs typeface="IBM Plex Mono" pitchFamily="34" charset="-120"/>
               </a:rPr>
               <a:t>No standardized legal-approved answer library</a:t>
             </a:r>
@@ -14246,9 +14246,9 @@
                 <a:solidFill>
                   <a:srgbClr val="4A5568"/>
                 </a:solidFill>
-                <a:latin typeface="Calibri" pitchFamily="34" charset="0"/>
-                <a:ea typeface="Calibri" pitchFamily="34" charset="-122"/>
-                <a:cs typeface="Calibri" pitchFamily="34" charset="-120"/>
+                <a:latin typeface="IBM Plex Mono" pitchFamily="34" charset="0"/>
+                <a:ea typeface="IBM Plex Mono" pitchFamily="34" charset="-122"/>
+                <a:cs typeface="IBM Plex Mono" pitchFamily="34" charset="-120"/>
               </a:rPr>
               <a:t>No dedicated lead after Jodi's departure</a:t>
             </a:r>
@@ -14312,9 +14312,9 @@
                 <a:solidFill>
                   <a:srgbClr val="C05621"/>
                 </a:solidFill>
-                <a:latin typeface="Calibri" pitchFamily="34" charset="0"/>
-                <a:ea typeface="Calibri" pitchFamily="34" charset="-122"/>
-                <a:cs typeface="Calibri" pitchFamily="34" charset="-120"/>
+                <a:latin typeface="IBM Plex Mono" pitchFamily="34" charset="0"/>
+                <a:ea typeface="IBM Plex Mono" pitchFamily="34" charset="-122"/>
+                <a:cs typeface="IBM Plex Mono" pitchFamily="34" charset="-120"/>
               </a:rPr>
               <a:t>BUSINESS IMPACT</a:t>
             </a:r>
@@ -14351,9 +14351,9 @@
                 <a:solidFill>
                   <a:srgbClr val="4A5568"/>
                 </a:solidFill>
-                <a:latin typeface="Calibri" pitchFamily="34" charset="0"/>
-                <a:ea typeface="Calibri" pitchFamily="34" charset="-122"/>
-                <a:cs typeface="Calibri" pitchFamily="34" charset="-120"/>
+                <a:latin typeface="IBM Plex Mono" pitchFamily="34" charset="0"/>
+                <a:ea typeface="IBM Plex Mono" pitchFamily="34" charset="-122"/>
+                <a:cs typeface="IBM Plex Mono" pitchFamily="34" charset="-120"/>
               </a:rPr>
               <a:t>Slower deal cycles, duplicated effort, no demonstrated value</a:t>
             </a:r>
@@ -14457,9 +14457,9 @@
                 <a:solidFill>
                   <a:srgbClr val="FFFFFF"/>
                 </a:solidFill>
-                <a:latin typeface="Calibri" pitchFamily="34" charset="0"/>
-                <a:ea typeface="Calibri" pitchFamily="34" charset="-122"/>
-                <a:cs typeface="Calibri" pitchFamily="34" charset="-120"/>
+                <a:latin typeface="IBM Plex Mono" pitchFamily="34" charset="0"/>
+                <a:ea typeface="IBM Plex Mono" pitchFamily="34" charset="-122"/>
+                <a:cs typeface="IBM Plex Mono" pitchFamily="34" charset="-120"/>
               </a:rPr>
               <a:t>HIGH</a:t>
             </a:r>
@@ -14496,9 +14496,9 @@
                 <a:solidFill>
                   <a:srgbClr val="1A1D23"/>
                 </a:solidFill>
-                <a:latin typeface="Calibri" pitchFamily="34" charset="0"/>
-                <a:ea typeface="Calibri" pitchFamily="34" charset="-122"/>
-                <a:cs typeface="Calibri" pitchFamily="34" charset="-120"/>
+                <a:latin typeface="IBM Plex Mono" pitchFamily="34" charset="0"/>
+                <a:ea typeface="IBM Plex Mono" pitchFamily="34" charset="-122"/>
+                <a:cs typeface="IBM Plex Mono" pitchFamily="34" charset="-120"/>
               </a:rPr>
               <a:t>Program Maturity &amp; Operations</a:t>
             </a:r>
@@ -14539,9 +14539,9 @@
                 <a:solidFill>
                   <a:srgbClr val="4A5568"/>
                 </a:solidFill>
-                <a:latin typeface="Calibri" pitchFamily="34" charset="0"/>
-                <a:ea typeface="Calibri" pitchFamily="34" charset="-122"/>
-                <a:cs typeface="Calibri" pitchFamily="34" charset="-120"/>
+                <a:latin typeface="IBM Plex Mono" pitchFamily="34" charset="0"/>
+                <a:ea typeface="IBM Plex Mono" pitchFamily="34" charset="-122"/>
+                <a:cs typeface="IBM Plex Mono" pitchFamily="34" charset="-120"/>
               </a:rPr>
               <a:t>No roadmap, maturity model, or strategic plan existed</a:t>
             </a:r>
@@ -14560,9 +14560,9 @@
                 <a:solidFill>
                   <a:srgbClr val="4A5568"/>
                 </a:solidFill>
-                <a:latin typeface="Calibri" pitchFamily="34" charset="0"/>
-                <a:ea typeface="Calibri" pitchFamily="34" charset="-122"/>
-                <a:cs typeface="Calibri" pitchFamily="34" charset="-120"/>
+                <a:latin typeface="IBM Plex Mono" pitchFamily="34" charset="0"/>
+                <a:ea typeface="IBM Plex Mono" pitchFamily="34" charset="-122"/>
+                <a:cs typeface="IBM Plex Mono" pitchFamily="34" charset="-120"/>
               </a:rPr>
               <a:t>TPRM/Audit lack baselines and performance KPIs</a:t>
             </a:r>
@@ -14581,9 +14581,9 @@
                 <a:solidFill>
                   <a:srgbClr val="4A5568"/>
                 </a:solidFill>
-                <a:latin typeface="Calibri" pitchFamily="34" charset="0"/>
-                <a:ea typeface="Calibri" pitchFamily="34" charset="-122"/>
-                <a:cs typeface="Calibri" pitchFamily="34" charset="-120"/>
+                <a:latin typeface="IBM Plex Mono" pitchFamily="34" charset="0"/>
+                <a:ea typeface="IBM Plex Mono" pitchFamily="34" charset="-122"/>
+                <a:cs typeface="IBM Plex Mono" pitchFamily="34" charset="-120"/>
               </a:rPr>
               <a:t>BC/DR needs validation against current threats</a:t>
             </a:r>
@@ -14602,9 +14602,9 @@
                 <a:solidFill>
                   <a:srgbClr val="4A5568"/>
                 </a:solidFill>
-                <a:latin typeface="Calibri" pitchFamily="34" charset="0"/>
-                <a:ea typeface="Calibri" pitchFamily="34" charset="-122"/>
-                <a:cs typeface="Calibri" pitchFamily="34" charset="-120"/>
+                <a:latin typeface="IBM Plex Mono" pitchFamily="34" charset="0"/>
+                <a:ea typeface="IBM Plex Mono" pitchFamily="34" charset="-122"/>
+                <a:cs typeface="IBM Plex Mono" pitchFamily="34" charset="-120"/>
               </a:rPr>
               <a:t>No risk quantification (e.g. FAIR) methodology</a:t>
             </a:r>
@@ -14623,9 +14623,9 @@
                 <a:solidFill>
                   <a:srgbClr val="4A5568"/>
                 </a:solidFill>
-                <a:latin typeface="Calibri" pitchFamily="34" charset="0"/>
-                <a:ea typeface="Calibri" pitchFamily="34" charset="-122"/>
-                <a:cs typeface="Calibri" pitchFamily="34" charset="-120"/>
+                <a:latin typeface="IBM Plex Mono" pitchFamily="34" charset="0"/>
+                <a:ea typeface="IBM Plex Mono" pitchFamily="34" charset="-122"/>
+                <a:cs typeface="IBM Plex Mono" pitchFamily="34" charset="-120"/>
               </a:rPr>
               <a:t>Governance not integrated with risk/compliance workflows</a:t>
             </a:r>
@@ -14689,9 +14689,9 @@
                 <a:solidFill>
                   <a:srgbClr val="C05621"/>
                 </a:solidFill>
-                <a:latin typeface="Calibri" pitchFamily="34" charset="0"/>
-                <a:ea typeface="Calibri" pitchFamily="34" charset="-122"/>
-                <a:cs typeface="Calibri" pitchFamily="34" charset="-120"/>
+                <a:latin typeface="IBM Plex Mono" pitchFamily="34" charset="0"/>
+                <a:ea typeface="IBM Plex Mono" pitchFamily="34" charset="-122"/>
+                <a:cs typeface="IBM Plex Mono" pitchFamily="34" charset="-120"/>
               </a:rPr>
               <a:t>BUSINESS IMPACT</a:t>
             </a:r>
@@ -14728,9 +14728,9 @@
                 <a:solidFill>
                   <a:srgbClr val="4A5568"/>
                 </a:solidFill>
-                <a:latin typeface="Calibri" pitchFamily="34" charset="0"/>
-                <a:ea typeface="Calibri" pitchFamily="34" charset="-122"/>
-                <a:cs typeface="Calibri" pitchFamily="34" charset="-120"/>
+                <a:latin typeface="IBM Plex Mono" pitchFamily="34" charset="0"/>
+                <a:ea typeface="IBM Plex Mono" pitchFamily="34" charset="-122"/>
+                <a:cs typeface="IBM Plex Mono" pitchFamily="34" charset="-120"/>
               </a:rPr>
               <a:t>Reactive posture; cannot prioritize investments</a:t>
             </a:r>
@@ -14799,9 +14799,9 @@
                 <a:solidFill>
                   <a:srgbClr val="1A1D23"/>
                 </a:solidFill>
-                <a:latin typeface="Georgia" pitchFamily="34" charset="0"/>
-                <a:ea typeface="Georgia" pitchFamily="34" charset="-122"/>
-                <a:cs typeface="Georgia" pitchFamily="34" charset="-120"/>
+                <a:latin typeface="IBM Plex Mono" pitchFamily="34" charset="0"/>
+                <a:ea typeface="IBM Plex Mono" pitchFamily="34" charset="-122"/>
+                <a:cs typeface="IBM Plex Mono" pitchFamily="34" charset="-120"/>
               </a:rPr>
               <a:t>Strategic Roadmap Overview</a:t>
             </a:r>
@@ -14861,9 +14861,9 @@
                 <a:solidFill>
                   <a:srgbClr val="718096"/>
                 </a:solidFill>
-                <a:latin typeface="Calibri" pitchFamily="34" charset="0"/>
-                <a:ea typeface="Calibri" pitchFamily="34" charset="-122"/>
-                <a:cs typeface="Calibri" pitchFamily="34" charset="-120"/>
+                <a:latin typeface="IBM Plex Mono" pitchFamily="34" charset="0"/>
+                <a:ea typeface="IBM Plex Mono" pitchFamily="34" charset="-122"/>
+                <a:cs typeface="IBM Plex Mono" pitchFamily="34" charset="-120"/>
               </a:rPr>
               <a:t>CONFIDENTIAL  |  GRC Program Modernization Roadmap 2026</a:t>
             </a:r>
@@ -14900,9 +14900,9 @@
                 <a:solidFill>
                   <a:srgbClr val="718096"/>
                 </a:solidFill>
-                <a:latin typeface="Calibri" pitchFamily="34" charset="0"/>
-                <a:ea typeface="Calibri" pitchFamily="34" charset="-122"/>
-                <a:cs typeface="Calibri" pitchFamily="34" charset="-120"/>
+                <a:latin typeface="IBM Plex Mono" pitchFamily="34" charset="0"/>
+                <a:ea typeface="IBM Plex Mono" pitchFamily="34" charset="-122"/>
+                <a:cs typeface="IBM Plex Mono" pitchFamily="34" charset="-120"/>
               </a:rPr>
               <a:t>6</a:t>
             </a:r>
@@ -14959,9 +14959,9 @@
                 <a:solidFill>
                   <a:srgbClr val="FFFFFF"/>
                 </a:solidFill>
-                <a:latin typeface="Calibri" pitchFamily="34" charset="0"/>
-                <a:ea typeface="Calibri" pitchFamily="34" charset="-122"/>
-                <a:cs typeface="Calibri" pitchFamily="34" charset="-120"/>
+                <a:latin typeface="IBM Plex Mono" pitchFamily="34" charset="0"/>
+                <a:ea typeface="IBM Plex Mono" pitchFamily="34" charset="-122"/>
+                <a:cs typeface="IBM Plex Mono" pitchFamily="34" charset="-120"/>
               </a:rPr>
               <a:t>Q1 2026</a:t>
             </a:r>
@@ -15018,9 +15018,9 @@
                 <a:solidFill>
                   <a:srgbClr val="FFFFFF"/>
                 </a:solidFill>
-                <a:latin typeface="Calibri" pitchFamily="34" charset="0"/>
-                <a:ea typeface="Calibri" pitchFamily="34" charset="-122"/>
-                <a:cs typeface="Calibri" pitchFamily="34" charset="-120"/>
+                <a:latin typeface="IBM Plex Mono" pitchFamily="34" charset="0"/>
+                <a:ea typeface="IBM Plex Mono" pitchFamily="34" charset="-122"/>
+                <a:cs typeface="IBM Plex Mono" pitchFamily="34" charset="-120"/>
               </a:rPr>
               <a:t>Q2 2026</a:t>
             </a:r>
@@ -15077,9 +15077,9 @@
                 <a:solidFill>
                   <a:srgbClr val="FFFFFF"/>
                 </a:solidFill>
-                <a:latin typeface="Calibri" pitchFamily="34" charset="0"/>
-                <a:ea typeface="Calibri" pitchFamily="34" charset="-122"/>
-                <a:cs typeface="Calibri" pitchFamily="34" charset="-120"/>
+                <a:latin typeface="IBM Plex Mono" pitchFamily="34" charset="0"/>
+                <a:ea typeface="IBM Plex Mono" pitchFamily="34" charset="-122"/>
+                <a:cs typeface="IBM Plex Mono" pitchFamily="34" charset="-120"/>
               </a:rPr>
               <a:t>Q3 2026</a:t>
             </a:r>
@@ -15136,9 +15136,9 @@
                 <a:solidFill>
                   <a:srgbClr val="FFFFFF"/>
                 </a:solidFill>
-                <a:latin typeface="Calibri" pitchFamily="34" charset="0"/>
-                <a:ea typeface="Calibri" pitchFamily="34" charset="-122"/>
-                <a:cs typeface="Calibri" pitchFamily="34" charset="-120"/>
+                <a:latin typeface="IBM Plex Mono" pitchFamily="34" charset="0"/>
+                <a:ea typeface="IBM Plex Mono" pitchFamily="34" charset="-122"/>
+                <a:cs typeface="IBM Plex Mono" pitchFamily="34" charset="-120"/>
               </a:rPr>
               <a:t>Q4 2026</a:t>
             </a:r>
@@ -15222,9 +15222,9 @@
                 <a:solidFill>
                   <a:srgbClr val="2B6CB0"/>
                 </a:solidFill>
-                <a:latin typeface="Calibri" pitchFamily="34" charset="0"/>
-                <a:ea typeface="Calibri" pitchFamily="34" charset="-122"/>
-                <a:cs typeface="Calibri" pitchFamily="34" charset="-120"/>
+                <a:latin typeface="IBM Plex Mono" pitchFamily="34" charset="0"/>
+                <a:ea typeface="IBM Plex Mono" pitchFamily="34" charset="-122"/>
+                <a:cs typeface="IBM Plex Mono" pitchFamily="34" charset="-120"/>
               </a:rPr>
               <a:t>Phase 1: Foundation</a:t>
             </a:r>
@@ -15261,9 +15261,9 @@
                 <a:solidFill>
                   <a:srgbClr val="718096"/>
                 </a:solidFill>
-                <a:latin typeface="Calibri" pitchFamily="34" charset="0"/>
-                <a:ea typeface="Calibri" pitchFamily="34" charset="-122"/>
-                <a:cs typeface="Calibri" pitchFamily="34" charset="-120"/>
+                <a:latin typeface="IBM Plex Mono" pitchFamily="34" charset="0"/>
+                <a:ea typeface="IBM Plex Mono" pitchFamily="34" charset="-122"/>
+                <a:cs typeface="IBM Plex Mono" pitchFamily="34" charset="-120"/>
               </a:rPr>
               <a:t>Assess &amp; Baseline</a:t>
             </a:r>
@@ -15304,9 +15304,9 @@
                 <a:solidFill>
                   <a:srgbClr val="4A5568"/>
                 </a:solidFill>
-                <a:latin typeface="Calibri" pitchFamily="34" charset="0"/>
-                <a:ea typeface="Calibri" pitchFamily="34" charset="-122"/>
-                <a:cs typeface="Calibri" pitchFamily="34" charset="-120"/>
+                <a:latin typeface="IBM Plex Mono" pitchFamily="34" charset="0"/>
+                <a:ea typeface="IBM Plex Mono" pitchFamily="34" charset="-122"/>
+                <a:cs typeface="IBM Plex Mono" pitchFamily="34" charset="-120"/>
               </a:rPr>
               <a:t>GRC maturity assessment (NIST CSF)</a:t>
             </a:r>
@@ -15325,9 +15325,9 @@
                 <a:solidFill>
                   <a:srgbClr val="4A5568"/>
                 </a:solidFill>
-                <a:latin typeface="Calibri" pitchFamily="34" charset="0"/>
-                <a:ea typeface="Calibri" pitchFamily="34" charset="-122"/>
-                <a:cs typeface="Calibri" pitchFamily="34" charset="-120"/>
+                <a:latin typeface="IBM Plex Mono" pitchFamily="34" charset="0"/>
+                <a:ea typeface="IBM Plex Mono" pitchFamily="34" charset="-122"/>
+                <a:cs typeface="IBM Plex Mono" pitchFamily="34" charset="-120"/>
               </a:rPr>
               <a:t>Map Customer Trust tools &amp; workflows</a:t>
             </a:r>
@@ -15346,9 +15346,9 @@
                 <a:solidFill>
                   <a:srgbClr val="4A5568"/>
                 </a:solidFill>
-                <a:latin typeface="Calibri" pitchFamily="34" charset="0"/>
-                <a:ea typeface="Calibri" pitchFamily="34" charset="-122"/>
-                <a:cs typeface="Calibri" pitchFamily="34" charset="-120"/>
+                <a:latin typeface="IBM Plex Mono" pitchFamily="34" charset="0"/>
+                <a:ea typeface="IBM Plex Mono" pitchFamily="34" charset="-122"/>
+                <a:cs typeface="IBM Plex Mono" pitchFamily="34" charset="-120"/>
               </a:rPr>
               <a:t>Document TPRM/audit/BC-DR processes</a:t>
             </a:r>
@@ -15367,9 +15367,9 @@
                 <a:solidFill>
                   <a:srgbClr val="4A5568"/>
                 </a:solidFill>
-                <a:latin typeface="Calibri" pitchFamily="34" charset="0"/>
-                <a:ea typeface="Calibri" pitchFamily="34" charset="-122"/>
-                <a:cs typeface="Calibri" pitchFamily="34" charset="-120"/>
+                <a:latin typeface="IBM Plex Mono" pitchFamily="34" charset="0"/>
+                <a:ea typeface="IBM Plex Mono" pitchFamily="34" charset="-122"/>
+                <a:cs typeface="IBM Plex Mono" pitchFamily="34" charset="-120"/>
               </a:rPr>
               <a:t>Team capability &amp; skill gap analysis</a:t>
             </a:r>
@@ -15388,9 +15388,9 @@
                 <a:solidFill>
                   <a:srgbClr val="4A5568"/>
                 </a:solidFill>
-                <a:latin typeface="Calibri" pitchFamily="34" charset="0"/>
-                <a:ea typeface="Calibri" pitchFamily="34" charset="-122"/>
-                <a:cs typeface="Calibri" pitchFamily="34" charset="-120"/>
+                <a:latin typeface="IBM Plex Mono" pitchFamily="34" charset="0"/>
+                <a:ea typeface="IBM Plex Mono" pitchFamily="34" charset="-122"/>
+                <a:cs typeface="IBM Plex Mono" pitchFamily="34" charset="-120"/>
               </a:rPr>
               <a:t>Tech stack education for GRC team</a:t>
             </a:r>
@@ -15409,9 +15409,9 @@
                 <a:solidFill>
                   <a:srgbClr val="4A5568"/>
                 </a:solidFill>
-                <a:latin typeface="Calibri" pitchFamily="34" charset="0"/>
-                <a:ea typeface="Calibri" pitchFamily="34" charset="-122"/>
-                <a:cs typeface="Calibri" pitchFamily="34" charset="-120"/>
+                <a:latin typeface="IBM Plex Mono" pitchFamily="34" charset="0"/>
+                <a:ea typeface="IBM Plex Mono" pitchFamily="34" charset="-122"/>
+                <a:cs typeface="IBM Plex Mono" pitchFamily="34" charset="-120"/>
               </a:rPr>
               <a:t>Define KPI framework and baselines</a:t>
             </a:r>
@@ -15495,9 +15495,9 @@
                 <a:solidFill>
                   <a:srgbClr val="0E7C86"/>
                 </a:solidFill>
-                <a:latin typeface="Calibri" pitchFamily="34" charset="0"/>
-                <a:ea typeface="Calibri" pitchFamily="34" charset="-122"/>
-                <a:cs typeface="Calibri" pitchFamily="34" charset="-120"/>
+                <a:latin typeface="IBM Plex Mono" pitchFamily="34" charset="0"/>
+                <a:ea typeface="IBM Plex Mono" pitchFamily="34" charset="-122"/>
+                <a:cs typeface="IBM Plex Mono" pitchFamily="34" charset="-120"/>
               </a:rPr>
               <a:t>Phase 2: Quick Wins</a:t>
             </a:r>
@@ -15534,9 +15534,9 @@
                 <a:solidFill>
                   <a:srgbClr val="718096"/>
                 </a:solidFill>
-                <a:latin typeface="Calibri" pitchFamily="34" charset="0"/>
-                <a:ea typeface="Calibri" pitchFamily="34" charset="-122"/>
-                <a:cs typeface="Calibri" pitchFamily="34" charset="-120"/>
+                <a:latin typeface="IBM Plex Mono" pitchFamily="34" charset="0"/>
+                <a:ea typeface="IBM Plex Mono" pitchFamily="34" charset="-122"/>
+                <a:cs typeface="IBM Plex Mono" pitchFamily="34" charset="-120"/>
               </a:rPr>
               <a:t>Deliver Visible Value</a:t>
             </a:r>
@@ -15577,9 +15577,9 @@
                 <a:solidFill>
                   <a:srgbClr val="4A5568"/>
                 </a:solidFill>
-                <a:latin typeface="Calibri" pitchFamily="34" charset="0"/>
-                <a:ea typeface="Calibri" pitchFamily="34" charset="-122"/>
-                <a:cs typeface="Calibri" pitchFamily="34" charset="-120"/>
+                <a:latin typeface="IBM Plex Mono" pitchFamily="34" charset="0"/>
+                <a:ea typeface="IBM Plex Mono" pitchFamily="34" charset="-122"/>
+                <a:cs typeface="IBM Plex Mono" pitchFamily="34" charset="-120"/>
               </a:rPr>
               <a:t>Launch revenue-tracking dashboard</a:t>
             </a:r>
@@ -15598,9 +15598,9 @@
                 <a:solidFill>
                   <a:srgbClr val="4A5568"/>
                 </a:solidFill>
-                <a:latin typeface="Calibri" pitchFamily="34" charset="0"/>
-                <a:ea typeface="Calibri" pitchFamily="34" charset="-122"/>
-                <a:cs typeface="Calibri" pitchFamily="34" charset="-120"/>
+                <a:latin typeface="IBM Plex Mono" pitchFamily="34" charset="0"/>
+                <a:ea typeface="IBM Plex Mono" pitchFamily="34" charset="-122"/>
+                <a:cs typeface="IBM Plex Mono" pitchFamily="34" charset="-120"/>
               </a:rPr>
               <a:t>Build questionnaire response library</a:t>
             </a:r>
@@ -15619,9 +15619,9 @@
                 <a:solidFill>
                   <a:srgbClr val="4A5568"/>
                 </a:solidFill>
-                <a:latin typeface="Calibri" pitchFamily="34" charset="0"/>
-                <a:ea typeface="Calibri" pitchFamily="34" charset="-122"/>
-                <a:cs typeface="Calibri" pitchFamily="34" charset="-120"/>
+                <a:latin typeface="IBM Plex Mono" pitchFamily="34" charset="0"/>
+                <a:ea typeface="IBM Plex Mono" pitchFamily="34" charset="-122"/>
+                <a:cs typeface="IBM Plex Mono" pitchFamily="34" charset="-120"/>
               </a:rPr>
               <a:t>Embed GRC in engineering meetings</a:t>
             </a:r>
@@ -15640,9 +15640,9 @@
                 <a:solidFill>
                   <a:srgbClr val="4A5568"/>
                 </a:solidFill>
-                <a:latin typeface="Calibri" pitchFamily="34" charset="0"/>
-                <a:ea typeface="Calibri" pitchFamily="34" charset="-122"/>
-                <a:cs typeface="Calibri" pitchFamily="34" charset="-120"/>
+                <a:latin typeface="IBM Plex Mono" pitchFamily="34" charset="0"/>
+                <a:ea typeface="IBM Plex Mono" pitchFamily="34" charset="-122"/>
+                <a:cs typeface="IBM Plex Mono" pitchFamily="34" charset="-120"/>
               </a:rPr>
               <a:t>TPRM vendor tiering &amp; risk scoring</a:t>
             </a:r>
@@ -15661,9 +15661,9 @@
                 <a:solidFill>
                   <a:srgbClr val="4A5568"/>
                 </a:solidFill>
-                <a:latin typeface="Calibri" pitchFamily="34" charset="0"/>
-                <a:ea typeface="Calibri" pitchFamily="34" charset="-122"/>
-                <a:cs typeface="Calibri" pitchFamily="34" charset="-120"/>
+                <a:latin typeface="IBM Plex Mono" pitchFamily="34" charset="0"/>
+                <a:ea typeface="IBM Plex Mono" pitchFamily="34" charset="-122"/>
+                <a:cs typeface="IBM Plex Mono" pitchFamily="34" charset="-120"/>
               </a:rPr>
               <a:t>Audit cadence + internal KPI reporting</a:t>
             </a:r>
@@ -15682,9 +15682,9 @@
                 <a:solidFill>
                   <a:srgbClr val="4A5568"/>
                 </a:solidFill>
-                <a:latin typeface="Calibri" pitchFamily="34" charset="0"/>
-                <a:ea typeface="Calibri" pitchFamily="34" charset="-122"/>
-                <a:cs typeface="Calibri" pitchFamily="34" charset="-120"/>
+                <a:latin typeface="IBM Plex Mono" pitchFamily="34" charset="0"/>
+                <a:ea typeface="IBM Plex Mono" pitchFamily="34" charset="-122"/>
+                <a:cs typeface="IBM Plex Mono" pitchFamily="34" charset="-120"/>
               </a:rPr>
               <a:t>Deploy initial automated evidence collection</a:t>
             </a:r>
@@ -15768,9 +15768,9 @@
                 <a:solidFill>
                   <a:srgbClr val="4C51BF"/>
                 </a:solidFill>
-                <a:latin typeface="Calibri" pitchFamily="34" charset="0"/>
-                <a:ea typeface="Calibri" pitchFamily="34" charset="-122"/>
-                <a:cs typeface="Calibri" pitchFamily="34" charset="-120"/>
+                <a:latin typeface="IBM Plex Mono" pitchFamily="34" charset="0"/>
+                <a:ea typeface="IBM Plex Mono" pitchFamily="34" charset="-122"/>
+                <a:cs typeface="IBM Plex Mono" pitchFamily="34" charset="-120"/>
               </a:rPr>
               <a:t>Phase 3: Automation</a:t>
             </a:r>
@@ -15807,9 +15807,9 @@
                 <a:solidFill>
                   <a:srgbClr val="718096"/>
                 </a:solidFill>
-                <a:latin typeface="Calibri" pitchFamily="34" charset="0"/>
-                <a:ea typeface="Calibri" pitchFamily="34" charset="-122"/>
-                <a:cs typeface="Calibri" pitchFamily="34" charset="-120"/>
+                <a:latin typeface="IBM Plex Mono" pitchFamily="34" charset="0"/>
+                <a:ea typeface="IBM Plex Mono" pitchFamily="34" charset="-122"/>
+                <a:cs typeface="IBM Plex Mono" pitchFamily="34" charset="-120"/>
               </a:rPr>
               <a:t>Scale Through Technology</a:t>
             </a:r>
@@ -15850,9 +15850,9 @@
                 <a:solidFill>
                   <a:srgbClr val="4A5568"/>
                 </a:solidFill>
-                <a:latin typeface="Calibri" pitchFamily="34" charset="0"/>
-                <a:ea typeface="Calibri" pitchFamily="34" charset="-122"/>
-                <a:cs typeface="Calibri" pitchFamily="34" charset="-120"/>
+                <a:latin typeface="IBM Plex Mono" pitchFamily="34" charset="0"/>
+                <a:ea typeface="IBM Plex Mono" pitchFamily="34" charset="-122"/>
+                <a:cs typeface="IBM Plex Mono" pitchFamily="34" charset="-120"/>
               </a:rPr>
               <a:t>Policy-as-code in CI/CD pipeline</a:t>
             </a:r>
@@ -15871,9 +15871,9 @@
                 <a:solidFill>
                   <a:srgbClr val="4A5568"/>
                 </a:solidFill>
-                <a:latin typeface="Calibri" pitchFamily="34" charset="0"/>
-                <a:ea typeface="Calibri" pitchFamily="34" charset="-122"/>
-                <a:cs typeface="Calibri" pitchFamily="34" charset="-120"/>
+                <a:latin typeface="IBM Plex Mono" pitchFamily="34" charset="0"/>
+                <a:ea typeface="IBM Plex Mono" pitchFamily="34" charset="-122"/>
+                <a:cs typeface="IBM Plex Mono" pitchFamily="34" charset="-120"/>
               </a:rPr>
               <a:t>Automate compliance evidence gathering</a:t>
             </a:r>
@@ -15892,9 +15892,9 @@
                 <a:solidFill>
                   <a:srgbClr val="4A5568"/>
                 </a:solidFill>
-                <a:latin typeface="Calibri" pitchFamily="34" charset="0"/>
-                <a:ea typeface="Calibri" pitchFamily="34" charset="-122"/>
-                <a:cs typeface="Calibri" pitchFamily="34" charset="-120"/>
+                <a:latin typeface="IBM Plex Mono" pitchFamily="34" charset="0"/>
+                <a:ea typeface="IBM Plex Mono" pitchFamily="34" charset="-122"/>
+                <a:cs typeface="IBM Plex Mono" pitchFamily="34" charset="-120"/>
               </a:rPr>
               <a:t>Consolidate Customer Trust tooling</a:t>
             </a:r>
@@ -15913,9 +15913,9 @@
                 <a:solidFill>
                   <a:srgbClr val="4A5568"/>
                 </a:solidFill>
-                <a:latin typeface="Calibri" pitchFamily="34" charset="0"/>
-                <a:ea typeface="Calibri" pitchFamily="34" charset="-122"/>
-                <a:cs typeface="Calibri" pitchFamily="34" charset="-120"/>
+                <a:latin typeface="IBM Plex Mono" pitchFamily="34" charset="0"/>
+                <a:ea typeface="IBM Plex Mono" pitchFamily="34" charset="-122"/>
+                <a:cs typeface="IBM Plex Mono" pitchFamily="34" charset="-120"/>
               </a:rPr>
               <a:t>Launch continuous control monitoring</a:t>
             </a:r>
@@ -15934,9 +15934,9 @@
                 <a:solidFill>
                   <a:srgbClr val="4A5568"/>
                 </a:solidFill>
-                <a:latin typeface="Calibri" pitchFamily="34" charset="0"/>
-                <a:ea typeface="Calibri" pitchFamily="34" charset="-122"/>
-                <a:cs typeface="Calibri" pitchFamily="34" charset="-120"/>
+                <a:latin typeface="IBM Plex Mono" pitchFamily="34" charset="0"/>
+                <a:ea typeface="IBM Plex Mono" pitchFamily="34" charset="-122"/>
+                <a:cs typeface="IBM Plex Mono" pitchFamily="34" charset="-120"/>
               </a:rPr>
               <a:t>Integrate risk quantification (FAIR)</a:t>
             </a:r>
@@ -15955,9 +15955,9 @@
                 <a:solidFill>
                   <a:srgbClr val="4A5568"/>
                 </a:solidFill>
-                <a:latin typeface="Calibri" pitchFamily="34" charset="0"/>
-                <a:ea typeface="Calibri" pitchFamily="34" charset="-122"/>
-                <a:cs typeface="Calibri" pitchFamily="34" charset="-120"/>
+                <a:latin typeface="IBM Plex Mono" pitchFamily="34" charset="0"/>
+                <a:ea typeface="IBM Plex Mono" pitchFamily="34" charset="-122"/>
+                <a:cs typeface="IBM Plex Mono" pitchFamily="34" charset="-120"/>
               </a:rPr>
               <a:t>Build GRC-Engineering workflows</a:t>
             </a:r>
@@ -16041,9 +16041,9 @@
                 <a:solidFill>
                   <a:srgbClr val="276749"/>
                 </a:solidFill>
-                <a:latin typeface="Calibri" pitchFamily="34" charset="0"/>
-                <a:ea typeface="Calibri" pitchFamily="34" charset="-122"/>
-                <a:cs typeface="Calibri" pitchFamily="34" charset="-120"/>
+                <a:latin typeface="IBM Plex Mono" pitchFamily="34" charset="0"/>
+                <a:ea typeface="IBM Plex Mono" pitchFamily="34" charset="-122"/>
+                <a:cs typeface="IBM Plex Mono" pitchFamily="34" charset="-120"/>
               </a:rPr>
               <a:t>Phase 4: Optimize</a:t>
             </a:r>
@@ -16080,9 +16080,9 @@
                 <a:solidFill>
                   <a:srgbClr val="718096"/>
                 </a:solidFill>
-                <a:latin typeface="Calibri" pitchFamily="34" charset="0"/>
-                <a:ea typeface="Calibri" pitchFamily="34" charset="-122"/>
-                <a:cs typeface="Calibri" pitchFamily="34" charset="-120"/>
+                <a:latin typeface="IBM Plex Mono" pitchFamily="34" charset="0"/>
+                <a:ea typeface="IBM Plex Mono" pitchFamily="34" charset="-122"/>
+                <a:cs typeface="IBM Plex Mono" pitchFamily="34" charset="-120"/>
               </a:rPr>
               <a:t>Mature &amp; Demonstrate Value</a:t>
             </a:r>
@@ -16123,9 +16123,9 @@
                 <a:solidFill>
                   <a:srgbClr val="4A5568"/>
                 </a:solidFill>
-                <a:latin typeface="Calibri" pitchFamily="34" charset="0"/>
-                <a:ea typeface="Calibri" pitchFamily="34" charset="-122"/>
-                <a:cs typeface="Calibri" pitchFamily="34" charset="-120"/>
+                <a:latin typeface="IBM Plex Mono" pitchFamily="34" charset="0"/>
+                <a:ea typeface="IBM Plex Mono" pitchFamily="34" charset="-122"/>
+                <a:cs typeface="IBM Plex Mono" pitchFamily="34" charset="-120"/>
               </a:rPr>
               <a:t>Full GRC-as-Code maturity</a:t>
             </a:r>
@@ -16144,9 +16144,9 @@
                 <a:solidFill>
                   <a:srgbClr val="4A5568"/>
                 </a:solidFill>
-                <a:latin typeface="Calibri" pitchFamily="34" charset="0"/>
-                <a:ea typeface="Calibri" pitchFamily="34" charset="-122"/>
-                <a:cs typeface="Calibri" pitchFamily="34" charset="-120"/>
+                <a:latin typeface="IBM Plex Mono" pitchFamily="34" charset="0"/>
+                <a:ea typeface="IBM Plex Mono" pitchFamily="34" charset="-122"/>
+                <a:cs typeface="IBM Plex Mono" pitchFamily="34" charset="-120"/>
               </a:rPr>
               <a:t>Executive value dashboards (risk+revenue)</a:t>
             </a:r>
@@ -16165,9 +16165,9 @@
                 <a:solidFill>
                   <a:srgbClr val="4A5568"/>
                 </a:solidFill>
-                <a:latin typeface="Calibri" pitchFamily="34" charset="0"/>
-                <a:ea typeface="Calibri" pitchFamily="34" charset="-122"/>
-                <a:cs typeface="Calibri" pitchFamily="34" charset="-120"/>
+                <a:latin typeface="IBM Plex Mono" pitchFamily="34" charset="0"/>
+                <a:ea typeface="IBM Plex Mono" pitchFamily="34" charset="-122"/>
+                <a:cs typeface="IBM Plex Mono" pitchFamily="34" charset="-120"/>
               </a:rPr>
               <a:t>Proactive risk identification</a:t>
             </a:r>
@@ -16186,9 +16186,9 @@
                 <a:solidFill>
                   <a:srgbClr val="4A5568"/>
                 </a:solidFill>
-                <a:latin typeface="Calibri" pitchFamily="34" charset="0"/>
-                <a:ea typeface="Calibri" pitchFamily="34" charset="-122"/>
-                <a:cs typeface="Calibri" pitchFamily="34" charset="-120"/>
+                <a:latin typeface="IBM Plex Mono" pitchFamily="34" charset="0"/>
+                <a:ea typeface="IBM Plex Mono" pitchFamily="34" charset="-122"/>
+                <a:cs typeface="IBM Plex Mono" pitchFamily="34" charset="-120"/>
               </a:rPr>
               <a:t>Advanced vendor risk automation</a:t>
             </a:r>
@@ -16207,9 +16207,9 @@
                 <a:solidFill>
                   <a:srgbClr val="4A5568"/>
                 </a:solidFill>
-                <a:latin typeface="Calibri" pitchFamily="34" charset="0"/>
-                <a:ea typeface="Calibri" pitchFamily="34" charset="-122"/>
-                <a:cs typeface="Calibri" pitchFamily="34" charset="-120"/>
+                <a:latin typeface="IBM Plex Mono" pitchFamily="34" charset="0"/>
+                <a:ea typeface="IBM Plex Mono" pitchFamily="34" charset="-122"/>
+                <a:cs typeface="IBM Plex Mono" pitchFamily="34" charset="-120"/>
               </a:rPr>
               <a:t>Maturity re-assessment &amp; 2027 planning</a:t>
             </a:r>
@@ -16228,9 +16228,9 @@
                 <a:solidFill>
                   <a:srgbClr val="4A5568"/>
                 </a:solidFill>
-                <a:latin typeface="Calibri" pitchFamily="34" charset="0"/>
-                <a:ea typeface="Calibri" pitchFamily="34" charset="-122"/>
-                <a:cs typeface="Calibri" pitchFamily="34" charset="-120"/>
+                <a:latin typeface="IBM Plex Mono" pitchFamily="34" charset="0"/>
+                <a:ea typeface="IBM Plex Mono" pitchFamily="34" charset="-122"/>
+                <a:cs typeface="IBM Plex Mono" pitchFamily="34" charset="-120"/>
               </a:rPr>
               <a:t>Team certification program complete</a:t>
             </a:r>
@@ -16299,9 +16299,9 @@
                 <a:solidFill>
                   <a:srgbClr val="1A1D23"/>
                 </a:solidFill>
-                <a:latin typeface="Georgia" pitchFamily="34" charset="0"/>
-                <a:ea typeface="Georgia" pitchFamily="34" charset="-122"/>
-                <a:cs typeface="Georgia" pitchFamily="34" charset="-120"/>
+                <a:latin typeface="IBM Plex Mono" pitchFamily="34" charset="0"/>
+                <a:ea typeface="IBM Plex Mono" pitchFamily="34" charset="-122"/>
+                <a:cs typeface="IBM Plex Mono" pitchFamily="34" charset="-120"/>
               </a:rPr>
               <a:t>Customer Trust Transformation</a:t>
             </a:r>
@@ -16338,9 +16338,9 @@
                 <a:solidFill>
                   <a:srgbClr val="718096"/>
                 </a:solidFill>
-                <a:latin typeface="Calibri" pitchFamily="34" charset="0"/>
-                <a:ea typeface="Calibri" pitchFamily="34" charset="-122"/>
-                <a:cs typeface="Calibri" pitchFamily="34" charset="-120"/>
+                <a:latin typeface="IBM Plex Mono" pitchFamily="34" charset="0"/>
+                <a:ea typeface="IBM Plex Mono" pitchFamily="34" charset="-122"/>
+                <a:cs typeface="IBM Plex Mono" pitchFamily="34" charset="-120"/>
               </a:rPr>
               <a:t>Evolve from reactive questionnaire processing to proactive revenue enablement</a:t>
             </a:r>
@@ -16400,9 +16400,9 @@
                 <a:solidFill>
                   <a:srgbClr val="718096"/>
                 </a:solidFill>
-                <a:latin typeface="Calibri" pitchFamily="34" charset="0"/>
-                <a:ea typeface="Calibri" pitchFamily="34" charset="-122"/>
-                <a:cs typeface="Calibri" pitchFamily="34" charset="-120"/>
+                <a:latin typeface="IBM Plex Mono" pitchFamily="34" charset="0"/>
+                <a:ea typeface="IBM Plex Mono" pitchFamily="34" charset="-122"/>
+                <a:cs typeface="IBM Plex Mono" pitchFamily="34" charset="-120"/>
               </a:rPr>
               <a:t>CONFIDENTIAL  |  GRC Program Modernization Roadmap 2026</a:t>
             </a:r>
@@ -16439,9 +16439,9 @@
                 <a:solidFill>
                   <a:srgbClr val="718096"/>
                 </a:solidFill>
-                <a:latin typeface="Calibri" pitchFamily="34" charset="0"/>
-                <a:ea typeface="Calibri" pitchFamily="34" charset="-122"/>
-                <a:cs typeface="Calibri" pitchFamily="34" charset="-120"/>
+                <a:latin typeface="IBM Plex Mono" pitchFamily="34" charset="0"/>
+                <a:ea typeface="IBM Plex Mono" pitchFamily="34" charset="-122"/>
+                <a:cs typeface="IBM Plex Mono" pitchFamily="34" charset="-120"/>
               </a:rPr>
               <a:t>7</a:t>
             </a:r>
@@ -16525,9 +16525,9 @@
                 <a:solidFill>
                   <a:srgbClr val="2B6CB0"/>
                 </a:solidFill>
-                <a:latin typeface="Calibri" pitchFamily="34" charset="0"/>
-                <a:ea typeface="Calibri" pitchFamily="34" charset="-122"/>
-                <a:cs typeface="Calibri" pitchFamily="34" charset="-120"/>
+                <a:latin typeface="IBM Plex Mono" pitchFamily="34" charset="0"/>
+                <a:ea typeface="IBM Plex Mono" pitchFamily="34" charset="-122"/>
+                <a:cs typeface="IBM Plex Mono" pitchFamily="34" charset="-120"/>
               </a:rPr>
               <a:t>Tooling Consolidation</a:t>
             </a:r>
@@ -16567,9 +16567,9 @@
                 <a:solidFill>
                   <a:srgbClr val="2B6CB0"/>
                 </a:solidFill>
-                <a:latin typeface="Calibri" pitchFamily="34" charset="0"/>
-                <a:ea typeface="Calibri" pitchFamily="34" charset="-122"/>
-                <a:cs typeface="Calibri" pitchFamily="34" charset="-120"/>
+                <a:latin typeface="IBM Plex Mono" pitchFamily="34" charset="0"/>
+                <a:ea typeface="IBM Plex Mono" pitchFamily="34" charset="-122"/>
+                <a:cs typeface="IBM Plex Mono" pitchFamily="34" charset="-120"/>
               </a:rPr>
               <a:t>Current: </a:t>
             </a:r>
@@ -16584,9 +16584,9 @@
                 <a:solidFill>
                   <a:srgbClr val="4A5568"/>
                 </a:solidFill>
-                <a:latin typeface="Calibri" pitchFamily="34" charset="0"/>
-                <a:ea typeface="Calibri" pitchFamily="34" charset="-122"/>
-                <a:cs typeface="Calibri" pitchFamily="34" charset="-120"/>
+                <a:latin typeface="IBM Plex Mono" pitchFamily="34" charset="0"/>
+                <a:ea typeface="IBM Plex Mono" pitchFamily="34" charset="-122"/>
+                <a:cs typeface="IBM Plex Mono" pitchFamily="34" charset="-120"/>
               </a:rPr>
               <a:t>Onboard, Conveyor, Trust Center - fragmented</a:t>
             </a:r>
@@ -16604,9 +16604,9 @@
                 <a:solidFill>
                   <a:srgbClr val="2B6CB0"/>
                 </a:solidFill>
-                <a:latin typeface="Calibri" pitchFamily="34" charset="0"/>
-                <a:ea typeface="Calibri" pitchFamily="34" charset="-122"/>
-                <a:cs typeface="Calibri" pitchFamily="34" charset="-120"/>
+                <a:latin typeface="IBM Plex Mono" pitchFamily="34" charset="0"/>
+                <a:ea typeface="IBM Plex Mono" pitchFamily="34" charset="-122"/>
+                <a:cs typeface="IBM Plex Mono" pitchFamily="34" charset="-120"/>
               </a:rPr>
               <a:t>Target: </a:t>
             </a:r>
@@ -16621,9 +16621,9 @@
                 <a:solidFill>
                   <a:srgbClr val="4A5568"/>
                 </a:solidFill>
-                <a:latin typeface="Calibri" pitchFamily="34" charset="0"/>
-                <a:ea typeface="Calibri" pitchFamily="34" charset="-122"/>
-                <a:cs typeface="Calibri" pitchFamily="34" charset="-120"/>
+                <a:latin typeface="IBM Plex Mono" pitchFamily="34" charset="0"/>
+                <a:ea typeface="IBM Plex Mono" pitchFamily="34" charset="-122"/>
+                <a:cs typeface="IBM Plex Mono" pitchFamily="34" charset="-120"/>
               </a:rPr>
               <a:t>Single pane of glass for all trust activities</a:t>
             </a:r>
@@ -16641,9 +16641,9 @@
                 <a:solidFill>
                   <a:srgbClr val="2B6CB0"/>
                 </a:solidFill>
-                <a:latin typeface="Calibri" pitchFamily="34" charset="0"/>
-                <a:ea typeface="Calibri" pitchFamily="34" charset="-122"/>
-                <a:cs typeface="Calibri" pitchFamily="34" charset="-120"/>
+                <a:latin typeface="IBM Plex Mono" pitchFamily="34" charset="0"/>
+                <a:ea typeface="IBM Plex Mono" pitchFamily="34" charset="-122"/>
+                <a:cs typeface="IBM Plex Mono" pitchFamily="34" charset="-120"/>
               </a:rPr>
               <a:t>Action: </a:t>
             </a:r>
@@ -16658,9 +16658,9 @@
                 <a:solidFill>
                   <a:srgbClr val="4A5568"/>
                 </a:solidFill>
-                <a:latin typeface="Calibri" pitchFamily="34" charset="0"/>
-                <a:ea typeface="Calibri" pitchFamily="34" charset="-122"/>
-                <a:cs typeface="Calibri" pitchFamily="34" charset="-120"/>
+                <a:latin typeface="IBM Plex Mono" pitchFamily="34" charset="0"/>
+                <a:ea typeface="IBM Plex Mono" pitchFamily="34" charset="-122"/>
+                <a:cs typeface="IBM Plex Mono" pitchFamily="34" charset="-120"/>
               </a:rPr>
               <a:t>Evaluate consolidation (Vanta, Drata, SafeBase)</a:t>
             </a:r>
@@ -16678,9 +16678,9 @@
                 <a:solidFill>
                   <a:srgbClr val="2B6CB0"/>
                 </a:solidFill>
-                <a:latin typeface="Calibri" pitchFamily="34" charset="0"/>
-                <a:ea typeface="Calibri" pitchFamily="34" charset="-122"/>
-                <a:cs typeface="Calibri" pitchFamily="34" charset="-120"/>
+                <a:latin typeface="IBM Plex Mono" pitchFamily="34" charset="0"/>
+                <a:ea typeface="IBM Plex Mono" pitchFamily="34" charset="-122"/>
+                <a:cs typeface="IBM Plex Mono" pitchFamily="34" charset="-120"/>
               </a:rPr>
               <a:t>Action: </a:t>
             </a:r>
@@ -16695,9 +16695,9 @@
                 <a:solidFill>
                   <a:srgbClr val="4A5568"/>
                 </a:solidFill>
-                <a:latin typeface="Calibri" pitchFamily="34" charset="0"/>
-                <a:ea typeface="Calibri" pitchFamily="34" charset="-122"/>
-                <a:cs typeface="Calibri" pitchFamily="34" charset="-120"/>
+                <a:latin typeface="IBM Plex Mono" pitchFamily="34" charset="0"/>
+                <a:ea typeface="IBM Plex Mono" pitchFamily="34" charset="-122"/>
+                <a:cs typeface="IBM Plex Mono" pitchFamily="34" charset="-120"/>
               </a:rPr>
               <a:t>Centralize artifacts in one customer portal</a:t>
             </a:r>
@@ -16715,9 +16715,9 @@
                 <a:solidFill>
                   <a:srgbClr val="2B6CB0"/>
                 </a:solidFill>
-                <a:latin typeface="Calibri" pitchFamily="34" charset="0"/>
-                <a:ea typeface="Calibri" pitchFamily="34" charset="-122"/>
-                <a:cs typeface="Calibri" pitchFamily="34" charset="-120"/>
+                <a:latin typeface="IBM Plex Mono" pitchFamily="34" charset="0"/>
+                <a:ea typeface="IBM Plex Mono" pitchFamily="34" charset="-122"/>
+                <a:cs typeface="IBM Plex Mono" pitchFamily="34" charset="-120"/>
               </a:rPr>
               <a:t>Metric: </a:t>
             </a:r>
@@ -16732,9 +16732,9 @@
                 <a:solidFill>
                   <a:srgbClr val="4A5568"/>
                 </a:solidFill>
-                <a:latin typeface="Calibri" pitchFamily="34" charset="0"/>
-                <a:ea typeface="Calibri" pitchFamily="34" charset="-122"/>
-                <a:cs typeface="Calibri" pitchFamily="34" charset="-120"/>
+                <a:latin typeface="IBM Plex Mono" pitchFamily="34" charset="0"/>
+                <a:ea typeface="IBM Plex Mono" pitchFamily="34" charset="-122"/>
+                <a:cs typeface="IBM Plex Mono" pitchFamily="34" charset="-120"/>
               </a:rPr>
               <a:t>Reduce tools from 3+ to 1-2 platforms</a:t>
             </a:r>
@@ -16818,9 +16818,9 @@
                 <a:solidFill>
                   <a:srgbClr val="0E7C86"/>
                 </a:solidFill>
-                <a:latin typeface="Calibri" pitchFamily="34" charset="0"/>
-                <a:ea typeface="Calibri" pitchFamily="34" charset="-122"/>
-                <a:cs typeface="Calibri" pitchFamily="34" charset="-120"/>
+                <a:latin typeface="IBM Plex Mono" pitchFamily="34" charset="0"/>
+                <a:ea typeface="IBM Plex Mono" pitchFamily="34" charset="-122"/>
+                <a:cs typeface="IBM Plex Mono" pitchFamily="34" charset="-120"/>
               </a:rPr>
               <a:t>Revenue Dashboard</a:t>
             </a:r>
@@ -16860,9 +16860,9 @@
                 <a:solidFill>
                   <a:srgbClr val="0E7C86"/>
                 </a:solidFill>
-                <a:latin typeface="Calibri" pitchFamily="34" charset="0"/>
-                <a:ea typeface="Calibri" pitchFamily="34" charset="-122"/>
-                <a:cs typeface="Calibri" pitchFamily="34" charset="-120"/>
+                <a:latin typeface="IBM Plex Mono" pitchFamily="34" charset="0"/>
+                <a:ea typeface="IBM Plex Mono" pitchFamily="34" charset="-122"/>
+                <a:cs typeface="IBM Plex Mono" pitchFamily="34" charset="-120"/>
               </a:rPr>
               <a:t>Current: </a:t>
             </a:r>
@@ -16877,9 +16877,9 @@
                 <a:solidFill>
                   <a:srgbClr val="4A5568"/>
                 </a:solidFill>
-                <a:latin typeface="Calibri" pitchFamily="34" charset="0"/>
-                <a:ea typeface="Calibri" pitchFamily="34" charset="-122"/>
-                <a:cs typeface="Calibri" pitchFamily="34" charset="-120"/>
+                <a:latin typeface="IBM Plex Mono" pitchFamily="34" charset="0"/>
+                <a:ea typeface="IBM Plex Mono" pitchFamily="34" charset="-122"/>
+                <a:cs typeface="IBM Plex Mono" pitchFamily="34" charset="-120"/>
               </a:rPr>
               <a:t>Deal numbers in Jira, no revenue impact</a:t>
             </a:r>
@@ -16897,9 +16897,9 @@
                 <a:solidFill>
                   <a:srgbClr val="0E7C86"/>
                 </a:solidFill>
-                <a:latin typeface="Calibri" pitchFamily="34" charset="0"/>
-                <a:ea typeface="Calibri" pitchFamily="34" charset="-122"/>
-                <a:cs typeface="Calibri" pitchFamily="34" charset="-120"/>
+                <a:latin typeface="IBM Plex Mono" pitchFamily="34" charset="0"/>
+                <a:ea typeface="IBM Plex Mono" pitchFamily="34" charset="-122"/>
+                <a:cs typeface="IBM Plex Mono" pitchFamily="34" charset="-120"/>
               </a:rPr>
               <a:t>Target: </a:t>
             </a:r>
@@ -16914,9 +16914,9 @@
                 <a:solidFill>
                   <a:srgbClr val="4A5568"/>
                 </a:solidFill>
-                <a:latin typeface="Calibri" pitchFamily="34" charset="0"/>
-                <a:ea typeface="Calibri" pitchFamily="34" charset="-122"/>
-                <a:cs typeface="Calibri" pitchFamily="34" charset="-120"/>
+                <a:latin typeface="IBM Plex Mono" pitchFamily="34" charset="0"/>
+                <a:ea typeface="IBM Plex Mono" pitchFamily="34" charset="-122"/>
+                <a:cs typeface="IBM Plex Mono" pitchFamily="34" charset="-120"/>
               </a:rPr>
               <a:t>Real-time dashboard linking to deal value</a:t>
             </a:r>
@@ -16934,9 +16934,9 @@
                 <a:solidFill>
                   <a:srgbClr val="0E7C86"/>
                 </a:solidFill>
-                <a:latin typeface="Calibri" pitchFamily="34" charset="0"/>
-                <a:ea typeface="Calibri" pitchFamily="34" charset="-122"/>
-                <a:cs typeface="Calibri" pitchFamily="34" charset="-120"/>
+                <a:latin typeface="IBM Plex Mono" pitchFamily="34" charset="0"/>
+                <a:ea typeface="IBM Plex Mono" pitchFamily="34" charset="-122"/>
+                <a:cs typeface="IBM Plex Mono" pitchFamily="34" charset="-120"/>
               </a:rPr>
               <a:t>Action: </a:t>
             </a:r>
@@ -16951,9 +16951,9 @@
                 <a:solidFill>
                   <a:srgbClr val="4A5568"/>
                 </a:solidFill>
-                <a:latin typeface="Calibri" pitchFamily="34" charset="0"/>
-                <a:ea typeface="Calibri" pitchFamily="34" charset="-122"/>
-                <a:cs typeface="Calibri" pitchFamily="34" charset="-120"/>
+                <a:latin typeface="IBM Plex Mono" pitchFamily="34" charset="0"/>
+                <a:ea typeface="IBM Plex Mono" pitchFamily="34" charset="-122"/>
+                <a:cs typeface="IBM Plex Mono" pitchFamily="34" charset="-120"/>
               </a:rPr>
               <a:t>Integrate Jira with CRM for attribution</a:t>
             </a:r>
@@ -16971,9 +16971,9 @@
                 <a:solidFill>
                   <a:srgbClr val="0E7C86"/>
                 </a:solidFill>
-                <a:latin typeface="Calibri" pitchFamily="34" charset="0"/>
-                <a:ea typeface="Calibri" pitchFamily="34" charset="-122"/>
-                <a:cs typeface="Calibri" pitchFamily="34" charset="-120"/>
+                <a:latin typeface="IBM Plex Mono" pitchFamily="34" charset="0"/>
+                <a:ea typeface="IBM Plex Mono" pitchFamily="34" charset="-122"/>
+                <a:cs typeface="IBM Plex Mono" pitchFamily="34" charset="-120"/>
               </a:rPr>
               <a:t>Action: </a:t>
             </a:r>
@@ -16988,9 +16988,9 @@
                 <a:solidFill>
                   <a:srgbClr val="4A5568"/>
                 </a:solidFill>
-                <a:latin typeface="Calibri" pitchFamily="34" charset="0"/>
-                <a:ea typeface="Calibri" pitchFamily="34" charset="-122"/>
-                <a:cs typeface="Calibri" pitchFamily="34" charset="-120"/>
+                <a:latin typeface="IBM Plex Mono" pitchFamily="34" charset="0"/>
+                <a:ea typeface="IBM Plex Mono" pitchFamily="34" charset="-122"/>
+                <a:cs typeface="IBM Plex Mono" pitchFamily="34" charset="-120"/>
               </a:rPr>
               <a:t>Track TAT, SLA, deal-stage correlation</a:t>
             </a:r>
@@ -17008,9 +17008,9 @@
                 <a:solidFill>
                   <a:srgbClr val="0E7C86"/>
                 </a:solidFill>
-                <a:latin typeface="Calibri" pitchFamily="34" charset="0"/>
-                <a:ea typeface="Calibri" pitchFamily="34" charset="-122"/>
-                <a:cs typeface="Calibri" pitchFamily="34" charset="-120"/>
+                <a:latin typeface="IBM Plex Mono" pitchFamily="34" charset="0"/>
+                <a:ea typeface="IBM Plex Mono" pitchFamily="34" charset="-122"/>
+                <a:cs typeface="IBM Plex Mono" pitchFamily="34" charset="-120"/>
               </a:rPr>
               <a:t>Metric: </a:t>
             </a:r>
@@ -17025,9 +17025,9 @@
                 <a:solidFill>
                   <a:srgbClr val="4A5568"/>
                 </a:solidFill>
-                <a:latin typeface="Calibri" pitchFamily="34" charset="0"/>
-                <a:ea typeface="Calibri" pitchFamily="34" charset="-122"/>
-                <a:cs typeface="Calibri" pitchFamily="34" charset="-120"/>
+                <a:latin typeface="IBM Plex Mono" pitchFamily="34" charset="0"/>
+                <a:ea typeface="IBM Plex Mono" pitchFamily="34" charset="-122"/>
+                <a:cs typeface="IBM Plex Mono" pitchFamily="34" charset="-120"/>
               </a:rPr>
               <a:t>Demonstrate revenue enablement value</a:t>
             </a:r>
@@ -17111,9 +17111,9 @@
                 <a:solidFill>
                   <a:srgbClr val="4C51BF"/>
                 </a:solidFill>
-                <a:latin typeface="Calibri" pitchFamily="34" charset="0"/>
-                <a:ea typeface="Calibri" pitchFamily="34" charset="-122"/>
-                <a:cs typeface="Calibri" pitchFamily="34" charset="-120"/>
+                <a:latin typeface="IBM Plex Mono" pitchFamily="34" charset="0"/>
+                <a:ea typeface="IBM Plex Mono" pitchFamily="34" charset="-122"/>
+                <a:cs typeface="IBM Plex Mono" pitchFamily="34" charset="-120"/>
               </a:rPr>
               <a:t>Knowledge Base</a:t>
             </a:r>
@@ -17153,9 +17153,9 @@
                 <a:solidFill>
                   <a:srgbClr val="4C51BF"/>
                 </a:solidFill>
-                <a:latin typeface="Calibri" pitchFamily="34" charset="0"/>
-                <a:ea typeface="Calibri" pitchFamily="34" charset="-122"/>
-                <a:cs typeface="Calibri" pitchFamily="34" charset="-120"/>
+                <a:latin typeface="IBM Plex Mono" pitchFamily="34" charset="0"/>
+                <a:ea typeface="IBM Plex Mono" pitchFamily="34" charset="-122"/>
+                <a:cs typeface="IBM Plex Mono" pitchFamily="34" charset="-120"/>
               </a:rPr>
               <a:t>Current: </a:t>
             </a:r>
@@ -17170,9 +17170,9 @@
                 <a:solidFill>
                   <a:srgbClr val="4A5568"/>
                 </a:solidFill>
-                <a:latin typeface="Calibri" pitchFamily="34" charset="0"/>
-                <a:ea typeface="Calibri" pitchFamily="34" charset="-122"/>
-                <a:cs typeface="Calibri" pitchFamily="34" charset="-120"/>
+                <a:latin typeface="IBM Plex Mono" pitchFamily="34" charset="0"/>
+                <a:ea typeface="IBM Plex Mono" pitchFamily="34" charset="-122"/>
+                <a:cs typeface="IBM Plex Mono" pitchFamily="34" charset="-120"/>
               </a:rPr>
               <a:t>Ad-hoc responses, no standard library</a:t>
             </a:r>
@@ -17190,9 +17190,9 @@
                 <a:solidFill>
                   <a:srgbClr val="4C51BF"/>
                 </a:solidFill>
-                <a:latin typeface="Calibri" pitchFamily="34" charset="0"/>
-                <a:ea typeface="Calibri" pitchFamily="34" charset="-122"/>
-                <a:cs typeface="Calibri" pitchFamily="34" charset="-120"/>
+                <a:latin typeface="IBM Plex Mono" pitchFamily="34" charset="0"/>
+                <a:ea typeface="IBM Plex Mono" pitchFamily="34" charset="-122"/>
+                <a:cs typeface="IBM Plex Mono" pitchFamily="34" charset="-120"/>
               </a:rPr>
               <a:t>Target: </a:t>
             </a:r>
@@ -17207,9 +17207,9 @@
                 <a:solidFill>
                   <a:srgbClr val="4A5568"/>
                 </a:solidFill>
-                <a:latin typeface="Calibri" pitchFamily="34" charset="0"/>
-                <a:ea typeface="Calibri" pitchFamily="34" charset="-122"/>
-                <a:cs typeface="Calibri" pitchFamily="34" charset="-120"/>
+                <a:latin typeface="IBM Plex Mono" pitchFamily="34" charset="0"/>
+                <a:ea typeface="IBM Plex Mono" pitchFamily="34" charset="-122"/>
+                <a:cs typeface="IBM Plex Mono" pitchFamily="34" charset="-120"/>
               </a:rPr>
               <a:t>200+ legal-approved response library</a:t>
             </a:r>
@@ -17227,9 +17227,9 @@
                 <a:solidFill>
                   <a:srgbClr val="4C51BF"/>
                 </a:solidFill>
-                <a:latin typeface="Calibri" pitchFamily="34" charset="0"/>
-                <a:ea typeface="Calibri" pitchFamily="34" charset="-122"/>
-                <a:cs typeface="Calibri" pitchFamily="34" charset="-120"/>
+                <a:latin typeface="IBM Plex Mono" pitchFamily="34" charset="0"/>
+                <a:ea typeface="IBM Plex Mono" pitchFamily="34" charset="-122"/>
+                <a:cs typeface="IBM Plex Mono" pitchFamily="34" charset="-120"/>
               </a:rPr>
               <a:t>Action: </a:t>
             </a:r>
@@ -17244,9 +17244,9 @@
                 <a:solidFill>
                   <a:srgbClr val="4A5568"/>
                 </a:solidFill>
-                <a:latin typeface="Calibri" pitchFamily="34" charset="0"/>
-                <a:ea typeface="Calibri" pitchFamily="34" charset="-122"/>
-                <a:cs typeface="Calibri" pitchFamily="34" charset="-120"/>
+                <a:latin typeface="IBM Plex Mono" pitchFamily="34" charset="0"/>
+                <a:ea typeface="IBM Plex Mono" pitchFamily="34" charset="-122"/>
+                <a:cs typeface="IBM Plex Mono" pitchFamily="34" charset="-120"/>
               </a:rPr>
               <a:t>Catalog top recurring questions</a:t>
             </a:r>
@@ -17264,9 +17264,9 @@
                 <a:solidFill>
                   <a:srgbClr val="4C51BF"/>
                 </a:solidFill>
-                <a:latin typeface="Calibri" pitchFamily="34" charset="0"/>
-                <a:ea typeface="Calibri" pitchFamily="34" charset="-122"/>
-                <a:cs typeface="Calibri" pitchFamily="34" charset="-120"/>
+                <a:latin typeface="IBM Plex Mono" pitchFamily="34" charset="0"/>
+                <a:ea typeface="IBM Plex Mono" pitchFamily="34" charset="-122"/>
+                <a:cs typeface="IBM Plex Mono" pitchFamily="34" charset="-120"/>
               </a:rPr>
               <a:t>Action: </a:t>
             </a:r>
@@ -17281,9 +17281,9 @@
                 <a:solidFill>
                   <a:srgbClr val="4A5568"/>
                 </a:solidFill>
-                <a:latin typeface="Calibri" pitchFamily="34" charset="0"/>
-                <a:ea typeface="Calibri" pitchFamily="34" charset="-122"/>
-                <a:cs typeface="Calibri" pitchFamily="34" charset="-120"/>
+                <a:latin typeface="IBM Plex Mono" pitchFamily="34" charset="0"/>
+                <a:ea typeface="IBM Plex Mono" pitchFamily="34" charset="-122"/>
+                <a:cs typeface="IBM Plex Mono" pitchFamily="34" charset="-120"/>
               </a:rPr>
               <a:t>Implement AI-assisted completion</a:t>
             </a:r>
@@ -17301,9 +17301,9 @@
                 <a:solidFill>
                   <a:srgbClr val="4C51BF"/>
                 </a:solidFill>
-                <a:latin typeface="Calibri" pitchFamily="34" charset="0"/>
-                <a:ea typeface="Calibri" pitchFamily="34" charset="-122"/>
-                <a:cs typeface="Calibri" pitchFamily="34" charset="-120"/>
+                <a:latin typeface="IBM Plex Mono" pitchFamily="34" charset="0"/>
+                <a:ea typeface="IBM Plex Mono" pitchFamily="34" charset="-122"/>
+                <a:cs typeface="IBM Plex Mono" pitchFamily="34" charset="-120"/>
               </a:rPr>
               <a:t>Metric: </a:t>
             </a:r>
@@ -17318,9 +17318,9 @@
                 <a:solidFill>
                   <a:srgbClr val="4A5568"/>
                 </a:solidFill>
-                <a:latin typeface="Calibri" pitchFamily="34" charset="0"/>
-                <a:ea typeface="Calibri" pitchFamily="34" charset="-122"/>
-                <a:cs typeface="Calibri" pitchFamily="34" charset="-120"/>
+                <a:latin typeface="IBM Plex Mono" pitchFamily="34" charset="0"/>
+                <a:ea typeface="IBM Plex Mono" pitchFamily="34" charset="-122"/>
+                <a:cs typeface="IBM Plex Mono" pitchFamily="34" charset="-120"/>
               </a:rPr>
               <a:t>60% reduction in turnaround time</a:t>
             </a:r>
@@ -17384,9 +17384,9 @@
                 <a:solidFill>
                   <a:srgbClr val="0E7C86"/>
                 </a:solidFill>
-                <a:latin typeface="Georgia" pitchFamily="34" charset="0"/>
-                <a:ea typeface="Georgia" pitchFamily="34" charset="-122"/>
-                <a:cs typeface="Georgia" pitchFamily="34" charset="-120"/>
+                <a:latin typeface="IBM Plex Mono" pitchFamily="34" charset="0"/>
+                <a:ea typeface="IBM Plex Mono" pitchFamily="34" charset="-122"/>
+                <a:cs typeface="IBM Plex Mono" pitchFamily="34" charset="-120"/>
               </a:rPr>
               <a:t>60%</a:t>
             </a:r>
@@ -17423,9 +17423,9 @@
                 <a:solidFill>
                   <a:srgbClr val="718096"/>
                 </a:solidFill>
-                <a:latin typeface="Calibri" pitchFamily="34" charset="0"/>
-                <a:ea typeface="Calibri" pitchFamily="34" charset="-122"/>
-                <a:cs typeface="Calibri" pitchFamily="34" charset="-120"/>
+                <a:latin typeface="IBM Plex Mono" pitchFamily="34" charset="0"/>
+                <a:ea typeface="IBM Plex Mono" pitchFamily="34" charset="-122"/>
+                <a:cs typeface="IBM Plex Mono" pitchFamily="34" charset="-120"/>
               </a:rPr>
               <a:t>TAT</a:t>
             </a:r>
@@ -17440,9 +17440,9 @@
                 <a:solidFill>
                   <a:srgbClr val="718096"/>
                 </a:solidFill>
-                <a:latin typeface="Calibri" pitchFamily="34" charset="0"/>
-                <a:ea typeface="Calibri" pitchFamily="34" charset="-122"/>
-                <a:cs typeface="Calibri" pitchFamily="34" charset="-120"/>
+                <a:latin typeface="IBM Plex Mono" pitchFamily="34" charset="0"/>
+                <a:ea typeface="IBM Plex Mono" pitchFamily="34" charset="-122"/>
+                <a:cs typeface="IBM Plex Mono" pitchFamily="34" charset="-120"/>
               </a:rPr>
               <a:t>Reduction</a:t>
             </a:r>
@@ -17479,9 +17479,9 @@
                 <a:solidFill>
                   <a:srgbClr val="2B6CB0"/>
                 </a:solidFill>
-                <a:latin typeface="Georgia" pitchFamily="34" charset="0"/>
-                <a:ea typeface="Georgia" pitchFamily="34" charset="-122"/>
-                <a:cs typeface="Georgia" pitchFamily="34" charset="-120"/>
+                <a:latin typeface="IBM Plex Mono" pitchFamily="34" charset="0"/>
+                <a:ea typeface="IBM Plex Mono" pitchFamily="34" charset="-122"/>
+                <a:cs typeface="IBM Plex Mono" pitchFamily="34" charset="-120"/>
               </a:rPr>
               <a:t>$TBD</a:t>
             </a:r>
@@ -17518,9 +17518,9 @@
                 <a:solidFill>
                   <a:srgbClr val="718096"/>
                 </a:solidFill>
-                <a:latin typeface="Calibri" pitchFamily="34" charset="0"/>
-                <a:ea typeface="Calibri" pitchFamily="34" charset="-122"/>
-                <a:cs typeface="Calibri" pitchFamily="34" charset="-120"/>
+                <a:latin typeface="IBM Plex Mono" pitchFamily="34" charset="0"/>
+                <a:ea typeface="IBM Plex Mono" pitchFamily="34" charset="-122"/>
+                <a:cs typeface="IBM Plex Mono" pitchFamily="34" charset="-120"/>
               </a:rPr>
               <a:t>Revenue</a:t>
             </a:r>
@@ -17535,9 +17535,9 @@
                 <a:solidFill>
                   <a:srgbClr val="718096"/>
                 </a:solidFill>
-                <a:latin typeface="Calibri" pitchFamily="34" charset="0"/>
-                <a:ea typeface="Calibri" pitchFamily="34" charset="-122"/>
-                <a:cs typeface="Calibri" pitchFamily="34" charset="-120"/>
+                <a:latin typeface="IBM Plex Mono" pitchFamily="34" charset="0"/>
+                <a:ea typeface="IBM Plex Mono" pitchFamily="34" charset="-122"/>
+                <a:cs typeface="IBM Plex Mono" pitchFamily="34" charset="-120"/>
               </a:rPr>
               <a:t>Enabled/Qtr</a:t>
             </a:r>
@@ -17574,9 +17574,9 @@
                 <a:solidFill>
                   <a:srgbClr val="4C51BF"/>
                 </a:solidFill>
-                <a:latin typeface="Georgia" pitchFamily="34" charset="0"/>
-                <a:ea typeface="Georgia" pitchFamily="34" charset="-122"/>
-                <a:cs typeface="Georgia" pitchFamily="34" charset="-120"/>
+                <a:latin typeface="IBM Plex Mono" pitchFamily="34" charset="0"/>
+                <a:ea typeface="IBM Plex Mono" pitchFamily="34" charset="-122"/>
+                <a:cs typeface="IBM Plex Mono" pitchFamily="34" charset="-120"/>
               </a:rPr>
               <a:t>95%</a:t>
             </a:r>
@@ -17613,9 +17613,9 @@
                 <a:solidFill>
                   <a:srgbClr val="718096"/>
                 </a:solidFill>
-                <a:latin typeface="Calibri" pitchFamily="34" charset="0"/>
-                <a:ea typeface="Calibri" pitchFamily="34" charset="-122"/>
-                <a:cs typeface="Calibri" pitchFamily="34" charset="-120"/>
+                <a:latin typeface="IBM Plex Mono" pitchFamily="34" charset="0"/>
+                <a:ea typeface="IBM Plex Mono" pitchFamily="34" charset="-122"/>
+                <a:cs typeface="IBM Plex Mono" pitchFamily="34" charset="-120"/>
               </a:rPr>
               <a:t>SLA</a:t>
             </a:r>
@@ -17630,9 +17630,9 @@
                 <a:solidFill>
                   <a:srgbClr val="718096"/>
                 </a:solidFill>
-                <a:latin typeface="Calibri" pitchFamily="34" charset="0"/>
-                <a:ea typeface="Calibri" pitchFamily="34" charset="-122"/>
-                <a:cs typeface="Calibri" pitchFamily="34" charset="-120"/>
+                <a:latin typeface="IBM Plex Mono" pitchFamily="34" charset="0"/>
+                <a:ea typeface="IBM Plex Mono" pitchFamily="34" charset="-122"/>
+                <a:cs typeface="IBM Plex Mono" pitchFamily="34" charset="-120"/>
               </a:rPr>
               <a:t>Compliance</a:t>
             </a:r>
@@ -17669,9 +17669,9 @@
                 <a:solidFill>
                   <a:srgbClr val="276749"/>
                 </a:solidFill>
-                <a:latin typeface="Georgia" pitchFamily="34" charset="0"/>
-                <a:ea typeface="Georgia" pitchFamily="34" charset="-122"/>
-                <a:cs typeface="Georgia" pitchFamily="34" charset="-120"/>
+                <a:latin typeface="IBM Plex Mono" pitchFamily="34" charset="0"/>
+                <a:ea typeface="IBM Plex Mono" pitchFamily="34" charset="-122"/>
+                <a:cs typeface="IBM Plex Mono" pitchFamily="34" charset="-120"/>
               </a:rPr>
               <a:t>1-2</a:t>
             </a:r>
@@ -17708,9 +17708,9 @@
                 <a:solidFill>
                   <a:srgbClr val="718096"/>
                 </a:solidFill>
-                <a:latin typeface="Calibri" pitchFamily="34" charset="0"/>
-                <a:ea typeface="Calibri" pitchFamily="34" charset="-122"/>
-                <a:cs typeface="Calibri" pitchFamily="34" charset="-120"/>
+                <a:latin typeface="IBM Plex Mono" pitchFamily="34" charset="0"/>
+                <a:ea typeface="IBM Plex Mono" pitchFamily="34" charset="-122"/>
+                <a:cs typeface="IBM Plex Mono" pitchFamily="34" charset="-120"/>
               </a:rPr>
               <a:t>Consolidated</a:t>
             </a:r>
@@ -17725,9 +17725,9 @@
                 <a:solidFill>
                   <a:srgbClr val="718096"/>
                 </a:solidFill>
-                <a:latin typeface="Calibri" pitchFamily="34" charset="0"/>
-                <a:ea typeface="Calibri" pitchFamily="34" charset="-122"/>
-                <a:cs typeface="Calibri" pitchFamily="34" charset="-120"/>
+                <a:latin typeface="IBM Plex Mono" pitchFamily="34" charset="0"/>
+                <a:ea typeface="IBM Plex Mono" pitchFamily="34" charset="-122"/>
+                <a:cs typeface="IBM Plex Mono" pitchFamily="34" charset="-120"/>
               </a:rPr>
               <a:t>Platforms</a:t>
             </a:r>
@@ -17764,9 +17764,9 @@
                 <a:solidFill>
                   <a:srgbClr val="553C9A"/>
                 </a:solidFill>
-                <a:latin typeface="Georgia" pitchFamily="34" charset="0"/>
-                <a:ea typeface="Georgia" pitchFamily="34" charset="-122"/>
-                <a:cs typeface="Georgia" pitchFamily="34" charset="-120"/>
+                <a:latin typeface="IBM Plex Mono" pitchFamily="34" charset="0"/>
+                <a:ea typeface="IBM Plex Mono" pitchFamily="34" charset="-122"/>
+                <a:cs typeface="IBM Plex Mono" pitchFamily="34" charset="-120"/>
               </a:rPr>
               <a:t>200+</a:t>
             </a:r>
@@ -17803,9 +17803,9 @@
                 <a:solidFill>
                   <a:srgbClr val="718096"/>
                 </a:solidFill>
-                <a:latin typeface="Calibri" pitchFamily="34" charset="0"/>
-                <a:ea typeface="Calibri" pitchFamily="34" charset="-122"/>
-                <a:cs typeface="Calibri" pitchFamily="34" charset="-120"/>
+                <a:latin typeface="IBM Plex Mono" pitchFamily="34" charset="0"/>
+                <a:ea typeface="IBM Plex Mono" pitchFamily="34" charset="-122"/>
+                <a:cs typeface="IBM Plex Mono" pitchFamily="34" charset="-120"/>
               </a:rPr>
               <a:t>Standardized</a:t>
             </a:r>
@@ -17820,9 +17820,9 @@
                 <a:solidFill>
                   <a:srgbClr val="718096"/>
                 </a:solidFill>
-                <a:latin typeface="Calibri" pitchFamily="34" charset="0"/>
-                <a:ea typeface="Calibri" pitchFamily="34" charset="-122"/>
-                <a:cs typeface="Calibri" pitchFamily="34" charset="-120"/>
+                <a:latin typeface="IBM Plex Mono" pitchFamily="34" charset="0"/>
+                <a:ea typeface="IBM Plex Mono" pitchFamily="34" charset="-122"/>
+                <a:cs typeface="IBM Plex Mono" pitchFamily="34" charset="-120"/>
               </a:rPr>
               <a:t>Responses</a:t>
             </a:r>
@@ -17891,9 +17891,9 @@
                 <a:solidFill>
                   <a:srgbClr val="1A1D23"/>
                 </a:solidFill>
-                <a:latin typeface="Georgia" pitchFamily="34" charset="0"/>
-                <a:ea typeface="Georgia" pitchFamily="34" charset="-122"/>
-                <a:cs typeface="Georgia" pitchFamily="34" charset="-120"/>
+                <a:latin typeface="IBM Plex Mono" pitchFamily="34" charset="0"/>
+                <a:ea typeface="IBM Plex Mono" pitchFamily="34" charset="-122"/>
+                <a:cs typeface="IBM Plex Mono" pitchFamily="34" charset="-120"/>
               </a:rPr>
               <a:t>GRC-as-Code &amp; Engineering Integration</a:t>
             </a:r>
@@ -17953,9 +17953,9 @@
                 <a:solidFill>
                   <a:srgbClr val="718096"/>
                 </a:solidFill>
-                <a:latin typeface="Calibri" pitchFamily="34" charset="0"/>
-                <a:ea typeface="Calibri" pitchFamily="34" charset="-122"/>
-                <a:cs typeface="Calibri" pitchFamily="34" charset="-120"/>
+                <a:latin typeface="IBM Plex Mono" pitchFamily="34" charset="0"/>
+                <a:ea typeface="IBM Plex Mono" pitchFamily="34" charset="-122"/>
+                <a:cs typeface="IBM Plex Mono" pitchFamily="34" charset="-120"/>
               </a:rPr>
               <a:t>CONFIDENTIAL  |  GRC Program Modernization Roadmap 2026</a:t>
             </a:r>
@@ -17992,9 +17992,9 @@
                 <a:solidFill>
                   <a:srgbClr val="718096"/>
                 </a:solidFill>
-                <a:latin typeface="Calibri" pitchFamily="34" charset="0"/>
-                <a:ea typeface="Calibri" pitchFamily="34" charset="-122"/>
-                <a:cs typeface="Calibri" pitchFamily="34" charset="-120"/>
+                <a:latin typeface="IBM Plex Mono" pitchFamily="34" charset="0"/>
+                <a:ea typeface="IBM Plex Mono" pitchFamily="34" charset="-122"/>
+                <a:cs typeface="IBM Plex Mono" pitchFamily="34" charset="-120"/>
               </a:rPr>
               <a:t>8</a:t>
             </a:r>
@@ -18058,9 +18058,9 @@
                 <a:solidFill>
                   <a:srgbClr val="4C51BF"/>
                 </a:solidFill>
-                <a:latin typeface="Calibri" pitchFamily="34" charset="0"/>
-                <a:ea typeface="Calibri" pitchFamily="34" charset="-122"/>
-                <a:cs typeface="Calibri" pitchFamily="34" charset="-120"/>
+                <a:latin typeface="IBM Plex Mono" pitchFamily="34" charset="0"/>
+                <a:ea typeface="IBM Plex Mono" pitchFamily="34" charset="-122"/>
+                <a:cs typeface="IBM Plex Mono" pitchFamily="34" charset="-120"/>
               </a:rPr>
               <a:t>Policy-as-Code in CI/CD Pipeline</a:t>
             </a:r>
@@ -18117,9 +18117,9 @@
                 <a:solidFill>
                   <a:srgbClr val="FFFFFF"/>
                 </a:solidFill>
-                <a:latin typeface="Calibri" pitchFamily="34" charset="0"/>
-                <a:ea typeface="Calibri" pitchFamily="34" charset="-122"/>
-                <a:cs typeface="Calibri" pitchFamily="34" charset="-120"/>
+                <a:latin typeface="IBM Plex Mono" pitchFamily="34" charset="0"/>
+                <a:ea typeface="IBM Plex Mono" pitchFamily="34" charset="-122"/>
+                <a:cs typeface="IBM Plex Mono" pitchFamily="34" charset="-120"/>
               </a:rPr>
               <a:t>Code</a:t>
             </a:r>
@@ -18134,9 +18134,9 @@
                 <a:solidFill>
                   <a:srgbClr val="FFFFFF"/>
                 </a:solidFill>
-                <a:latin typeface="Calibri" pitchFamily="34" charset="0"/>
-                <a:ea typeface="Calibri" pitchFamily="34" charset="-122"/>
-                <a:cs typeface="Calibri" pitchFamily="34" charset="-120"/>
+                <a:latin typeface="IBM Plex Mono" pitchFamily="34" charset="0"/>
+                <a:ea typeface="IBM Plex Mono" pitchFamily="34" charset="-122"/>
+                <a:cs typeface="IBM Plex Mono" pitchFamily="34" charset="-120"/>
               </a:rPr>
               <a:t>Commit</a:t>
             </a:r>
@@ -18229,9 +18229,9 @@
                 <a:solidFill>
                   <a:srgbClr val="FFFFFF"/>
                 </a:solidFill>
-                <a:latin typeface="Calibri" pitchFamily="34" charset="0"/>
-                <a:ea typeface="Calibri" pitchFamily="34" charset="-122"/>
-                <a:cs typeface="Calibri" pitchFamily="34" charset="-120"/>
+                <a:latin typeface="IBM Plex Mono" pitchFamily="34" charset="0"/>
+                <a:ea typeface="IBM Plex Mono" pitchFamily="34" charset="-122"/>
+                <a:cs typeface="IBM Plex Mono" pitchFamily="34" charset="-120"/>
               </a:rPr>
               <a:t>Policy</a:t>
             </a:r>
@@ -18246,9 +18246,9 @@
                 <a:solidFill>
                   <a:srgbClr val="FFFFFF"/>
                 </a:solidFill>
-                <a:latin typeface="Calibri" pitchFamily="34" charset="0"/>
-                <a:ea typeface="Calibri" pitchFamily="34" charset="-122"/>
-                <a:cs typeface="Calibri" pitchFamily="34" charset="-120"/>
+                <a:latin typeface="IBM Plex Mono" pitchFamily="34" charset="0"/>
+                <a:ea typeface="IBM Plex Mono" pitchFamily="34" charset="-122"/>
+                <a:cs typeface="IBM Plex Mono" pitchFamily="34" charset="-120"/>
               </a:rPr>
               <a:t>Check</a:t>
             </a:r>
@@ -18341,9 +18341,9 @@
                 <a:solidFill>
                   <a:srgbClr val="FFFFFF"/>
                 </a:solidFill>
-                <a:latin typeface="Calibri" pitchFamily="34" charset="0"/>
-                <a:ea typeface="Calibri" pitchFamily="34" charset="-122"/>
-                <a:cs typeface="Calibri" pitchFamily="34" charset="-120"/>
+                <a:latin typeface="IBM Plex Mono" pitchFamily="34" charset="0"/>
+                <a:ea typeface="IBM Plex Mono" pitchFamily="34" charset="-122"/>
+                <a:cs typeface="IBM Plex Mono" pitchFamily="34" charset="-120"/>
               </a:rPr>
               <a:t>Security</a:t>
             </a:r>
@@ -18358,9 +18358,9 @@
                 <a:solidFill>
                   <a:srgbClr val="FFFFFF"/>
                 </a:solidFill>
-                <a:latin typeface="Calibri" pitchFamily="34" charset="0"/>
-                <a:ea typeface="Calibri" pitchFamily="34" charset="-122"/>
-                <a:cs typeface="Calibri" pitchFamily="34" charset="-120"/>
+                <a:latin typeface="IBM Plex Mono" pitchFamily="34" charset="0"/>
+                <a:ea typeface="IBM Plex Mono" pitchFamily="34" charset="-122"/>
+                <a:cs typeface="IBM Plex Mono" pitchFamily="34" charset="-120"/>
               </a:rPr>
               <a:t>Scan</a:t>
             </a:r>
@@ -18453,9 +18453,9 @@
                 <a:solidFill>
                   <a:srgbClr val="FFFFFF"/>
                 </a:solidFill>
-                <a:latin typeface="Calibri" pitchFamily="34" charset="0"/>
-                <a:ea typeface="Calibri" pitchFamily="34" charset="-122"/>
-                <a:cs typeface="Calibri" pitchFamily="34" charset="-120"/>
+                <a:latin typeface="IBM Plex Mono" pitchFamily="34" charset="0"/>
+                <a:ea typeface="IBM Plex Mono" pitchFamily="34" charset="-122"/>
+                <a:cs typeface="IBM Plex Mono" pitchFamily="34" charset="-120"/>
               </a:rPr>
               <a:t>Evidence</a:t>
             </a:r>
@@ -18470,9 +18470,9 @@
                 <a:solidFill>
                   <a:srgbClr val="FFFFFF"/>
                 </a:solidFill>
-                <a:latin typeface="Calibri" pitchFamily="34" charset="0"/>
-                <a:ea typeface="Calibri" pitchFamily="34" charset="-122"/>
-                <a:cs typeface="Calibri" pitchFamily="34" charset="-120"/>
+                <a:latin typeface="IBM Plex Mono" pitchFamily="34" charset="0"/>
+                <a:ea typeface="IBM Plex Mono" pitchFamily="34" charset="-122"/>
+                <a:cs typeface="IBM Plex Mono" pitchFamily="34" charset="-120"/>
               </a:rPr>
               <a:t>Log</a:t>
             </a:r>
@@ -18565,9 +18565,9 @@
                 <a:solidFill>
                   <a:srgbClr val="FFFFFF"/>
                 </a:solidFill>
-                <a:latin typeface="Calibri" pitchFamily="34" charset="0"/>
-                <a:ea typeface="Calibri" pitchFamily="34" charset="-122"/>
-                <a:cs typeface="Calibri" pitchFamily="34" charset="-120"/>
+                <a:latin typeface="IBM Plex Mono" pitchFamily="34" charset="0"/>
+                <a:ea typeface="IBM Plex Mono" pitchFamily="34" charset="-122"/>
+                <a:cs typeface="IBM Plex Mono" pitchFamily="34" charset="-120"/>
               </a:rPr>
               <a:t>Deploy</a:t>
             </a:r>
@@ -18608,9 +18608,9 @@
                 <a:solidFill>
                   <a:srgbClr val="4A5568"/>
                 </a:solidFill>
-                <a:latin typeface="Calibri" pitchFamily="34" charset="0"/>
-                <a:ea typeface="Calibri" pitchFamily="34" charset="-122"/>
-                <a:cs typeface="Calibri" pitchFamily="34" charset="-120"/>
+                <a:latin typeface="IBM Plex Mono" pitchFamily="34" charset="0"/>
+                <a:ea typeface="IBM Plex Mono" pitchFamily="34" charset="-122"/>
+                <a:cs typeface="IBM Plex Mono" pitchFamily="34" charset="-120"/>
               </a:rPr>
               <a:t>Partner with Chelsea Main (Security Eng) on pipeline integration</a:t>
             </a:r>
@@ -18629,9 +18629,9 @@
                 <a:solidFill>
                   <a:srgbClr val="4A5568"/>
                 </a:solidFill>
-                <a:latin typeface="Calibri" pitchFamily="34" charset="0"/>
-                <a:ea typeface="Calibri" pitchFamily="34" charset="-122"/>
-                <a:cs typeface="Calibri" pitchFamily="34" charset="-120"/>
+                <a:latin typeface="IBM Plex Mono" pitchFamily="34" charset="0"/>
+                <a:ea typeface="IBM Plex Mono" pitchFamily="34" charset="-122"/>
+                <a:cs typeface="IBM Plex Mono" pitchFamily="34" charset="-120"/>
               </a:rPr>
               <a:t>Implement OPA with Rego policies for automated compliance</a:t>
             </a:r>
@@ -18650,9 +18650,9 @@
                 <a:solidFill>
                   <a:srgbClr val="4A5568"/>
                 </a:solidFill>
-                <a:latin typeface="Calibri" pitchFamily="34" charset="0"/>
-                <a:ea typeface="Calibri" pitchFamily="34" charset="-122"/>
-                <a:cs typeface="Calibri" pitchFamily="34" charset="-120"/>
+                <a:latin typeface="IBM Plex Mono" pitchFamily="34" charset="0"/>
+                <a:ea typeface="IBM Plex Mono" pitchFamily="34" charset="-122"/>
+                <a:cs typeface="IBM Plex Mono" pitchFamily="34" charset="-120"/>
               </a:rPr>
               <a:t>Auto-generate evidence from CI/CD execution logs</a:t>
             </a:r>
@@ -18671,9 +18671,9 @@
                 <a:solidFill>
                   <a:srgbClr val="4A5568"/>
                 </a:solidFill>
-                <a:latin typeface="Calibri" pitchFamily="34" charset="0"/>
-                <a:ea typeface="Calibri" pitchFamily="34" charset="-122"/>
-                <a:cs typeface="Calibri" pitchFamily="34" charset="-120"/>
+                <a:latin typeface="IBM Plex Mono" pitchFamily="34" charset="0"/>
+                <a:ea typeface="IBM Plex Mono" pitchFamily="34" charset="-122"/>
+                <a:cs typeface="IBM Plex Mono" pitchFamily="34" charset="-120"/>
               </a:rPr>
               <a:t>GRC-friendly dashboards from engineering telemetry</a:t>
             </a:r>
@@ -18737,9 +18737,9 @@
                 <a:solidFill>
                   <a:srgbClr val="2B6CB0"/>
                 </a:solidFill>
-                <a:latin typeface="Calibri" pitchFamily="34" charset="0"/>
-                <a:ea typeface="Calibri" pitchFamily="34" charset="-122"/>
-                <a:cs typeface="Calibri" pitchFamily="34" charset="-120"/>
+                <a:latin typeface="IBM Plex Mono" pitchFamily="34" charset="0"/>
+                <a:ea typeface="IBM Plex Mono" pitchFamily="34" charset="-122"/>
+                <a:cs typeface="IBM Plex Mono" pitchFamily="34" charset="-120"/>
               </a:rPr>
               <a:t>Engineering Integration Phases</a:t>
             </a:r>
@@ -18796,9 +18796,9 @@
                 <a:solidFill>
                   <a:srgbClr val="2B6CB0"/>
                 </a:solidFill>
-                <a:latin typeface="Calibri" pitchFamily="34" charset="0"/>
-                <a:ea typeface="Calibri" pitchFamily="34" charset="-122"/>
-                <a:cs typeface="Calibri" pitchFamily="34" charset="-120"/>
+                <a:latin typeface="IBM Plex Mono" pitchFamily="34" charset="0"/>
+                <a:ea typeface="IBM Plex Mono" pitchFamily="34" charset="-122"/>
+                <a:cs typeface="IBM Plex Mono" pitchFamily="34" charset="-120"/>
               </a:rPr>
               <a:t>Phase 1: Learn</a:t>
             </a:r>
@@ -18839,9 +18839,9 @@
                 <a:solidFill>
                   <a:srgbClr val="4A5568"/>
                 </a:solidFill>
-                <a:latin typeface="Calibri" pitchFamily="34" charset="0"/>
-                <a:ea typeface="Calibri" pitchFamily="34" charset="-122"/>
-                <a:cs typeface="Calibri" pitchFamily="34" charset="-120"/>
+                <a:latin typeface="IBM Plex Mono" pitchFamily="34" charset="0"/>
+                <a:ea typeface="IBM Plex Mono" pitchFamily="34" charset="-122"/>
+                <a:cs typeface="IBM Plex Mono" pitchFamily="34" charset="-120"/>
               </a:rPr>
               <a:t>Tech stack education (architecture, languages, cloud)</a:t>
             </a:r>
@@ -18860,9 +18860,9 @@
                 <a:solidFill>
                   <a:srgbClr val="4A5568"/>
                 </a:solidFill>
-                <a:latin typeface="Calibri" pitchFamily="34" charset="0"/>
-                <a:ea typeface="Calibri" pitchFamily="34" charset="-122"/>
-                <a:cs typeface="Calibri" pitchFamily="34" charset="-120"/>
+                <a:latin typeface="IBM Plex Mono" pitchFamily="34" charset="0"/>
+                <a:ea typeface="IBM Plex Mono" pitchFamily="34" charset="-122"/>
+                <a:cs typeface="IBM Plex Mono" pitchFamily="34" charset="-120"/>
               </a:rPr>
               <a:t>Shadow standups and sprint planning</a:t>
             </a:r>
@@ -18881,9 +18881,9 @@
                 <a:solidFill>
                   <a:srgbClr val="4A5568"/>
                 </a:solidFill>
-                <a:latin typeface="Calibri" pitchFamily="34" charset="0"/>
-                <a:ea typeface="Calibri" pitchFamily="34" charset="-122"/>
-                <a:cs typeface="Calibri" pitchFamily="34" charset="-120"/>
+                <a:latin typeface="IBM Plex Mono" pitchFamily="34" charset="0"/>
+                <a:ea typeface="IBM Plex Mono" pitchFamily="34" charset="-122"/>
+                <a:cs typeface="IBM Plex Mono" pitchFamily="34" charset="-120"/>
               </a:rPr>
               <a:t>Map compliance to engineering workflows</a:t>
             </a:r>
@@ -18940,9 +18940,9 @@
                 <a:solidFill>
                   <a:srgbClr val="0E7C86"/>
                 </a:solidFill>
-                <a:latin typeface="Calibri" pitchFamily="34" charset="0"/>
-                <a:ea typeface="Calibri" pitchFamily="34" charset="-122"/>
-                <a:cs typeface="Calibri" pitchFamily="34" charset="-120"/>
+                <a:latin typeface="IBM Plex Mono" pitchFamily="34" charset="0"/>
+                <a:ea typeface="IBM Plex Mono" pitchFamily="34" charset="-122"/>
+                <a:cs typeface="IBM Plex Mono" pitchFamily="34" charset="-120"/>
               </a:rPr>
               <a:t>Phase 2: Embed</a:t>
             </a:r>
@@ -18983,9 +18983,9 @@
                 <a:solidFill>
                   <a:srgbClr val="4A5568"/>
                 </a:solidFill>
-                <a:latin typeface="Calibri" pitchFamily="34" charset="0"/>
-                <a:ea typeface="Calibri" pitchFamily="34" charset="-122"/>
-                <a:cs typeface="Calibri" pitchFamily="34" charset="-120"/>
+                <a:latin typeface="IBM Plex Mono" pitchFamily="34" charset="0"/>
+                <a:ea typeface="IBM Plex Mono" pitchFamily="34" charset="-122"/>
+                <a:cs typeface="IBM Plex Mono" pitchFamily="34" charset="-120"/>
               </a:rPr>
               <a:t>GRC liaison in architecture reviews</a:t>
             </a:r>
@@ -19004,9 +19004,9 @@
                 <a:solidFill>
                   <a:srgbClr val="4A5568"/>
                 </a:solidFill>
-                <a:latin typeface="Calibri" pitchFamily="34" charset="0"/>
-                <a:ea typeface="Calibri" pitchFamily="34" charset="-122"/>
-                <a:cs typeface="Calibri" pitchFamily="34" charset="-120"/>
+                <a:latin typeface="IBM Plex Mono" pitchFamily="34" charset="0"/>
+                <a:ea typeface="IBM Plex Mono" pitchFamily="34" charset="-122"/>
+                <a:cs typeface="IBM Plex Mono" pitchFamily="34" charset="-120"/>
               </a:rPr>
               <a:t>Bi-weekly GRC-Engineering working group</a:t>
             </a:r>
@@ -19025,9 +19025,9 @@
                 <a:solidFill>
                   <a:srgbClr val="4A5568"/>
                 </a:solidFill>
-                <a:latin typeface="Calibri" pitchFamily="34" charset="0"/>
-                <a:ea typeface="Calibri" pitchFamily="34" charset="-122"/>
-                <a:cs typeface="Calibri" pitchFamily="34" charset="-120"/>
+                <a:latin typeface="IBM Plex Mono" pitchFamily="34" charset="0"/>
+                <a:ea typeface="IBM Plex Mono" pitchFamily="34" charset="-122"/>
+                <a:cs typeface="IBM Plex Mono" pitchFamily="34" charset="-120"/>
               </a:rPr>
               <a:t>Shared Slack channels and documentation</a:t>
             </a:r>
@@ -19084,9 +19084,9 @@
                 <a:solidFill>
                   <a:srgbClr val="4C51BF"/>
                 </a:solidFill>
-                <a:latin typeface="Calibri" pitchFamily="34" charset="0"/>
-                <a:ea typeface="Calibri" pitchFamily="34" charset="-122"/>
-                <a:cs typeface="Calibri" pitchFamily="34" charset="-120"/>
+                <a:latin typeface="IBM Plex Mono" pitchFamily="34" charset="0"/>
+                <a:ea typeface="IBM Plex Mono" pitchFamily="34" charset="-122"/>
+                <a:cs typeface="IBM Plex Mono" pitchFamily="34" charset="-120"/>
               </a:rPr>
               <a:t>Phase 3: Automate</a:t>
             </a:r>
@@ -19127,9 +19127,9 @@
                 <a:solidFill>
                   <a:srgbClr val="4A5568"/>
                 </a:solidFill>
-                <a:latin typeface="Calibri" pitchFamily="34" charset="0"/>
-                <a:ea typeface="Calibri" pitchFamily="34" charset="-122"/>
-                <a:cs typeface="Calibri" pitchFamily="34" charset="-120"/>
+                <a:latin typeface="IBM Plex Mono" pitchFamily="34" charset="0"/>
+                <a:ea typeface="IBM Plex Mono" pitchFamily="34" charset="-122"/>
+                <a:cs typeface="IBM Plex Mono" pitchFamily="34" charset="-120"/>
               </a:rPr>
               <a:t>Policy-as-code in CI/CD pipelines</a:t>
             </a:r>
@@ -19148,9 +19148,9 @@
                 <a:solidFill>
                   <a:srgbClr val="4A5568"/>
                 </a:solidFill>
-                <a:latin typeface="Calibri" pitchFamily="34" charset="0"/>
-                <a:ea typeface="Calibri" pitchFamily="34" charset="-122"/>
-                <a:cs typeface="Calibri" pitchFamily="34" charset="-120"/>
+                <a:latin typeface="IBM Plex Mono" pitchFamily="34" charset="0"/>
+                <a:ea typeface="IBM Plex Mono" pitchFamily="34" charset="-122"/>
+                <a:cs typeface="IBM Plex Mono" pitchFamily="34" charset="-120"/>
               </a:rPr>
               <a:t>Automated evidence replaces manual audits</a:t>
             </a:r>
@@ -19169,9 +19169,9 @@
                 <a:solidFill>
                   <a:srgbClr val="4A5568"/>
                 </a:solidFill>
-                <a:latin typeface="Calibri" pitchFamily="34" charset="0"/>
-                <a:ea typeface="Calibri" pitchFamily="34" charset="-122"/>
-                <a:cs typeface="Calibri" pitchFamily="34" charset="-120"/>
+                <a:latin typeface="IBM Plex Mono" pitchFamily="34" charset="0"/>
+                <a:ea typeface="IBM Plex Mono" pitchFamily="34" charset="-122"/>
+                <a:cs typeface="IBM Plex Mono" pitchFamily="34" charset="-120"/>
               </a:rPr>
               <a:t>Self-service compliance for engineering</a:t>
             </a:r>
@@ -19235,9 +19235,9 @@
                 <a:solidFill>
                   <a:srgbClr val="2B6CB0"/>
                 </a:solidFill>
-                <a:latin typeface="Calibri" pitchFamily="34" charset="0"/>
-                <a:ea typeface="Calibri" pitchFamily="34" charset="-122"/>
-                <a:cs typeface="Calibri" pitchFamily="34" charset="-120"/>
+                <a:latin typeface="IBM Plex Mono" pitchFamily="34" charset="0"/>
+                <a:ea typeface="IBM Plex Mono" pitchFamily="34" charset="-122"/>
+                <a:cs typeface="IBM Plex Mono" pitchFamily="34" charset="-120"/>
               </a:rPr>
               <a:t>INDUSTRY BEST PRACTICES - GRC AUTOMATION</a:t>
             </a:r>
@@ -19277,9 +19277,9 @@
                 <a:solidFill>
                   <a:srgbClr val="4C51BF"/>
                 </a:solidFill>
-                <a:latin typeface="Calibri" pitchFamily="34" charset="0"/>
-                <a:ea typeface="Calibri" pitchFamily="34" charset="-122"/>
-                <a:cs typeface="Calibri" pitchFamily="34" charset="-120"/>
+                <a:latin typeface="IBM Plex Mono" pitchFamily="34" charset="0"/>
+                <a:ea typeface="IBM Plex Mono" pitchFamily="34" charset="-122"/>
+                <a:cs typeface="IBM Plex Mono" pitchFamily="34" charset="-120"/>
               </a:rPr>
               <a:t>Shift-Left Compliance: </a:t>
             </a:r>
@@ -19294,9 +19294,9 @@
                 <a:solidFill>
                   <a:srgbClr val="4A5568"/>
                 </a:solidFill>
-                <a:latin typeface="Calibri" pitchFamily="34" charset="0"/>
-                <a:ea typeface="Calibri" pitchFamily="34" charset="-122"/>
-                <a:cs typeface="Calibri" pitchFamily="34" charset="-120"/>
+                <a:latin typeface="IBM Plex Mono" pitchFamily="34" charset="0"/>
+                <a:ea typeface="IBM Plex Mono" pitchFamily="34" charset="-122"/>
+                <a:cs typeface="IBM Plex Mono" pitchFamily="34" charset="-120"/>
               </a:rPr>
               <a:t>Integrate checks early in SDLC, not at deployment gate</a:t>
             </a:r>
@@ -19314,9 +19314,9 @@
                 <a:solidFill>
                   <a:srgbClr val="4C51BF"/>
                 </a:solidFill>
-                <a:latin typeface="Calibri" pitchFamily="34" charset="0"/>
-                <a:ea typeface="Calibri" pitchFamily="34" charset="-122"/>
-                <a:cs typeface="Calibri" pitchFamily="34" charset="-120"/>
+                <a:latin typeface="IBM Plex Mono" pitchFamily="34" charset="0"/>
+                <a:ea typeface="IBM Plex Mono" pitchFamily="34" charset="-122"/>
+                <a:cs typeface="IBM Plex Mono" pitchFamily="34" charset="-120"/>
               </a:rPr>
               <a:t>Continuous Compliance: </a:t>
             </a:r>
@@ -19331,9 +19331,9 @@
                 <a:solidFill>
                   <a:srgbClr val="4A5568"/>
                 </a:solidFill>
-                <a:latin typeface="Calibri" pitchFamily="34" charset="0"/>
-                <a:ea typeface="Calibri" pitchFamily="34" charset="-122"/>
-                <a:cs typeface="Calibri" pitchFamily="34" charset="-120"/>
+                <a:latin typeface="IBM Plex Mono" pitchFamily="34" charset="0"/>
+                <a:ea typeface="IBM Plex Mono" pitchFamily="34" charset="-122"/>
+                <a:cs typeface="IBM Plex Mono" pitchFamily="34" charset="-120"/>
               </a:rPr>
               <a:t>Replace point-in-time audits with real-time monitoring (NIST SP 800-137)</a:t>
             </a:r>
@@ -19351,9 +19351,9 @@
                 <a:solidFill>
                   <a:srgbClr val="4C51BF"/>
                 </a:solidFill>
-                <a:latin typeface="Calibri" pitchFamily="34" charset="0"/>
-                <a:ea typeface="Calibri" pitchFamily="34" charset="-122"/>
-                <a:cs typeface="Calibri" pitchFamily="34" charset="-120"/>
+                <a:latin typeface="IBM Plex Mono" pitchFamily="34" charset="0"/>
+                <a:ea typeface="IBM Plex Mono" pitchFamily="34" charset="-122"/>
+                <a:cs typeface="IBM Plex Mono" pitchFamily="34" charset="-120"/>
               </a:rPr>
               <a:t>Evidence-as-Code: </a:t>
             </a:r>
@@ -19368,9 +19368,9 @@
                 <a:solidFill>
                   <a:srgbClr val="4A5568"/>
                 </a:solidFill>
-                <a:latin typeface="Calibri" pitchFamily="34" charset="0"/>
-                <a:ea typeface="Calibri" pitchFamily="34" charset="-122"/>
-                <a:cs typeface="Calibri" pitchFamily="34" charset="-120"/>
+                <a:latin typeface="IBM Plex Mono" pitchFamily="34" charset="0"/>
+                <a:ea typeface="IBM Plex Mono" pitchFamily="34" charset="-122"/>
+                <a:cs typeface="IBM Plex Mono" pitchFamily="34" charset="-120"/>
               </a:rPr>
               <a:t>Generate audit evidence from infrastructure-as-code and CI/CD logs</a:t>
             </a:r>
@@ -19388,9 +19388,9 @@
                 <a:solidFill>
                   <a:srgbClr val="4C51BF"/>
                 </a:solidFill>
-                <a:latin typeface="Calibri" pitchFamily="34" charset="0"/>
-                <a:ea typeface="Calibri" pitchFamily="34" charset="-122"/>
-                <a:cs typeface="Calibri" pitchFamily="34" charset="-120"/>
+                <a:latin typeface="IBM Plex Mono" pitchFamily="34" charset="0"/>
+                <a:ea typeface="IBM Plex Mono" pitchFamily="34" charset="-122"/>
+                <a:cs typeface="IBM Plex Mono" pitchFamily="34" charset="-120"/>
               </a:rPr>
               <a:t>Risk-Based Prioritization: </a:t>
             </a:r>
@@ -19405,9 +19405,9 @@
                 <a:solidFill>
                   <a:srgbClr val="4A5568"/>
                 </a:solidFill>
-                <a:latin typeface="Calibri" pitchFamily="34" charset="0"/>
-                <a:ea typeface="Calibri" pitchFamily="34" charset="-122"/>
-                <a:cs typeface="Calibri" pitchFamily="34" charset="-120"/>
+                <a:latin typeface="IBM Plex Mono" pitchFamily="34" charset="0"/>
+                <a:ea typeface="IBM Plex Mono" pitchFamily="34" charset="-122"/>
+                <a:cs typeface="IBM Plex Mono" pitchFamily="34" charset="-120"/>
               </a:rPr>
               <a:t>Use FAIR or similar quantitative models to prioritize by business impact</a:t>
             </a:r>
@@ -19476,9 +19476,9 @@
                 <a:solidFill>
                   <a:srgbClr val="1A1D23"/>
                 </a:solidFill>
-                <a:latin typeface="Georgia" pitchFamily="34" charset="0"/>
-                <a:ea typeface="Georgia" pitchFamily="34" charset="-122"/>
-                <a:cs typeface="Georgia" pitchFamily="34" charset="-120"/>
+                <a:latin typeface="IBM Plex Mono" pitchFamily="34" charset="0"/>
+                <a:ea typeface="IBM Plex Mono" pitchFamily="34" charset="-122"/>
+                <a:cs typeface="IBM Plex Mono" pitchFamily="34" charset="-120"/>
               </a:rPr>
               <a:t>Metrics &amp; Value Framework</a:t>
             </a:r>
@@ -19538,9 +19538,9 @@
                 <a:solidFill>
                   <a:srgbClr val="718096"/>
                 </a:solidFill>
-                <a:latin typeface="Calibri" pitchFamily="34" charset="0"/>
-                <a:ea typeface="Calibri" pitchFamily="34" charset="-122"/>
-                <a:cs typeface="Calibri" pitchFamily="34" charset="-120"/>
+                <a:latin typeface="IBM Plex Mono" pitchFamily="34" charset="0"/>
+                <a:ea typeface="IBM Plex Mono" pitchFamily="34" charset="-122"/>
+                <a:cs typeface="IBM Plex Mono" pitchFamily="34" charset="-120"/>
               </a:rPr>
               <a:t>CONFIDENTIAL  |  GRC Program Modernization Roadmap 2026</a:t>
             </a:r>
@@ -19577,9 +19577,9 @@
                 <a:solidFill>
                   <a:srgbClr val="718096"/>
                 </a:solidFill>
-                <a:latin typeface="Calibri" pitchFamily="34" charset="0"/>
-                <a:ea typeface="Calibri" pitchFamily="34" charset="-122"/>
-                <a:cs typeface="Calibri" pitchFamily="34" charset="-120"/>
+                <a:latin typeface="IBM Plex Mono" pitchFamily="34" charset="0"/>
+                <a:ea typeface="IBM Plex Mono" pitchFamily="34" charset="-122"/>
+                <a:cs typeface="IBM Plex Mono" pitchFamily="34" charset="-120"/>
               </a:rPr>
               <a:t>9</a:t>
             </a:r>
@@ -19683,9 +19683,9 @@
                 <a:solidFill>
                   <a:srgbClr val="FFFFFF"/>
                 </a:solidFill>
-                <a:latin typeface="Georgia" pitchFamily="34" charset="0"/>
-                <a:ea typeface="Georgia" pitchFamily="34" charset="-122"/>
-                <a:cs typeface="Georgia" pitchFamily="34" charset="-120"/>
+                <a:latin typeface="IBM Plex Mono" pitchFamily="34" charset="0"/>
+                <a:ea typeface="IBM Plex Mono" pitchFamily="34" charset="-122"/>
+                <a:cs typeface="IBM Plex Mono" pitchFamily="34" charset="-120"/>
               </a:rPr>
               <a:t>$</a:t>
             </a:r>
@@ -19722,9 +19722,9 @@
                 <a:solidFill>
                   <a:srgbClr val="0E7C86"/>
                 </a:solidFill>
-                <a:latin typeface="Calibri" pitchFamily="34" charset="0"/>
-                <a:ea typeface="Calibri" pitchFamily="34" charset="-122"/>
-                <a:cs typeface="Calibri" pitchFamily="34" charset="-120"/>
+                <a:latin typeface="IBM Plex Mono" pitchFamily="34" charset="0"/>
+                <a:ea typeface="IBM Plex Mono" pitchFamily="34" charset="-122"/>
+                <a:cs typeface="IBM Plex Mono" pitchFamily="34" charset="-120"/>
               </a:rPr>
               <a:t>Revenue &amp; Business Value</a:t>
             </a:r>
@@ -19761,9 +19761,9 @@
                 <a:solidFill>
                   <a:srgbClr val="1A1D23"/>
                 </a:solidFill>
-                <a:latin typeface="Calibri" pitchFamily="34" charset="0"/>
-                <a:ea typeface="Calibri" pitchFamily="34" charset="-122"/>
-                <a:cs typeface="Calibri" pitchFamily="34" charset="-120"/>
+                <a:latin typeface="IBM Plex Mono" pitchFamily="34" charset="0"/>
+                <a:ea typeface="IBM Plex Mono" pitchFamily="34" charset="-122"/>
+                <a:cs typeface="IBM Plex Mono" pitchFamily="34" charset="-120"/>
               </a:rPr>
               <a:t>Revenue Enabled</a:t>
             </a:r>
@@ -19800,9 +19800,9 @@
                 <a:solidFill>
                   <a:srgbClr val="718096"/>
                 </a:solidFill>
-                <a:latin typeface="Calibri" pitchFamily="34" charset="0"/>
-                <a:ea typeface="Calibri" pitchFamily="34" charset="-122"/>
-                <a:cs typeface="Calibri" pitchFamily="34" charset="-120"/>
+                <a:latin typeface="IBM Plex Mono" pitchFamily="34" charset="0"/>
+                <a:ea typeface="IBM Plex Mono" pitchFamily="34" charset="-122"/>
+                <a:cs typeface="IBM Plex Mono" pitchFamily="34" charset="-120"/>
               </a:rPr>
               <a:t>Deal value for completed questionnaires/quarter</a:t>
             </a:r>
@@ -19839,9 +19839,9 @@
                 <a:solidFill>
                   <a:srgbClr val="1A1D23"/>
                 </a:solidFill>
-                <a:latin typeface="Calibri" pitchFamily="34" charset="0"/>
-                <a:ea typeface="Calibri" pitchFamily="34" charset="-122"/>
-                <a:cs typeface="Calibri" pitchFamily="34" charset="-120"/>
+                <a:latin typeface="IBM Plex Mono" pitchFamily="34" charset="0"/>
+                <a:ea typeface="IBM Plex Mono" pitchFamily="34" charset="-122"/>
+                <a:cs typeface="IBM Plex Mono" pitchFamily="34" charset="-120"/>
               </a:rPr>
               <a:t>Questionnaire TAT</a:t>
             </a:r>
@@ -19878,9 +19878,9 @@
                 <a:solidFill>
                   <a:srgbClr val="718096"/>
                 </a:solidFill>
-                <a:latin typeface="Calibri" pitchFamily="34" charset="0"/>
-                <a:ea typeface="Calibri" pitchFamily="34" charset="-122"/>
-                <a:cs typeface="Calibri" pitchFamily="34" charset="-120"/>
+                <a:latin typeface="IBM Plex Mono" pitchFamily="34" charset="0"/>
+                <a:ea typeface="IBM Plex Mono" pitchFamily="34" charset="-122"/>
+                <a:cs typeface="IBM Plex Mono" pitchFamily="34" charset="-120"/>
               </a:rPr>
               <a:t>Avg turnaround time (target: &lt;5 business days)</a:t>
             </a:r>
@@ -19917,9 +19917,9 @@
                 <a:solidFill>
                   <a:srgbClr val="1A1D23"/>
                 </a:solidFill>
-                <a:latin typeface="Calibri" pitchFamily="34" charset="0"/>
-                <a:ea typeface="Calibri" pitchFamily="34" charset="-122"/>
-                <a:cs typeface="Calibri" pitchFamily="34" charset="-120"/>
+                <a:latin typeface="IBM Plex Mono" pitchFamily="34" charset="0"/>
+                <a:ea typeface="IBM Plex Mono" pitchFamily="34" charset="-122"/>
+                <a:cs typeface="IBM Plex Mono" pitchFamily="34" charset="-120"/>
               </a:rPr>
               <a:t>Deal Acceleration</a:t>
             </a:r>
@@ -19956,9 +19956,9 @@
                 <a:solidFill>
                   <a:srgbClr val="718096"/>
                 </a:solidFill>
-                <a:latin typeface="Calibri" pitchFamily="34" charset="0"/>
-                <a:ea typeface="Calibri" pitchFamily="34" charset="-122"/>
-                <a:cs typeface="Calibri" pitchFamily="34" charset="-120"/>
+                <a:latin typeface="IBM Plex Mono" pitchFamily="34" charset="0"/>
+                <a:ea typeface="IBM Plex Mono" pitchFamily="34" charset="-122"/>
+                <a:cs typeface="IBM Plex Mono" pitchFamily="34" charset="-120"/>
               </a:rPr>
               <a:t>Reduction in sales cycle days</a:t>
             </a:r>
@@ -19995,9 +19995,9 @@
                 <a:solidFill>
                   <a:srgbClr val="1A1D23"/>
                 </a:solidFill>
-                <a:latin typeface="Calibri" pitchFamily="34" charset="0"/>
-                <a:ea typeface="Calibri" pitchFamily="34" charset="-122"/>
-                <a:cs typeface="Calibri" pitchFamily="34" charset="-120"/>
+                <a:latin typeface="IBM Plex Mono" pitchFamily="34" charset="0"/>
+                <a:ea typeface="IBM Plex Mono" pitchFamily="34" charset="-122"/>
+                <a:cs typeface="IBM Plex Mono" pitchFamily="34" charset="-120"/>
               </a:rPr>
               <a:t>Cost Avoidance</a:t>
             </a:r>
@@ -20034,9 +20034,9 @@
                 <a:solidFill>
                   <a:srgbClr val="718096"/>
                 </a:solidFill>
-                <a:latin typeface="Calibri" pitchFamily="34" charset="0"/>
-                <a:ea typeface="Calibri" pitchFamily="34" charset="-122"/>
-                <a:cs typeface="Calibri" pitchFamily="34" charset="-120"/>
+                <a:latin typeface="IBM Plex Mono" pitchFamily="34" charset="0"/>
+                <a:ea typeface="IBM Plex Mono" pitchFamily="34" charset="-122"/>
+                <a:cs typeface="IBM Plex Mono" pitchFamily="34" charset="-120"/>
               </a:rPr>
               <a:t>Estimated regulatory fines/breaches avoided</a:t>
             </a:r>
@@ -20140,9 +20140,9 @@
                 <a:solidFill>
                   <a:srgbClr val="FFFFFF"/>
                 </a:solidFill>
-                <a:latin typeface="Georgia" pitchFamily="34" charset="0"/>
-                <a:ea typeface="Georgia" pitchFamily="34" charset="-122"/>
-                <a:cs typeface="Georgia" pitchFamily="34" charset="-120"/>
+                <a:latin typeface="IBM Plex Mono" pitchFamily="34" charset="0"/>
+                <a:ea typeface="IBM Plex Mono" pitchFamily="34" charset="-122"/>
+                <a:cs typeface="IBM Plex Mono" pitchFamily="34" charset="-120"/>
               </a:rPr>
               <a:t>O</a:t>
             </a:r>
@@ -20179,9 +20179,9 @@
                 <a:solidFill>
                   <a:srgbClr val="2B6CB0"/>
                 </a:solidFill>
-                <a:latin typeface="Calibri" pitchFamily="34" charset="0"/>
-                <a:ea typeface="Calibri" pitchFamily="34" charset="-122"/>
-                <a:cs typeface="Calibri" pitchFamily="34" charset="-120"/>
+                <a:latin typeface="IBM Plex Mono" pitchFamily="34" charset="0"/>
+                <a:ea typeface="IBM Plex Mono" pitchFamily="34" charset="-122"/>
+                <a:cs typeface="IBM Plex Mono" pitchFamily="34" charset="-120"/>
               </a:rPr>
               <a:t>Operational Excellence</a:t>
             </a:r>
@@ -20218,9 +20218,9 @@
                 <a:solidFill>
                   <a:srgbClr val="1A1D23"/>
                 </a:solidFill>
-                <a:latin typeface="Calibri" pitchFamily="34" charset="0"/>
-                <a:ea typeface="Calibri" pitchFamily="34" charset="-122"/>
-                <a:cs typeface="Calibri" pitchFamily="34" charset="-120"/>
+                <a:latin typeface="IBM Plex Mono" pitchFamily="34" charset="0"/>
+                <a:ea typeface="IBM Plex Mono" pitchFamily="34" charset="-122"/>
+                <a:cs typeface="IBM Plex Mono" pitchFamily="34" charset="-120"/>
               </a:rPr>
               <a:t>Automation Rate</a:t>
             </a:r>
@@ -20257,9 +20257,9 @@
                 <a:solidFill>
                   <a:srgbClr val="718096"/>
                 </a:solidFill>
-                <a:latin typeface="Calibri" pitchFamily="34" charset="0"/>
-                <a:ea typeface="Calibri" pitchFamily="34" charset="-122"/>
-                <a:cs typeface="Calibri" pitchFamily="34" charset="-120"/>
+                <a:latin typeface="IBM Plex Mono" pitchFamily="34" charset="0"/>
+                <a:ea typeface="IBM Plex Mono" pitchFamily="34" charset="-122"/>
+                <a:cs typeface="IBM Plex Mono" pitchFamily="34" charset="-120"/>
               </a:rPr>
               <a:t>% evidence collected automatically vs. manually</a:t>
             </a:r>
@@ -20296,9 +20296,9 @@
                 <a:solidFill>
                   <a:srgbClr val="1A1D23"/>
                 </a:solidFill>
-                <a:latin typeface="Calibri" pitchFamily="34" charset="0"/>
-                <a:ea typeface="Calibri" pitchFamily="34" charset="-122"/>
-                <a:cs typeface="Calibri" pitchFamily="34" charset="-120"/>
+                <a:latin typeface="IBM Plex Mono" pitchFamily="34" charset="0"/>
+                <a:ea typeface="IBM Plex Mono" pitchFamily="34" charset="-122"/>
+                <a:cs typeface="IBM Plex Mono" pitchFamily="34" charset="-120"/>
               </a:rPr>
               <a:t>Audit Readiness</a:t>
             </a:r>
@@ -20335,9 +20335,9 @@
                 <a:solidFill>
                   <a:srgbClr val="718096"/>
                 </a:solidFill>
-                <a:latin typeface="Calibri" pitchFamily="34" charset="0"/>
-                <a:ea typeface="Calibri" pitchFamily="34" charset="-122"/>
-                <a:cs typeface="Calibri" pitchFamily="34" charset="-120"/>
+                <a:latin typeface="IBM Plex Mono" pitchFamily="34" charset="0"/>
+                <a:ea typeface="IBM Plex Mono" pitchFamily="34" charset="-122"/>
+                <a:cs typeface="IBM Plex Mono" pitchFamily="34" charset="-120"/>
               </a:rPr>
               <a:t>Time to produce full evidence package</a:t>
             </a:r>
@@ -20374,9 +20374,9 @@
                 <a:solidFill>
                   <a:srgbClr val="1A1D23"/>
                 </a:solidFill>
-                <a:latin typeface="Calibri" pitchFamily="34" charset="0"/>
-                <a:ea typeface="Calibri" pitchFamily="34" charset="-122"/>
-                <a:cs typeface="Calibri" pitchFamily="34" charset="-120"/>
+                <a:latin typeface="IBM Plex Mono" pitchFamily="34" charset="0"/>
+                <a:ea typeface="IBM Plex Mono" pitchFamily="34" charset="-122"/>
+                <a:cs typeface="IBM Plex Mono" pitchFamily="34" charset="-120"/>
               </a:rPr>
               <a:t>TPRM Coverage</a:t>
             </a:r>
@@ -20413,9 +20413,9 @@
                 <a:solidFill>
                   <a:srgbClr val="718096"/>
                 </a:solidFill>
-                <a:latin typeface="Calibri" pitchFamily="34" charset="0"/>
-                <a:ea typeface="Calibri" pitchFamily="34" charset="-122"/>
-                <a:cs typeface="Calibri" pitchFamily="34" charset="-120"/>
+                <a:latin typeface="IBM Plex Mono" pitchFamily="34" charset="0"/>
+                <a:ea typeface="IBM Plex Mono" pitchFamily="34" charset="-122"/>
+                <a:cs typeface="IBM Plex Mono" pitchFamily="34" charset="-120"/>
               </a:rPr>
               <a:t>% of vendors assessed within risk framework</a:t>
             </a:r>
@@ -20452,9 +20452,9 @@
                 <a:solidFill>
                   <a:srgbClr val="1A1D23"/>
                 </a:solidFill>
-                <a:latin typeface="Calibri" pitchFamily="34" charset="0"/>
-                <a:ea typeface="Calibri" pitchFamily="34" charset="-122"/>
-                <a:cs typeface="Calibri" pitchFamily="34" charset="-120"/>
+                <a:latin typeface="IBM Plex Mono" pitchFamily="34" charset="0"/>
+                <a:ea typeface="IBM Plex Mono" pitchFamily="34" charset="-122"/>
+                <a:cs typeface="IBM Plex Mono" pitchFamily="34" charset="-120"/>
               </a:rPr>
               <a:t>Control Effectiveness</a:t>
             </a:r>
@@ -20491,9 +20491,9 @@
                 <a:solidFill>
                   <a:srgbClr val="718096"/>
                 </a:solidFill>
-                <a:latin typeface="Calibri" pitchFamily="34" charset="0"/>
-                <a:ea typeface="Calibri" pitchFamily="34" charset="-122"/>
-                <a:cs typeface="Calibri" pitchFamily="34" charset="-120"/>
+                <a:latin typeface="IBM Plex Mono" pitchFamily="34" charset="0"/>
+                <a:ea typeface="IBM Plex Mono" pitchFamily="34" charset="-122"/>
+                <a:cs typeface="IBM Plex Mono" pitchFamily="34" charset="-120"/>
               </a:rPr>
               <a:t>% controls passing continuous monitoring</a:t>
             </a:r>
@@ -20597,9 +20597,9 @@
                 <a:solidFill>
                   <a:srgbClr val="FFFFFF"/>
                 </a:solidFill>
-                <a:latin typeface="Georgia" pitchFamily="34" charset="0"/>
-                <a:ea typeface="Georgia" pitchFamily="34" charset="-122"/>
-                <a:cs typeface="Georgia" pitchFamily="34" charset="-120"/>
+                <a:latin typeface="IBM Plex Mono" pitchFamily="34" charset="0"/>
+                <a:ea typeface="IBM Plex Mono" pitchFamily="34" charset="-122"/>
+                <a:cs typeface="IBM Plex Mono" pitchFamily="34" charset="-120"/>
               </a:rPr>
               <a:t>R</a:t>
             </a:r>
@@ -20636,9 +20636,9 @@
                 <a:solidFill>
                   <a:srgbClr val="4C51BF"/>
                 </a:solidFill>
-                <a:latin typeface="Calibri" pitchFamily="34" charset="0"/>
-                <a:ea typeface="Calibri" pitchFamily="34" charset="-122"/>
-                <a:cs typeface="Calibri" pitchFamily="34" charset="-120"/>
+                <a:latin typeface="IBM Plex Mono" pitchFamily="34" charset="0"/>
+                <a:ea typeface="IBM Plex Mono" pitchFamily="34" charset="-122"/>
+                <a:cs typeface="IBM Plex Mono" pitchFamily="34" charset="-120"/>
               </a:rPr>
               <a:t>Risk &amp; Maturity</a:t>
             </a:r>
@@ -20675,9 +20675,9 @@
                 <a:solidFill>
                   <a:srgbClr val="1A1D23"/>
                 </a:solidFill>
-                <a:latin typeface="Calibri" pitchFamily="34" charset="0"/>
-                <a:ea typeface="Calibri" pitchFamily="34" charset="-122"/>
-                <a:cs typeface="Calibri" pitchFamily="34" charset="-120"/>
+                <a:latin typeface="IBM Plex Mono" pitchFamily="34" charset="0"/>
+                <a:ea typeface="IBM Plex Mono" pitchFamily="34" charset="-122"/>
+                <a:cs typeface="IBM Plex Mono" pitchFamily="34" charset="-120"/>
               </a:rPr>
               <a:t>Program Maturity</a:t>
             </a:r>
@@ -20714,9 +20714,9 @@
                 <a:solidFill>
                   <a:srgbClr val="718096"/>
                 </a:solidFill>
-                <a:latin typeface="Calibri" pitchFamily="34" charset="0"/>
-                <a:ea typeface="Calibri" pitchFamily="34" charset="-122"/>
-                <a:cs typeface="Calibri" pitchFamily="34" charset="-120"/>
+                <a:latin typeface="IBM Plex Mono" pitchFamily="34" charset="0"/>
+                <a:ea typeface="IBM Plex Mono" pitchFamily="34" charset="-122"/>
+                <a:cs typeface="IBM Plex Mono" pitchFamily="34" charset="-120"/>
               </a:rPr>
               <a:t>NIST CSF maturity score (target: Tier 3)</a:t>
             </a:r>
@@ -20753,9 +20753,9 @@
                 <a:solidFill>
                   <a:srgbClr val="1A1D23"/>
                 </a:solidFill>
-                <a:latin typeface="Calibri" pitchFamily="34" charset="0"/>
-                <a:ea typeface="Calibri" pitchFamily="34" charset="-122"/>
-                <a:cs typeface="Calibri" pitchFamily="34" charset="-120"/>
+                <a:latin typeface="IBM Plex Mono" pitchFamily="34" charset="0"/>
+                <a:ea typeface="IBM Plex Mono" pitchFamily="34" charset="-122"/>
+                <a:cs typeface="IBM Plex Mono" pitchFamily="34" charset="-120"/>
               </a:rPr>
               <a:t>Risk Posture</a:t>
             </a:r>
@@ -20792,9 +20792,9 @@
                 <a:solidFill>
                   <a:srgbClr val="718096"/>
                 </a:solidFill>
-                <a:latin typeface="Calibri" pitchFamily="34" charset="0"/>
-                <a:ea typeface="Calibri" pitchFamily="34" charset="-122"/>
-                <a:cs typeface="Calibri" pitchFamily="34" charset="-120"/>
+                <a:latin typeface="IBM Plex Mono" pitchFamily="34" charset="0"/>
+                <a:ea typeface="IBM Plex Mono" pitchFamily="34" charset="-122"/>
+                <a:cs typeface="IBM Plex Mono" pitchFamily="34" charset="-120"/>
               </a:rPr>
               <a:t>Quantified risk trend (FAIR methodology)</a:t>
             </a:r>
@@ -20831,9 +20831,9 @@
                 <a:solidFill>
                   <a:srgbClr val="1A1D23"/>
                 </a:solidFill>
-                <a:latin typeface="Calibri" pitchFamily="34" charset="0"/>
-                <a:ea typeface="Calibri" pitchFamily="34" charset="-122"/>
-                <a:cs typeface="Calibri" pitchFamily="34" charset="-120"/>
+                <a:latin typeface="IBM Plex Mono" pitchFamily="34" charset="0"/>
+                <a:ea typeface="IBM Plex Mono" pitchFamily="34" charset="-122"/>
+                <a:cs typeface="IBM Plex Mono" pitchFamily="34" charset="-120"/>
               </a:rPr>
               <a:t>Finding Closure</a:t>
             </a:r>
@@ -20870,9 +20870,9 @@
                 <a:solidFill>
                   <a:srgbClr val="718096"/>
                 </a:solidFill>
-                <a:latin typeface="Calibri" pitchFamily="34" charset="0"/>
-                <a:ea typeface="Calibri" pitchFamily="34" charset="-122"/>
-                <a:cs typeface="Calibri" pitchFamily="34" charset="-120"/>
+                <a:latin typeface="IBM Plex Mono" pitchFamily="34" charset="0"/>
+                <a:ea typeface="IBM Plex Mono" pitchFamily="34" charset="-122"/>
+                <a:cs typeface="IBM Plex Mono" pitchFamily="34" charset="-120"/>
               </a:rPr>
               <a:t>Mean time to remediate findings</a:t>
             </a:r>
@@ -20909,9 +20909,9 @@
                 <a:solidFill>
                   <a:srgbClr val="1A1D23"/>
                 </a:solidFill>
-                <a:latin typeface="Calibri" pitchFamily="34" charset="0"/>
-                <a:ea typeface="Calibri" pitchFamily="34" charset="-122"/>
-                <a:cs typeface="Calibri" pitchFamily="34" charset="-120"/>
+                <a:latin typeface="IBM Plex Mono" pitchFamily="34" charset="0"/>
+                <a:ea typeface="IBM Plex Mono" pitchFamily="34" charset="-122"/>
+                <a:cs typeface="IBM Plex Mono" pitchFamily="34" charset="-120"/>
               </a:rPr>
               <a:t>Policy Currency</a:t>
             </a:r>
@@ -20948,9 +20948,9 @@
                 <a:solidFill>
                   <a:srgbClr val="718096"/>
                 </a:solidFill>
-                <a:latin typeface="Calibri" pitchFamily="34" charset="0"/>
-                <a:ea typeface="Calibri" pitchFamily="34" charset="-122"/>
-                <a:cs typeface="Calibri" pitchFamily="34" charset="-120"/>
+                <a:latin typeface="IBM Plex Mono" pitchFamily="34" charset="0"/>
+                <a:ea typeface="IBM Plex Mono" pitchFamily="34" charset="-122"/>
+                <a:cs typeface="IBM Plex Mono" pitchFamily="34" charset="-120"/>
               </a:rPr>
               <a:t>% policies reviewed within cycle</a:t>
             </a:r>
@@ -21007,9 +21007,9 @@
                 <a:solidFill>
                   <a:srgbClr val="2B6CB0"/>
                 </a:solidFill>
-                <a:latin typeface="Calibri" pitchFamily="34" charset="0"/>
-                <a:ea typeface="Calibri" pitchFamily="34" charset="-122"/>
-                <a:cs typeface="Calibri" pitchFamily="34" charset="-120"/>
+                <a:latin typeface="IBM Plex Mono" pitchFamily="34" charset="0"/>
+                <a:ea typeface="IBM Plex Mono" pitchFamily="34" charset="-122"/>
+                <a:cs typeface="IBM Plex Mono" pitchFamily="34" charset="-120"/>
               </a:rPr>
               <a:t>DASHBOARD DELIVERY:  </a:t>
             </a:r>
@@ -21021,9 +21021,9 @@
                 <a:solidFill>
                   <a:srgbClr val="4A5568"/>
                 </a:solidFill>
-                <a:latin typeface="Calibri" pitchFamily="34" charset="0"/>
-                <a:ea typeface="Calibri" pitchFamily="34" charset="-122"/>
-                <a:cs typeface="Calibri" pitchFamily="34" charset="-120"/>
+                <a:latin typeface="IBM Plex Mono" pitchFamily="34" charset="0"/>
+                <a:ea typeface="IBM Plex Mono" pitchFamily="34" charset="-122"/>
+                <a:cs typeface="IBM Plex Mono" pitchFamily="34" charset="-120"/>
               </a:rPr>
               <a:t>Executive dashboard (monthly CISO)  |  Operational dashboard (daily team use)  |  Customer Trust revenue dashboard (sales alignment)</a:t>
             </a:r>
